--- a/03-课件PPT/讲次版/第5章-3-讲次 5-3 · Skill 系统.pptx
+++ b/03-课件PPT/讲次版/第5章-3-讲次 5-3 · Skill 系统.pptx
@@ -4991,7 +4991,7 @@
                 </a:solidFill>
                 <a:latin typeface="PingFang SC"/>
               </a:rPr>
-              <a:t>未命中→通用流程|阈值 2 过滤噪声</a:t>
+              <a:t>未命中→通用流程</a:t>
             </a:r>
           </a:p>
         </p:txBody>
@@ -7221,7 +7221,7 @@
                 </a:solidFill>
                 <a:latin typeface="PingFang SC"/>
               </a:rPr>
-              <a:t>目录随仓库走|一次沉淀处处受益</a:t>
+              <a:t>目录随仓库走</a:t>
             </a:r>
           </a:p>
         </p:txBody>
@@ -7451,14 +7451,1200 @@
       </p:sp>
       <p:sp>
         <p:nvSpPr>
-          <p:cNvPr id="5" name="TextBox 4"/>
+          <p:cNvPr id="5" name="Rounded Rectangle 4"/>
+          <p:cNvSpPr/>
+          <p:nvPr/>
+        </p:nvSpPr>
+        <p:spPr>
+          <a:xfrm>
+            <a:off x="857250" y="2667000"/>
+            <a:ext cx="2162175" cy="1143000"/>
+          </a:xfrm>
+          <a:prstGeom prst="roundRect">
+            <a:avLst>
+              <a:gd name="adj" fmla="val 8000"/>
+            </a:avLst>
+          </a:prstGeom>
+          <a:solidFill>
+            <a:srgbClr val="FFFFFF"/>
+          </a:solidFill>
+          <a:ln w="12700">
+            <a:solidFill>
+              <a:srgbClr val="2563EB"/>
+            </a:solidFill>
+          </a:ln>
+          <a:effectLst/>
+        </p:spPr>
+        <p:style>
+          <a:lnRef idx="1">
+            <a:schemeClr val="accent1"/>
+          </a:lnRef>
+          <a:fillRef idx="3">
+            <a:schemeClr val="accent1"/>
+          </a:fillRef>
+          <a:effectRef idx="2">
+            <a:schemeClr val="accent1"/>
+          </a:effectRef>
+          <a:fontRef idx="minor">
+            <a:schemeClr val="lt1"/>
+          </a:fontRef>
+        </p:style>
+        <p:txBody>
+          <a:bodyPr rtlCol="0" anchor="ctr"/>
+          <a:lstStyle/>
+          <a:p>
+            <a:pPr algn="ctr"/>
+          </a:p>
+        </p:txBody>
+      </p:sp>
+      <p:sp>
+        <p:nvSpPr>
+          <p:cNvPr id="6" name="Rectangle 5"/>
+          <p:cNvSpPr/>
+          <p:nvPr/>
+        </p:nvSpPr>
+        <p:spPr>
+          <a:xfrm>
+            <a:off x="857250" y="2667000"/>
+            <a:ext cx="2162175" cy="57150"/>
+          </a:xfrm>
+          <a:prstGeom prst="rect">
+            <a:avLst/>
+          </a:prstGeom>
+          <a:solidFill>
+            <a:srgbClr val="2563EB"/>
+          </a:solidFill>
+          <a:ln>
+            <a:noFill/>
+          </a:ln>
+          <a:effectLst/>
+        </p:spPr>
+        <p:style>
+          <a:lnRef idx="1">
+            <a:schemeClr val="accent1"/>
+          </a:lnRef>
+          <a:fillRef idx="3">
+            <a:schemeClr val="accent1"/>
+          </a:fillRef>
+          <a:effectRef idx="2">
+            <a:schemeClr val="accent1"/>
+          </a:effectRef>
+          <a:fontRef idx="minor">
+            <a:schemeClr val="lt1"/>
+          </a:fontRef>
+        </p:style>
+        <p:txBody>
+          <a:bodyPr rtlCol="0" anchor="ctr"/>
+          <a:lstStyle/>
+          <a:p>
+            <a:pPr algn="ctr"/>
+          </a:p>
+        </p:txBody>
+      </p:sp>
+      <p:sp>
+        <p:nvSpPr>
+          <p:cNvPr id="7" name="Rounded Rectangle 6"/>
+          <p:cNvSpPr/>
+          <p:nvPr/>
+        </p:nvSpPr>
+        <p:spPr>
+          <a:xfrm>
+            <a:off x="1795462" y="2524125"/>
+            <a:ext cx="285750" cy="285750"/>
+          </a:xfrm>
+          <a:prstGeom prst="roundRect">
+            <a:avLst>
+              <a:gd name="adj" fmla="val 8000"/>
+            </a:avLst>
+          </a:prstGeom>
+          <a:solidFill>
+            <a:srgbClr val="2563EB"/>
+          </a:solidFill>
+          <a:ln>
+            <a:noFill/>
+          </a:ln>
+          <a:effectLst/>
+        </p:spPr>
+        <p:style>
+          <a:lnRef idx="1">
+            <a:schemeClr val="accent1"/>
+          </a:lnRef>
+          <a:fillRef idx="3">
+            <a:schemeClr val="accent1"/>
+          </a:fillRef>
+          <a:effectRef idx="2">
+            <a:schemeClr val="accent1"/>
+          </a:effectRef>
+          <a:fontRef idx="minor">
+            <a:schemeClr val="lt1"/>
+          </a:fontRef>
+        </p:style>
+        <p:txBody>
+          <a:bodyPr rtlCol="0" anchor="ctr"/>
+          <a:lstStyle/>
+          <a:p>
+            <a:pPr algn="ctr"/>
+          </a:p>
+        </p:txBody>
+      </p:sp>
+      <p:sp>
+        <p:nvSpPr>
+          <p:cNvPr id="8" name="TextBox 7"/>
           <p:cNvSpPr txBox="1"/>
           <p:nvPr/>
         </p:nvSpPr>
         <p:spPr>
           <a:xfrm>
-            <a:off x="9334500" y="0"/>
-            <a:ext cx="2667000" cy="704850"/>
+            <a:off x="1795462" y="2514600"/>
+            <a:ext cx="285750" cy="285750"/>
+          </a:xfrm>
+          <a:prstGeom prst="rect">
+            <a:avLst/>
+          </a:prstGeom>
+          <a:noFill/>
+        </p:spPr>
+        <p:txBody>
+          <a:bodyPr wrap="square" anchor="ctr">
+            <a:spAutoFit/>
+          </a:bodyPr>
+          <a:lstStyle/>
+          <a:p>
+            <a:pPr algn="ctr">
+              <a:lnSpc>
+                <a:spcPct val="100000"/>
+              </a:lnSpc>
+            </a:pPr>
+            <a:r>
+              <a:rPr sz="1300" b="1">
+                <a:solidFill>
+                  <a:srgbClr val="FFFFFF"/>
+                </a:solidFill>
+                <a:latin typeface="PingFang SC"/>
+              </a:rPr>
+              <a:t>1</a:t>
+            </a:r>
+          </a:p>
+        </p:txBody>
+      </p:sp>
+      <p:sp>
+        <p:nvSpPr>
+          <p:cNvPr id="9" name="TextBox 8"/>
+          <p:cNvSpPr txBox="1"/>
+          <p:nvPr/>
+        </p:nvSpPr>
+        <p:spPr>
+          <a:xfrm>
+            <a:off x="933450" y="2800350"/>
+            <a:ext cx="2009775" cy="952500"/>
+          </a:xfrm>
+          <a:prstGeom prst="rect">
+            <a:avLst/>
+          </a:prstGeom>
+          <a:noFill/>
+        </p:spPr>
+        <p:txBody>
+          <a:bodyPr wrap="square" anchor="ctr">
+            <a:spAutoFit/>
+          </a:bodyPr>
+          <a:lstStyle/>
+          <a:p>
+            <a:pPr algn="ctr">
+              <a:lnSpc>
+                <a:spcPct val="100000"/>
+              </a:lnSpc>
+            </a:pPr>
+            <a:r>
+              <a:rPr sz="1200" b="1">
+                <a:solidFill>
+                  <a:srgbClr val="475569"/>
+                </a:solidFill>
+                <a:latin typeface="PingFang SC"/>
+              </a:rPr>
+              <a:t>顺序:上游产出喂下游</a:t>
+            </a:r>
+          </a:p>
+        </p:txBody>
+      </p:sp>
+      <p:sp>
+        <p:nvSpPr>
+          <p:cNvPr id="10" name="Rounded Rectangle 9"/>
+          <p:cNvSpPr/>
+          <p:nvPr/>
+        </p:nvSpPr>
+        <p:spPr>
+          <a:xfrm>
+            <a:off x="3629025" y="2667000"/>
+            <a:ext cx="2162175" cy="1143000"/>
+          </a:xfrm>
+          <a:prstGeom prst="roundRect">
+            <a:avLst>
+              <a:gd name="adj" fmla="val 8000"/>
+            </a:avLst>
+          </a:prstGeom>
+          <a:solidFill>
+            <a:srgbClr val="FFFFFF"/>
+          </a:solidFill>
+          <a:ln w="12700">
+            <a:solidFill>
+              <a:srgbClr val="14B8A6"/>
+            </a:solidFill>
+          </a:ln>
+          <a:effectLst/>
+        </p:spPr>
+        <p:style>
+          <a:lnRef idx="1">
+            <a:schemeClr val="accent1"/>
+          </a:lnRef>
+          <a:fillRef idx="3">
+            <a:schemeClr val="accent1"/>
+          </a:fillRef>
+          <a:effectRef idx="2">
+            <a:schemeClr val="accent1"/>
+          </a:effectRef>
+          <a:fontRef idx="minor">
+            <a:schemeClr val="lt1"/>
+          </a:fontRef>
+        </p:style>
+        <p:txBody>
+          <a:bodyPr rtlCol="0" anchor="ctr"/>
+          <a:lstStyle/>
+          <a:p>
+            <a:pPr algn="ctr"/>
+          </a:p>
+        </p:txBody>
+      </p:sp>
+      <p:sp>
+        <p:nvSpPr>
+          <p:cNvPr id="11" name="Rectangle 10"/>
+          <p:cNvSpPr/>
+          <p:nvPr/>
+        </p:nvSpPr>
+        <p:spPr>
+          <a:xfrm>
+            <a:off x="3629025" y="2667000"/>
+            <a:ext cx="2162175" cy="57150"/>
+          </a:xfrm>
+          <a:prstGeom prst="rect">
+            <a:avLst/>
+          </a:prstGeom>
+          <a:solidFill>
+            <a:srgbClr val="14B8A6"/>
+          </a:solidFill>
+          <a:ln>
+            <a:noFill/>
+          </a:ln>
+          <a:effectLst/>
+        </p:spPr>
+        <p:style>
+          <a:lnRef idx="1">
+            <a:schemeClr val="accent1"/>
+          </a:lnRef>
+          <a:fillRef idx="3">
+            <a:schemeClr val="accent1"/>
+          </a:fillRef>
+          <a:effectRef idx="2">
+            <a:schemeClr val="accent1"/>
+          </a:effectRef>
+          <a:fontRef idx="minor">
+            <a:schemeClr val="lt1"/>
+          </a:fontRef>
+        </p:style>
+        <p:txBody>
+          <a:bodyPr rtlCol="0" anchor="ctr"/>
+          <a:lstStyle/>
+          <a:p>
+            <a:pPr algn="ctr"/>
+          </a:p>
+        </p:txBody>
+      </p:sp>
+      <p:sp>
+        <p:nvSpPr>
+          <p:cNvPr id="12" name="Rounded Rectangle 11"/>
+          <p:cNvSpPr/>
+          <p:nvPr/>
+        </p:nvSpPr>
+        <p:spPr>
+          <a:xfrm>
+            <a:off x="4567237" y="2524125"/>
+            <a:ext cx="285750" cy="285750"/>
+          </a:xfrm>
+          <a:prstGeom prst="roundRect">
+            <a:avLst>
+              <a:gd name="adj" fmla="val 8000"/>
+            </a:avLst>
+          </a:prstGeom>
+          <a:solidFill>
+            <a:srgbClr val="14B8A6"/>
+          </a:solidFill>
+          <a:ln>
+            <a:noFill/>
+          </a:ln>
+          <a:effectLst/>
+        </p:spPr>
+        <p:style>
+          <a:lnRef idx="1">
+            <a:schemeClr val="accent1"/>
+          </a:lnRef>
+          <a:fillRef idx="3">
+            <a:schemeClr val="accent1"/>
+          </a:fillRef>
+          <a:effectRef idx="2">
+            <a:schemeClr val="accent1"/>
+          </a:effectRef>
+          <a:fontRef idx="minor">
+            <a:schemeClr val="lt1"/>
+          </a:fontRef>
+        </p:style>
+        <p:txBody>
+          <a:bodyPr rtlCol="0" anchor="ctr"/>
+          <a:lstStyle/>
+          <a:p>
+            <a:pPr algn="ctr"/>
+          </a:p>
+        </p:txBody>
+      </p:sp>
+      <p:sp>
+        <p:nvSpPr>
+          <p:cNvPr id="13" name="TextBox 12"/>
+          <p:cNvSpPr txBox="1"/>
+          <p:nvPr/>
+        </p:nvSpPr>
+        <p:spPr>
+          <a:xfrm>
+            <a:off x="4567237" y="2514600"/>
+            <a:ext cx="285750" cy="285750"/>
+          </a:xfrm>
+          <a:prstGeom prst="rect">
+            <a:avLst/>
+          </a:prstGeom>
+          <a:noFill/>
+        </p:spPr>
+        <p:txBody>
+          <a:bodyPr wrap="square" anchor="ctr">
+            <a:spAutoFit/>
+          </a:bodyPr>
+          <a:lstStyle/>
+          <a:p>
+            <a:pPr algn="ctr">
+              <a:lnSpc>
+                <a:spcPct val="100000"/>
+              </a:lnSpc>
+            </a:pPr>
+            <a:r>
+              <a:rPr sz="1300" b="1">
+                <a:solidFill>
+                  <a:srgbClr val="FFFFFF"/>
+                </a:solidFill>
+                <a:latin typeface="PingFang SC"/>
+              </a:rPr>
+              <a:t>2</a:t>
+            </a:r>
+          </a:p>
+        </p:txBody>
+      </p:sp>
+      <p:sp>
+        <p:nvSpPr>
+          <p:cNvPr id="14" name="TextBox 13"/>
+          <p:cNvSpPr txBox="1"/>
+          <p:nvPr/>
+        </p:nvSpPr>
+        <p:spPr>
+          <a:xfrm>
+            <a:off x="3705225" y="2800350"/>
+            <a:ext cx="2009775" cy="952500"/>
+          </a:xfrm>
+          <a:prstGeom prst="rect">
+            <a:avLst/>
+          </a:prstGeom>
+          <a:noFill/>
+        </p:spPr>
+        <p:txBody>
+          <a:bodyPr wrap="square" anchor="ctr">
+            <a:spAutoFit/>
+          </a:bodyPr>
+          <a:lstStyle/>
+          <a:p>
+            <a:pPr algn="ctr">
+              <a:lnSpc>
+                <a:spcPct val="100000"/>
+              </a:lnSpc>
+            </a:pPr>
+            <a:r>
+              <a:rPr sz="1200" b="1">
+                <a:solidFill>
+                  <a:srgbClr val="475569"/>
+                </a:solidFill>
+                <a:latin typeface="PingFang SC"/>
+              </a:rPr>
+              <a:t>并行:独立子任务 gather</a:t>
+            </a:r>
+          </a:p>
+        </p:txBody>
+      </p:sp>
+      <p:cxnSp>
+        <p:nvCxnSpPr>
+          <p:cNvPr id="15" name="Connector 14"/>
+          <p:cNvCxnSpPr/>
+          <p:nvPr/>
+        </p:nvCxnSpPr>
+        <p:spPr>
+          <a:xfrm>
+            <a:off x="3076575" y="3238500"/>
+            <a:ext cx="476250" cy="0"/>
+          </a:xfrm>
+          <a:prstGeom prst="line">
+            <a:avLst/>
+          </a:prstGeom>
+          <a:ln w="20320">
+            <a:solidFill>
+              <a:srgbClr val="475569"/>
+            </a:solidFill>
+          </a:ln>
+        </p:spPr>
+        <p:style>
+          <a:lnRef idx="2">
+            <a:schemeClr val="accent1"/>
+          </a:lnRef>
+          <a:fillRef idx="0">
+            <a:schemeClr val="accent1"/>
+          </a:fillRef>
+          <a:effectRef idx="1">
+            <a:schemeClr val="accent1"/>
+          </a:effectRef>
+          <a:fontRef idx="minor">
+            <a:schemeClr val="tx1"/>
+          </a:fontRef>
+        </p:style>
+      </p:cxnSp>
+      <p:sp>
+        <p:nvSpPr>
+          <p:cNvPr id="16" name="Isosceles Triangle 15"/>
+          <p:cNvSpPr/>
+          <p:nvPr/>
+        </p:nvSpPr>
+        <p:spPr>
+          <a:xfrm rot="5400000">
+            <a:off x="3467101" y="3195638"/>
+            <a:ext cx="85725" cy="85725"/>
+          </a:xfrm>
+          <a:prstGeom prst="triangle">
+            <a:avLst/>
+          </a:prstGeom>
+          <a:solidFill>
+            <a:srgbClr val="475569"/>
+          </a:solidFill>
+          <a:ln>
+            <a:noFill/>
+          </a:ln>
+          <a:effectLst/>
+        </p:spPr>
+        <p:style>
+          <a:lnRef idx="1">
+            <a:schemeClr val="accent1"/>
+          </a:lnRef>
+          <a:fillRef idx="3">
+            <a:schemeClr val="accent1"/>
+          </a:fillRef>
+          <a:effectRef idx="2">
+            <a:schemeClr val="accent1"/>
+          </a:effectRef>
+          <a:fontRef idx="minor">
+            <a:schemeClr val="lt1"/>
+          </a:fontRef>
+        </p:style>
+        <p:txBody>
+          <a:bodyPr rtlCol="0" anchor="ctr"/>
+          <a:lstStyle/>
+          <a:p>
+            <a:pPr algn="ctr"/>
+          </a:p>
+        </p:txBody>
+      </p:sp>
+      <p:sp>
+        <p:nvSpPr>
+          <p:cNvPr id="17" name="Rounded Rectangle 16"/>
+          <p:cNvSpPr/>
+          <p:nvPr/>
+        </p:nvSpPr>
+        <p:spPr>
+          <a:xfrm>
+            <a:off x="6400800" y="2667000"/>
+            <a:ext cx="2162175" cy="1143000"/>
+          </a:xfrm>
+          <a:prstGeom prst="roundRect">
+            <a:avLst>
+              <a:gd name="adj" fmla="val 8000"/>
+            </a:avLst>
+          </a:prstGeom>
+          <a:solidFill>
+            <a:srgbClr val="FFFFFF"/>
+          </a:solidFill>
+          <a:ln w="12700">
+            <a:solidFill>
+              <a:srgbClr val="8B5CF6"/>
+            </a:solidFill>
+          </a:ln>
+          <a:effectLst/>
+        </p:spPr>
+        <p:style>
+          <a:lnRef idx="1">
+            <a:schemeClr val="accent1"/>
+          </a:lnRef>
+          <a:fillRef idx="3">
+            <a:schemeClr val="accent1"/>
+          </a:fillRef>
+          <a:effectRef idx="2">
+            <a:schemeClr val="accent1"/>
+          </a:effectRef>
+          <a:fontRef idx="minor">
+            <a:schemeClr val="lt1"/>
+          </a:fontRef>
+        </p:style>
+        <p:txBody>
+          <a:bodyPr rtlCol="0" anchor="ctr"/>
+          <a:lstStyle/>
+          <a:p>
+            <a:pPr algn="ctr"/>
+          </a:p>
+        </p:txBody>
+      </p:sp>
+      <p:sp>
+        <p:nvSpPr>
+          <p:cNvPr id="18" name="Rectangle 17"/>
+          <p:cNvSpPr/>
+          <p:nvPr/>
+        </p:nvSpPr>
+        <p:spPr>
+          <a:xfrm>
+            <a:off x="6400800" y="2667000"/>
+            <a:ext cx="2162175" cy="57150"/>
+          </a:xfrm>
+          <a:prstGeom prst="rect">
+            <a:avLst/>
+          </a:prstGeom>
+          <a:solidFill>
+            <a:srgbClr val="8B5CF6"/>
+          </a:solidFill>
+          <a:ln>
+            <a:noFill/>
+          </a:ln>
+          <a:effectLst/>
+        </p:spPr>
+        <p:style>
+          <a:lnRef idx="1">
+            <a:schemeClr val="accent1"/>
+          </a:lnRef>
+          <a:fillRef idx="3">
+            <a:schemeClr val="accent1"/>
+          </a:fillRef>
+          <a:effectRef idx="2">
+            <a:schemeClr val="accent1"/>
+          </a:effectRef>
+          <a:fontRef idx="minor">
+            <a:schemeClr val="lt1"/>
+          </a:fontRef>
+        </p:style>
+        <p:txBody>
+          <a:bodyPr rtlCol="0" anchor="ctr"/>
+          <a:lstStyle/>
+          <a:p>
+            <a:pPr algn="ctr"/>
+          </a:p>
+        </p:txBody>
+      </p:sp>
+      <p:sp>
+        <p:nvSpPr>
+          <p:cNvPr id="19" name="Rounded Rectangle 18"/>
+          <p:cNvSpPr/>
+          <p:nvPr/>
+        </p:nvSpPr>
+        <p:spPr>
+          <a:xfrm>
+            <a:off x="7339012" y="2524125"/>
+            <a:ext cx="285750" cy="285750"/>
+          </a:xfrm>
+          <a:prstGeom prst="roundRect">
+            <a:avLst>
+              <a:gd name="adj" fmla="val 8000"/>
+            </a:avLst>
+          </a:prstGeom>
+          <a:solidFill>
+            <a:srgbClr val="8B5CF6"/>
+          </a:solidFill>
+          <a:ln>
+            <a:noFill/>
+          </a:ln>
+          <a:effectLst/>
+        </p:spPr>
+        <p:style>
+          <a:lnRef idx="1">
+            <a:schemeClr val="accent1"/>
+          </a:lnRef>
+          <a:fillRef idx="3">
+            <a:schemeClr val="accent1"/>
+          </a:fillRef>
+          <a:effectRef idx="2">
+            <a:schemeClr val="accent1"/>
+          </a:effectRef>
+          <a:fontRef idx="minor">
+            <a:schemeClr val="lt1"/>
+          </a:fontRef>
+        </p:style>
+        <p:txBody>
+          <a:bodyPr rtlCol="0" anchor="ctr"/>
+          <a:lstStyle/>
+          <a:p>
+            <a:pPr algn="ctr"/>
+          </a:p>
+        </p:txBody>
+      </p:sp>
+      <p:sp>
+        <p:nvSpPr>
+          <p:cNvPr id="20" name="TextBox 19"/>
+          <p:cNvSpPr txBox="1"/>
+          <p:nvPr/>
+        </p:nvSpPr>
+        <p:spPr>
+          <a:xfrm>
+            <a:off x="7339012" y="2514600"/>
+            <a:ext cx="285750" cy="285750"/>
+          </a:xfrm>
+          <a:prstGeom prst="rect">
+            <a:avLst/>
+          </a:prstGeom>
+          <a:noFill/>
+        </p:spPr>
+        <p:txBody>
+          <a:bodyPr wrap="square" anchor="ctr">
+            <a:spAutoFit/>
+          </a:bodyPr>
+          <a:lstStyle/>
+          <a:p>
+            <a:pPr algn="ctr">
+              <a:lnSpc>
+                <a:spcPct val="100000"/>
+              </a:lnSpc>
+            </a:pPr>
+            <a:r>
+              <a:rPr sz="1300" b="1">
+                <a:solidFill>
+                  <a:srgbClr val="FFFFFF"/>
+                </a:solidFill>
+                <a:latin typeface="PingFang SC"/>
+              </a:rPr>
+              <a:t>3</a:t>
+            </a:r>
+          </a:p>
+        </p:txBody>
+      </p:sp>
+      <p:sp>
+        <p:nvSpPr>
+          <p:cNvPr id="21" name="TextBox 20"/>
+          <p:cNvSpPr txBox="1"/>
+          <p:nvPr/>
+        </p:nvSpPr>
+        <p:spPr>
+          <a:xfrm>
+            <a:off x="6477000" y="2800350"/>
+            <a:ext cx="2009775" cy="952500"/>
+          </a:xfrm>
+          <a:prstGeom prst="rect">
+            <a:avLst/>
+          </a:prstGeom>
+          <a:noFill/>
+        </p:spPr>
+        <p:txBody>
+          <a:bodyPr wrap="square" anchor="ctr">
+            <a:spAutoFit/>
+          </a:bodyPr>
+          <a:lstStyle/>
+          <a:p>
+            <a:pPr algn="ctr">
+              <a:lnSpc>
+                <a:spcPct val="100000"/>
+              </a:lnSpc>
+            </a:pPr>
+            <a:r>
+              <a:rPr sz="1200" b="1">
+                <a:solidFill>
+                  <a:srgbClr val="475569"/>
+                </a:solidFill>
+                <a:latin typeface="PingFang SC"/>
+              </a:rPr>
+              <a:t>条件:按结果分支</a:t>
+            </a:r>
+          </a:p>
+        </p:txBody>
+      </p:sp>
+      <p:cxnSp>
+        <p:nvCxnSpPr>
+          <p:cNvPr id="22" name="Connector 21"/>
+          <p:cNvCxnSpPr/>
+          <p:nvPr/>
+        </p:nvCxnSpPr>
+        <p:spPr>
+          <a:xfrm>
+            <a:off x="5848350" y="3238500"/>
+            <a:ext cx="476250" cy="0"/>
+          </a:xfrm>
+          <a:prstGeom prst="line">
+            <a:avLst/>
+          </a:prstGeom>
+          <a:ln w="20320">
+            <a:solidFill>
+              <a:srgbClr val="475569"/>
+            </a:solidFill>
+          </a:ln>
+        </p:spPr>
+        <p:style>
+          <a:lnRef idx="2">
+            <a:schemeClr val="accent1"/>
+          </a:lnRef>
+          <a:fillRef idx="0">
+            <a:schemeClr val="accent1"/>
+          </a:fillRef>
+          <a:effectRef idx="1">
+            <a:schemeClr val="accent1"/>
+          </a:effectRef>
+          <a:fontRef idx="minor">
+            <a:schemeClr val="tx1"/>
+          </a:fontRef>
+        </p:style>
+      </p:cxnSp>
+      <p:sp>
+        <p:nvSpPr>
+          <p:cNvPr id="23" name="Isosceles Triangle 22"/>
+          <p:cNvSpPr/>
+          <p:nvPr/>
+        </p:nvSpPr>
+        <p:spPr>
+          <a:xfrm rot="5400000">
+            <a:off x="6238876" y="3195638"/>
+            <a:ext cx="85725" cy="85725"/>
+          </a:xfrm>
+          <a:prstGeom prst="triangle">
+            <a:avLst/>
+          </a:prstGeom>
+          <a:solidFill>
+            <a:srgbClr val="475569"/>
+          </a:solidFill>
+          <a:ln>
+            <a:noFill/>
+          </a:ln>
+          <a:effectLst/>
+        </p:spPr>
+        <p:style>
+          <a:lnRef idx="1">
+            <a:schemeClr val="accent1"/>
+          </a:lnRef>
+          <a:fillRef idx="3">
+            <a:schemeClr val="accent1"/>
+          </a:fillRef>
+          <a:effectRef idx="2">
+            <a:schemeClr val="accent1"/>
+          </a:effectRef>
+          <a:fontRef idx="minor">
+            <a:schemeClr val="lt1"/>
+          </a:fontRef>
+        </p:style>
+        <p:txBody>
+          <a:bodyPr rtlCol="0" anchor="ctr"/>
+          <a:lstStyle/>
+          <a:p>
+            <a:pPr algn="ctr"/>
+          </a:p>
+        </p:txBody>
+      </p:sp>
+      <p:sp>
+        <p:nvSpPr>
+          <p:cNvPr id="24" name="Rounded Rectangle 23"/>
+          <p:cNvSpPr/>
+          <p:nvPr/>
+        </p:nvSpPr>
+        <p:spPr>
+          <a:xfrm>
+            <a:off x="9172575" y="2667000"/>
+            <a:ext cx="2162175" cy="1143000"/>
+          </a:xfrm>
+          <a:prstGeom prst="roundRect">
+            <a:avLst>
+              <a:gd name="adj" fmla="val 8000"/>
+            </a:avLst>
+          </a:prstGeom>
+          <a:solidFill>
+            <a:srgbClr val="FFFFFF"/>
+          </a:solidFill>
+          <a:ln w="12700">
+            <a:solidFill>
+              <a:srgbClr val="F59E0B"/>
+            </a:solidFill>
+          </a:ln>
+          <a:effectLst/>
+        </p:spPr>
+        <p:style>
+          <a:lnRef idx="1">
+            <a:schemeClr val="accent1"/>
+          </a:lnRef>
+          <a:fillRef idx="3">
+            <a:schemeClr val="accent1"/>
+          </a:fillRef>
+          <a:effectRef idx="2">
+            <a:schemeClr val="accent1"/>
+          </a:effectRef>
+          <a:fontRef idx="minor">
+            <a:schemeClr val="lt1"/>
+          </a:fontRef>
+        </p:style>
+        <p:txBody>
+          <a:bodyPr rtlCol="0" anchor="ctr"/>
+          <a:lstStyle/>
+          <a:p>
+            <a:pPr algn="ctr"/>
+          </a:p>
+        </p:txBody>
+      </p:sp>
+      <p:sp>
+        <p:nvSpPr>
+          <p:cNvPr id="25" name="Rectangle 24"/>
+          <p:cNvSpPr/>
+          <p:nvPr/>
+        </p:nvSpPr>
+        <p:spPr>
+          <a:xfrm>
+            <a:off x="9172575" y="2667000"/>
+            <a:ext cx="2162175" cy="57150"/>
+          </a:xfrm>
+          <a:prstGeom prst="rect">
+            <a:avLst/>
+          </a:prstGeom>
+          <a:solidFill>
+            <a:srgbClr val="F59E0B"/>
+          </a:solidFill>
+          <a:ln>
+            <a:noFill/>
+          </a:ln>
+          <a:effectLst/>
+        </p:spPr>
+        <p:style>
+          <a:lnRef idx="1">
+            <a:schemeClr val="accent1"/>
+          </a:lnRef>
+          <a:fillRef idx="3">
+            <a:schemeClr val="accent1"/>
+          </a:fillRef>
+          <a:effectRef idx="2">
+            <a:schemeClr val="accent1"/>
+          </a:effectRef>
+          <a:fontRef idx="minor">
+            <a:schemeClr val="lt1"/>
+          </a:fontRef>
+        </p:style>
+        <p:txBody>
+          <a:bodyPr rtlCol="0" anchor="ctr"/>
+          <a:lstStyle/>
+          <a:p>
+            <a:pPr algn="ctr"/>
+          </a:p>
+        </p:txBody>
+      </p:sp>
+      <p:sp>
+        <p:nvSpPr>
+          <p:cNvPr id="26" name="Rounded Rectangle 25"/>
+          <p:cNvSpPr/>
+          <p:nvPr/>
+        </p:nvSpPr>
+        <p:spPr>
+          <a:xfrm>
+            <a:off x="10110787" y="2524125"/>
+            <a:ext cx="285750" cy="285750"/>
+          </a:xfrm>
+          <a:prstGeom prst="roundRect">
+            <a:avLst>
+              <a:gd name="adj" fmla="val 8000"/>
+            </a:avLst>
+          </a:prstGeom>
+          <a:solidFill>
+            <a:srgbClr val="F59E0B"/>
+          </a:solidFill>
+          <a:ln>
+            <a:noFill/>
+          </a:ln>
+          <a:effectLst/>
+        </p:spPr>
+        <p:style>
+          <a:lnRef idx="1">
+            <a:schemeClr val="accent1"/>
+          </a:lnRef>
+          <a:fillRef idx="3">
+            <a:schemeClr val="accent1"/>
+          </a:fillRef>
+          <a:effectRef idx="2">
+            <a:schemeClr val="accent1"/>
+          </a:effectRef>
+          <a:fontRef idx="minor">
+            <a:schemeClr val="lt1"/>
+          </a:fontRef>
+        </p:style>
+        <p:txBody>
+          <a:bodyPr rtlCol="0" anchor="ctr"/>
+          <a:lstStyle/>
+          <a:p>
+            <a:pPr algn="ctr"/>
+          </a:p>
+        </p:txBody>
+      </p:sp>
+      <p:sp>
+        <p:nvSpPr>
+          <p:cNvPr id="27" name="TextBox 26"/>
+          <p:cNvSpPr txBox="1"/>
+          <p:nvPr/>
+        </p:nvSpPr>
+        <p:spPr>
+          <a:xfrm>
+            <a:off x="10110787" y="2514600"/>
+            <a:ext cx="285750" cy="285750"/>
+          </a:xfrm>
+          <a:prstGeom prst="rect">
+            <a:avLst/>
+          </a:prstGeom>
+          <a:noFill/>
+        </p:spPr>
+        <p:txBody>
+          <a:bodyPr wrap="square" anchor="ctr">
+            <a:spAutoFit/>
+          </a:bodyPr>
+          <a:lstStyle/>
+          <a:p>
+            <a:pPr algn="ctr">
+              <a:lnSpc>
+                <a:spcPct val="100000"/>
+              </a:lnSpc>
+            </a:pPr>
+            <a:r>
+              <a:rPr sz="1300" b="1">
+                <a:solidFill>
+                  <a:srgbClr val="FFFFFF"/>
+                </a:solidFill>
+                <a:latin typeface="PingFang SC"/>
+              </a:rPr>
+              <a:t>4</a:t>
+            </a:r>
+          </a:p>
+        </p:txBody>
+      </p:sp>
+      <p:sp>
+        <p:nvSpPr>
+          <p:cNvPr id="28" name="TextBox 27"/>
+          <p:cNvSpPr txBox="1"/>
+          <p:nvPr/>
+        </p:nvSpPr>
+        <p:spPr>
+          <a:xfrm>
+            <a:off x="9248775" y="2800350"/>
+            <a:ext cx="2009775" cy="952500"/>
+          </a:xfrm>
+          <a:prstGeom prst="rect">
+            <a:avLst/>
+          </a:prstGeom>
+          <a:noFill/>
+        </p:spPr>
+        <p:txBody>
+          <a:bodyPr wrap="square" anchor="ctr">
+            <a:spAutoFit/>
+          </a:bodyPr>
+          <a:lstStyle/>
+          <a:p>
+            <a:pPr algn="ctr">
+              <a:lnSpc>
+                <a:spcPct val="100000"/>
+              </a:lnSpc>
+            </a:pPr>
+            <a:r>
+              <a:rPr sz="1200" b="1">
+                <a:solidFill>
+                  <a:srgbClr val="475569"/>
+                </a:solidFill>
+                <a:latin typeface="PingFang SC"/>
+              </a:rPr>
+              <a:t>确认:高危节点 HITL</a:t>
+            </a:r>
+          </a:p>
+        </p:txBody>
+      </p:sp>
+      <p:cxnSp>
+        <p:nvCxnSpPr>
+          <p:cNvPr id="29" name="Connector 28"/>
+          <p:cNvCxnSpPr/>
+          <p:nvPr/>
+        </p:nvCxnSpPr>
+        <p:spPr>
+          <a:xfrm>
+            <a:off x="8620125" y="3238500"/>
+            <a:ext cx="476250" cy="0"/>
+          </a:xfrm>
+          <a:prstGeom prst="line">
+            <a:avLst/>
+          </a:prstGeom>
+          <a:ln w="20320">
+            <a:solidFill>
+              <a:srgbClr val="475569"/>
+            </a:solidFill>
+          </a:ln>
+        </p:spPr>
+        <p:style>
+          <a:lnRef idx="2">
+            <a:schemeClr val="accent1"/>
+          </a:lnRef>
+          <a:fillRef idx="0">
+            <a:schemeClr val="accent1"/>
+          </a:fillRef>
+          <a:effectRef idx="1">
+            <a:schemeClr val="accent1"/>
+          </a:effectRef>
+          <a:fontRef idx="minor">
+            <a:schemeClr val="tx1"/>
+          </a:fontRef>
+        </p:style>
+      </p:cxnSp>
+      <p:sp>
+        <p:nvSpPr>
+          <p:cNvPr id="30" name="Isosceles Triangle 29"/>
+          <p:cNvSpPr/>
+          <p:nvPr/>
+        </p:nvSpPr>
+        <p:spPr>
+          <a:xfrm rot="5400000">
+            <a:off x="9010651" y="3195638"/>
+            <a:ext cx="85725" cy="85725"/>
+          </a:xfrm>
+          <a:prstGeom prst="triangle">
+            <a:avLst/>
+          </a:prstGeom>
+          <a:solidFill>
+            <a:srgbClr val="475569"/>
+          </a:solidFill>
+          <a:ln>
+            <a:noFill/>
+          </a:ln>
+          <a:effectLst/>
+        </p:spPr>
+        <p:style>
+          <a:lnRef idx="1">
+            <a:schemeClr val="accent1"/>
+          </a:lnRef>
+          <a:fillRef idx="3">
+            <a:schemeClr val="accent1"/>
+          </a:fillRef>
+          <a:effectRef idx="2">
+            <a:schemeClr val="accent1"/>
+          </a:effectRef>
+          <a:fontRef idx="minor">
+            <a:schemeClr val="lt1"/>
+          </a:fontRef>
+        </p:style>
+        <p:txBody>
+          <a:bodyPr rtlCol="0" anchor="ctr"/>
+          <a:lstStyle/>
+          <a:p>
+            <a:pPr algn="ctr"/>
+          </a:p>
+        </p:txBody>
+      </p:sp>
+      <p:sp>
+        <p:nvSpPr>
+          <p:cNvPr id="31" name="Rounded Rectangle 30"/>
+          <p:cNvSpPr/>
+          <p:nvPr/>
+        </p:nvSpPr>
+        <p:spPr>
+          <a:xfrm>
+            <a:off x="857250" y="5715000"/>
+            <a:ext cx="10477500" cy="419100"/>
+          </a:xfrm>
+          <a:prstGeom prst="roundRect">
+            <a:avLst>
+              <a:gd name="adj" fmla="val 8000"/>
+            </a:avLst>
+          </a:prstGeom>
+          <a:solidFill>
+            <a:srgbClr val="F1F5F9"/>
+          </a:solidFill>
+          <a:ln>
+            <a:noFill/>
+          </a:ln>
+          <a:effectLst/>
+        </p:spPr>
+        <p:style>
+          <a:lnRef idx="1">
+            <a:schemeClr val="accent1"/>
+          </a:lnRef>
+          <a:fillRef idx="3">
+            <a:schemeClr val="accent1"/>
+          </a:fillRef>
+          <a:effectRef idx="2">
+            <a:schemeClr val="accent1"/>
+          </a:effectRef>
+          <a:fontRef idx="minor">
+            <a:schemeClr val="lt1"/>
+          </a:fontRef>
+        </p:style>
+        <p:txBody>
+          <a:bodyPr rtlCol="0" anchor="ctr"/>
+          <a:lstStyle/>
+          <a:p>
+            <a:pPr algn="ctr"/>
+          </a:p>
+        </p:txBody>
+      </p:sp>
+      <p:sp>
+        <p:nvSpPr>
+          <p:cNvPr id="32" name="TextBox 31"/>
+          <p:cNvSpPr txBox="1"/>
+          <p:nvPr/>
+        </p:nvSpPr>
+        <p:spPr>
+          <a:xfrm>
+            <a:off x="1009650" y="5715000"/>
+            <a:ext cx="10172700" cy="419100"/>
+          </a:xfrm>
+          <a:prstGeom prst="rect">
+            <a:avLst/>
+          </a:prstGeom>
+          <a:noFill/>
+        </p:spPr>
+        <p:txBody>
+          <a:bodyPr wrap="square" anchor="ctr">
+            <a:spAutoFit/>
+          </a:bodyPr>
+          <a:lstStyle/>
+          <a:p>
+            <a:pPr algn="l">
+              <a:lnSpc>
+                <a:spcPct val="100000"/>
+              </a:lnSpc>
+            </a:pPr>
+            <a:r>
+              <a:rPr sz="1200" b="0">
+                <a:solidFill>
+                  <a:srgbClr val="2563EB"/>
+                </a:solidFill>
+                <a:latin typeface="PingFang SC"/>
+              </a:rPr>
+              <a:t>▶ 编排结果=微型工作流</a:t>
+            </a:r>
+          </a:p>
+        </p:txBody>
+      </p:sp>
+      <p:sp>
+        <p:nvSpPr>
+          <p:cNvPr id="33" name="TextBox 32"/>
+          <p:cNvSpPr txBox="1"/>
+          <p:nvPr/>
+        </p:nvSpPr>
+        <p:spPr>
+          <a:xfrm>
+            <a:off x="10287000" y="6534150"/>
+            <a:ext cx="1619250" cy="266700"/>
           </a:xfrm>
           <a:prstGeom prst="rect">
             <a:avLst/>
@@ -7477,1231 +8663,6 @@
               </a:lnSpc>
             </a:pPr>
             <a:r>
-              <a:rPr sz="1100" b="0">
-                <a:solidFill>
-                  <a:srgbClr val="94A3B8"/>
-                </a:solidFill>
-                <a:latin typeface="PingFang SC"/>
-              </a:rPr>
-              <a:t>复用三次再抽象</a:t>
-            </a:r>
-          </a:p>
-        </p:txBody>
-      </p:sp>
-      <p:sp>
-        <p:nvSpPr>
-          <p:cNvPr id="6" name="Rounded Rectangle 5"/>
-          <p:cNvSpPr/>
-          <p:nvPr/>
-        </p:nvSpPr>
-        <p:spPr>
-          <a:xfrm>
-            <a:off x="857250" y="2667000"/>
-            <a:ext cx="2162175" cy="1143000"/>
-          </a:xfrm>
-          <a:prstGeom prst="roundRect">
-            <a:avLst>
-              <a:gd name="adj" fmla="val 8000"/>
-            </a:avLst>
-          </a:prstGeom>
-          <a:solidFill>
-            <a:srgbClr val="FFFFFF"/>
-          </a:solidFill>
-          <a:ln w="12700">
-            <a:solidFill>
-              <a:srgbClr val="2563EB"/>
-            </a:solidFill>
-          </a:ln>
-          <a:effectLst/>
-        </p:spPr>
-        <p:style>
-          <a:lnRef idx="1">
-            <a:schemeClr val="accent1"/>
-          </a:lnRef>
-          <a:fillRef idx="3">
-            <a:schemeClr val="accent1"/>
-          </a:fillRef>
-          <a:effectRef idx="2">
-            <a:schemeClr val="accent1"/>
-          </a:effectRef>
-          <a:fontRef idx="minor">
-            <a:schemeClr val="lt1"/>
-          </a:fontRef>
-        </p:style>
-        <p:txBody>
-          <a:bodyPr rtlCol="0" anchor="ctr"/>
-          <a:lstStyle/>
-          <a:p>
-            <a:pPr algn="ctr"/>
-          </a:p>
-        </p:txBody>
-      </p:sp>
-      <p:sp>
-        <p:nvSpPr>
-          <p:cNvPr id="7" name="Rectangle 6"/>
-          <p:cNvSpPr/>
-          <p:nvPr/>
-        </p:nvSpPr>
-        <p:spPr>
-          <a:xfrm>
-            <a:off x="857250" y="2667000"/>
-            <a:ext cx="2162175" cy="57150"/>
-          </a:xfrm>
-          <a:prstGeom prst="rect">
-            <a:avLst/>
-          </a:prstGeom>
-          <a:solidFill>
-            <a:srgbClr val="2563EB"/>
-          </a:solidFill>
-          <a:ln>
-            <a:noFill/>
-          </a:ln>
-          <a:effectLst/>
-        </p:spPr>
-        <p:style>
-          <a:lnRef idx="1">
-            <a:schemeClr val="accent1"/>
-          </a:lnRef>
-          <a:fillRef idx="3">
-            <a:schemeClr val="accent1"/>
-          </a:fillRef>
-          <a:effectRef idx="2">
-            <a:schemeClr val="accent1"/>
-          </a:effectRef>
-          <a:fontRef idx="minor">
-            <a:schemeClr val="lt1"/>
-          </a:fontRef>
-        </p:style>
-        <p:txBody>
-          <a:bodyPr rtlCol="0" anchor="ctr"/>
-          <a:lstStyle/>
-          <a:p>
-            <a:pPr algn="ctr"/>
-          </a:p>
-        </p:txBody>
-      </p:sp>
-      <p:sp>
-        <p:nvSpPr>
-          <p:cNvPr id="8" name="Rounded Rectangle 7"/>
-          <p:cNvSpPr/>
-          <p:nvPr/>
-        </p:nvSpPr>
-        <p:spPr>
-          <a:xfrm>
-            <a:off x="1795462" y="2524125"/>
-            <a:ext cx="285750" cy="285750"/>
-          </a:xfrm>
-          <a:prstGeom prst="roundRect">
-            <a:avLst>
-              <a:gd name="adj" fmla="val 8000"/>
-            </a:avLst>
-          </a:prstGeom>
-          <a:solidFill>
-            <a:srgbClr val="2563EB"/>
-          </a:solidFill>
-          <a:ln>
-            <a:noFill/>
-          </a:ln>
-          <a:effectLst/>
-        </p:spPr>
-        <p:style>
-          <a:lnRef idx="1">
-            <a:schemeClr val="accent1"/>
-          </a:lnRef>
-          <a:fillRef idx="3">
-            <a:schemeClr val="accent1"/>
-          </a:fillRef>
-          <a:effectRef idx="2">
-            <a:schemeClr val="accent1"/>
-          </a:effectRef>
-          <a:fontRef idx="minor">
-            <a:schemeClr val="lt1"/>
-          </a:fontRef>
-        </p:style>
-        <p:txBody>
-          <a:bodyPr rtlCol="0" anchor="ctr"/>
-          <a:lstStyle/>
-          <a:p>
-            <a:pPr algn="ctr"/>
-          </a:p>
-        </p:txBody>
-      </p:sp>
-      <p:sp>
-        <p:nvSpPr>
-          <p:cNvPr id="9" name="TextBox 8"/>
-          <p:cNvSpPr txBox="1"/>
-          <p:nvPr/>
-        </p:nvSpPr>
-        <p:spPr>
-          <a:xfrm>
-            <a:off x="1795462" y="2514600"/>
-            <a:ext cx="285750" cy="285750"/>
-          </a:xfrm>
-          <a:prstGeom prst="rect">
-            <a:avLst/>
-          </a:prstGeom>
-          <a:noFill/>
-        </p:spPr>
-        <p:txBody>
-          <a:bodyPr wrap="square" anchor="ctr">
-            <a:spAutoFit/>
-          </a:bodyPr>
-          <a:lstStyle/>
-          <a:p>
-            <a:pPr algn="ctr">
-              <a:lnSpc>
-                <a:spcPct val="100000"/>
-              </a:lnSpc>
-            </a:pPr>
-            <a:r>
-              <a:rPr sz="1300" b="1">
-                <a:solidFill>
-                  <a:srgbClr val="FFFFFF"/>
-                </a:solidFill>
-                <a:latin typeface="PingFang SC"/>
-              </a:rPr>
-              <a:t>1</a:t>
-            </a:r>
-          </a:p>
-        </p:txBody>
-      </p:sp>
-      <p:sp>
-        <p:nvSpPr>
-          <p:cNvPr id="10" name="TextBox 9"/>
-          <p:cNvSpPr txBox="1"/>
-          <p:nvPr/>
-        </p:nvSpPr>
-        <p:spPr>
-          <a:xfrm>
-            <a:off x="933450" y="2800350"/>
-            <a:ext cx="2009775" cy="952500"/>
-          </a:xfrm>
-          <a:prstGeom prst="rect">
-            <a:avLst/>
-          </a:prstGeom>
-          <a:noFill/>
-        </p:spPr>
-        <p:txBody>
-          <a:bodyPr wrap="square" anchor="ctr">
-            <a:spAutoFit/>
-          </a:bodyPr>
-          <a:lstStyle/>
-          <a:p>
-            <a:pPr algn="ctr">
-              <a:lnSpc>
-                <a:spcPct val="100000"/>
-              </a:lnSpc>
-            </a:pPr>
-            <a:r>
-              <a:rPr sz="1200" b="1">
-                <a:solidFill>
-                  <a:srgbClr val="475569"/>
-                </a:solidFill>
-                <a:latin typeface="PingFang SC"/>
-              </a:rPr>
-              <a:t>顺序:上游产出喂下游</a:t>
-            </a:r>
-          </a:p>
-        </p:txBody>
-      </p:sp>
-      <p:sp>
-        <p:nvSpPr>
-          <p:cNvPr id="11" name="Rounded Rectangle 10"/>
-          <p:cNvSpPr/>
-          <p:nvPr/>
-        </p:nvSpPr>
-        <p:spPr>
-          <a:xfrm>
-            <a:off x="3629025" y="2667000"/>
-            <a:ext cx="2162175" cy="1143000"/>
-          </a:xfrm>
-          <a:prstGeom prst="roundRect">
-            <a:avLst>
-              <a:gd name="adj" fmla="val 8000"/>
-            </a:avLst>
-          </a:prstGeom>
-          <a:solidFill>
-            <a:srgbClr val="FFFFFF"/>
-          </a:solidFill>
-          <a:ln w="12700">
-            <a:solidFill>
-              <a:srgbClr val="14B8A6"/>
-            </a:solidFill>
-          </a:ln>
-          <a:effectLst/>
-        </p:spPr>
-        <p:style>
-          <a:lnRef idx="1">
-            <a:schemeClr val="accent1"/>
-          </a:lnRef>
-          <a:fillRef idx="3">
-            <a:schemeClr val="accent1"/>
-          </a:fillRef>
-          <a:effectRef idx="2">
-            <a:schemeClr val="accent1"/>
-          </a:effectRef>
-          <a:fontRef idx="minor">
-            <a:schemeClr val="lt1"/>
-          </a:fontRef>
-        </p:style>
-        <p:txBody>
-          <a:bodyPr rtlCol="0" anchor="ctr"/>
-          <a:lstStyle/>
-          <a:p>
-            <a:pPr algn="ctr"/>
-          </a:p>
-        </p:txBody>
-      </p:sp>
-      <p:sp>
-        <p:nvSpPr>
-          <p:cNvPr id="12" name="Rectangle 11"/>
-          <p:cNvSpPr/>
-          <p:nvPr/>
-        </p:nvSpPr>
-        <p:spPr>
-          <a:xfrm>
-            <a:off x="3629025" y="2667000"/>
-            <a:ext cx="2162175" cy="57150"/>
-          </a:xfrm>
-          <a:prstGeom prst="rect">
-            <a:avLst/>
-          </a:prstGeom>
-          <a:solidFill>
-            <a:srgbClr val="14B8A6"/>
-          </a:solidFill>
-          <a:ln>
-            <a:noFill/>
-          </a:ln>
-          <a:effectLst/>
-        </p:spPr>
-        <p:style>
-          <a:lnRef idx="1">
-            <a:schemeClr val="accent1"/>
-          </a:lnRef>
-          <a:fillRef idx="3">
-            <a:schemeClr val="accent1"/>
-          </a:fillRef>
-          <a:effectRef idx="2">
-            <a:schemeClr val="accent1"/>
-          </a:effectRef>
-          <a:fontRef idx="minor">
-            <a:schemeClr val="lt1"/>
-          </a:fontRef>
-        </p:style>
-        <p:txBody>
-          <a:bodyPr rtlCol="0" anchor="ctr"/>
-          <a:lstStyle/>
-          <a:p>
-            <a:pPr algn="ctr"/>
-          </a:p>
-        </p:txBody>
-      </p:sp>
-      <p:sp>
-        <p:nvSpPr>
-          <p:cNvPr id="13" name="Rounded Rectangle 12"/>
-          <p:cNvSpPr/>
-          <p:nvPr/>
-        </p:nvSpPr>
-        <p:spPr>
-          <a:xfrm>
-            <a:off x="4567237" y="2524125"/>
-            <a:ext cx="285750" cy="285750"/>
-          </a:xfrm>
-          <a:prstGeom prst="roundRect">
-            <a:avLst>
-              <a:gd name="adj" fmla="val 8000"/>
-            </a:avLst>
-          </a:prstGeom>
-          <a:solidFill>
-            <a:srgbClr val="14B8A6"/>
-          </a:solidFill>
-          <a:ln>
-            <a:noFill/>
-          </a:ln>
-          <a:effectLst/>
-        </p:spPr>
-        <p:style>
-          <a:lnRef idx="1">
-            <a:schemeClr val="accent1"/>
-          </a:lnRef>
-          <a:fillRef idx="3">
-            <a:schemeClr val="accent1"/>
-          </a:fillRef>
-          <a:effectRef idx="2">
-            <a:schemeClr val="accent1"/>
-          </a:effectRef>
-          <a:fontRef idx="minor">
-            <a:schemeClr val="lt1"/>
-          </a:fontRef>
-        </p:style>
-        <p:txBody>
-          <a:bodyPr rtlCol="0" anchor="ctr"/>
-          <a:lstStyle/>
-          <a:p>
-            <a:pPr algn="ctr"/>
-          </a:p>
-        </p:txBody>
-      </p:sp>
-      <p:sp>
-        <p:nvSpPr>
-          <p:cNvPr id="14" name="TextBox 13"/>
-          <p:cNvSpPr txBox="1"/>
-          <p:nvPr/>
-        </p:nvSpPr>
-        <p:spPr>
-          <a:xfrm>
-            <a:off x="4567237" y="2514600"/>
-            <a:ext cx="285750" cy="285750"/>
-          </a:xfrm>
-          <a:prstGeom prst="rect">
-            <a:avLst/>
-          </a:prstGeom>
-          <a:noFill/>
-        </p:spPr>
-        <p:txBody>
-          <a:bodyPr wrap="square" anchor="ctr">
-            <a:spAutoFit/>
-          </a:bodyPr>
-          <a:lstStyle/>
-          <a:p>
-            <a:pPr algn="ctr">
-              <a:lnSpc>
-                <a:spcPct val="100000"/>
-              </a:lnSpc>
-            </a:pPr>
-            <a:r>
-              <a:rPr sz="1300" b="1">
-                <a:solidFill>
-                  <a:srgbClr val="FFFFFF"/>
-                </a:solidFill>
-                <a:latin typeface="PingFang SC"/>
-              </a:rPr>
-              <a:t>2</a:t>
-            </a:r>
-          </a:p>
-        </p:txBody>
-      </p:sp>
-      <p:sp>
-        <p:nvSpPr>
-          <p:cNvPr id="15" name="TextBox 14"/>
-          <p:cNvSpPr txBox="1"/>
-          <p:nvPr/>
-        </p:nvSpPr>
-        <p:spPr>
-          <a:xfrm>
-            <a:off x="3705225" y="2800350"/>
-            <a:ext cx="2009775" cy="952500"/>
-          </a:xfrm>
-          <a:prstGeom prst="rect">
-            <a:avLst/>
-          </a:prstGeom>
-          <a:noFill/>
-        </p:spPr>
-        <p:txBody>
-          <a:bodyPr wrap="square" anchor="ctr">
-            <a:spAutoFit/>
-          </a:bodyPr>
-          <a:lstStyle/>
-          <a:p>
-            <a:pPr algn="ctr">
-              <a:lnSpc>
-                <a:spcPct val="100000"/>
-              </a:lnSpc>
-            </a:pPr>
-            <a:r>
-              <a:rPr sz="1200" b="1">
-                <a:solidFill>
-                  <a:srgbClr val="475569"/>
-                </a:solidFill>
-                <a:latin typeface="PingFang SC"/>
-              </a:rPr>
-              <a:t>并行:独立子任务 gather</a:t>
-            </a:r>
-          </a:p>
-        </p:txBody>
-      </p:sp>
-      <p:cxnSp>
-        <p:nvCxnSpPr>
-          <p:cNvPr id="16" name="Connector 15"/>
-          <p:cNvCxnSpPr/>
-          <p:nvPr/>
-        </p:nvCxnSpPr>
-        <p:spPr>
-          <a:xfrm>
-            <a:off x="3076575" y="3238500"/>
-            <a:ext cx="476250" cy="0"/>
-          </a:xfrm>
-          <a:prstGeom prst="line">
-            <a:avLst/>
-          </a:prstGeom>
-          <a:ln w="20320">
-            <a:solidFill>
-              <a:srgbClr val="475569"/>
-            </a:solidFill>
-          </a:ln>
-        </p:spPr>
-        <p:style>
-          <a:lnRef idx="2">
-            <a:schemeClr val="accent1"/>
-          </a:lnRef>
-          <a:fillRef idx="0">
-            <a:schemeClr val="accent1"/>
-          </a:fillRef>
-          <a:effectRef idx="1">
-            <a:schemeClr val="accent1"/>
-          </a:effectRef>
-          <a:fontRef idx="minor">
-            <a:schemeClr val="tx1"/>
-          </a:fontRef>
-        </p:style>
-      </p:cxnSp>
-      <p:sp>
-        <p:nvSpPr>
-          <p:cNvPr id="17" name="Isosceles Triangle 16"/>
-          <p:cNvSpPr/>
-          <p:nvPr/>
-        </p:nvSpPr>
-        <p:spPr>
-          <a:xfrm rot="5400000">
-            <a:off x="3467101" y="3195638"/>
-            <a:ext cx="85725" cy="85725"/>
-          </a:xfrm>
-          <a:prstGeom prst="triangle">
-            <a:avLst/>
-          </a:prstGeom>
-          <a:solidFill>
-            <a:srgbClr val="475569"/>
-          </a:solidFill>
-          <a:ln>
-            <a:noFill/>
-          </a:ln>
-          <a:effectLst/>
-        </p:spPr>
-        <p:style>
-          <a:lnRef idx="1">
-            <a:schemeClr val="accent1"/>
-          </a:lnRef>
-          <a:fillRef idx="3">
-            <a:schemeClr val="accent1"/>
-          </a:fillRef>
-          <a:effectRef idx="2">
-            <a:schemeClr val="accent1"/>
-          </a:effectRef>
-          <a:fontRef idx="minor">
-            <a:schemeClr val="lt1"/>
-          </a:fontRef>
-        </p:style>
-        <p:txBody>
-          <a:bodyPr rtlCol="0" anchor="ctr"/>
-          <a:lstStyle/>
-          <a:p>
-            <a:pPr algn="ctr"/>
-          </a:p>
-        </p:txBody>
-      </p:sp>
-      <p:sp>
-        <p:nvSpPr>
-          <p:cNvPr id="18" name="Rounded Rectangle 17"/>
-          <p:cNvSpPr/>
-          <p:nvPr/>
-        </p:nvSpPr>
-        <p:spPr>
-          <a:xfrm>
-            <a:off x="6400800" y="2667000"/>
-            <a:ext cx="2162175" cy="1143000"/>
-          </a:xfrm>
-          <a:prstGeom prst="roundRect">
-            <a:avLst>
-              <a:gd name="adj" fmla="val 8000"/>
-            </a:avLst>
-          </a:prstGeom>
-          <a:solidFill>
-            <a:srgbClr val="FFFFFF"/>
-          </a:solidFill>
-          <a:ln w="12700">
-            <a:solidFill>
-              <a:srgbClr val="8B5CF6"/>
-            </a:solidFill>
-          </a:ln>
-          <a:effectLst/>
-        </p:spPr>
-        <p:style>
-          <a:lnRef idx="1">
-            <a:schemeClr val="accent1"/>
-          </a:lnRef>
-          <a:fillRef idx="3">
-            <a:schemeClr val="accent1"/>
-          </a:fillRef>
-          <a:effectRef idx="2">
-            <a:schemeClr val="accent1"/>
-          </a:effectRef>
-          <a:fontRef idx="minor">
-            <a:schemeClr val="lt1"/>
-          </a:fontRef>
-        </p:style>
-        <p:txBody>
-          <a:bodyPr rtlCol="0" anchor="ctr"/>
-          <a:lstStyle/>
-          <a:p>
-            <a:pPr algn="ctr"/>
-          </a:p>
-        </p:txBody>
-      </p:sp>
-      <p:sp>
-        <p:nvSpPr>
-          <p:cNvPr id="19" name="Rectangle 18"/>
-          <p:cNvSpPr/>
-          <p:nvPr/>
-        </p:nvSpPr>
-        <p:spPr>
-          <a:xfrm>
-            <a:off x="6400800" y="2667000"/>
-            <a:ext cx="2162175" cy="57150"/>
-          </a:xfrm>
-          <a:prstGeom prst="rect">
-            <a:avLst/>
-          </a:prstGeom>
-          <a:solidFill>
-            <a:srgbClr val="8B5CF6"/>
-          </a:solidFill>
-          <a:ln>
-            <a:noFill/>
-          </a:ln>
-          <a:effectLst/>
-        </p:spPr>
-        <p:style>
-          <a:lnRef idx="1">
-            <a:schemeClr val="accent1"/>
-          </a:lnRef>
-          <a:fillRef idx="3">
-            <a:schemeClr val="accent1"/>
-          </a:fillRef>
-          <a:effectRef idx="2">
-            <a:schemeClr val="accent1"/>
-          </a:effectRef>
-          <a:fontRef idx="minor">
-            <a:schemeClr val="lt1"/>
-          </a:fontRef>
-        </p:style>
-        <p:txBody>
-          <a:bodyPr rtlCol="0" anchor="ctr"/>
-          <a:lstStyle/>
-          <a:p>
-            <a:pPr algn="ctr"/>
-          </a:p>
-        </p:txBody>
-      </p:sp>
-      <p:sp>
-        <p:nvSpPr>
-          <p:cNvPr id="20" name="Rounded Rectangle 19"/>
-          <p:cNvSpPr/>
-          <p:nvPr/>
-        </p:nvSpPr>
-        <p:spPr>
-          <a:xfrm>
-            <a:off x="7339012" y="2524125"/>
-            <a:ext cx="285750" cy="285750"/>
-          </a:xfrm>
-          <a:prstGeom prst="roundRect">
-            <a:avLst>
-              <a:gd name="adj" fmla="val 8000"/>
-            </a:avLst>
-          </a:prstGeom>
-          <a:solidFill>
-            <a:srgbClr val="8B5CF6"/>
-          </a:solidFill>
-          <a:ln>
-            <a:noFill/>
-          </a:ln>
-          <a:effectLst/>
-        </p:spPr>
-        <p:style>
-          <a:lnRef idx="1">
-            <a:schemeClr val="accent1"/>
-          </a:lnRef>
-          <a:fillRef idx="3">
-            <a:schemeClr val="accent1"/>
-          </a:fillRef>
-          <a:effectRef idx="2">
-            <a:schemeClr val="accent1"/>
-          </a:effectRef>
-          <a:fontRef idx="minor">
-            <a:schemeClr val="lt1"/>
-          </a:fontRef>
-        </p:style>
-        <p:txBody>
-          <a:bodyPr rtlCol="0" anchor="ctr"/>
-          <a:lstStyle/>
-          <a:p>
-            <a:pPr algn="ctr"/>
-          </a:p>
-        </p:txBody>
-      </p:sp>
-      <p:sp>
-        <p:nvSpPr>
-          <p:cNvPr id="21" name="TextBox 20"/>
-          <p:cNvSpPr txBox="1"/>
-          <p:nvPr/>
-        </p:nvSpPr>
-        <p:spPr>
-          <a:xfrm>
-            <a:off x="7339012" y="2514600"/>
-            <a:ext cx="285750" cy="285750"/>
-          </a:xfrm>
-          <a:prstGeom prst="rect">
-            <a:avLst/>
-          </a:prstGeom>
-          <a:noFill/>
-        </p:spPr>
-        <p:txBody>
-          <a:bodyPr wrap="square" anchor="ctr">
-            <a:spAutoFit/>
-          </a:bodyPr>
-          <a:lstStyle/>
-          <a:p>
-            <a:pPr algn="ctr">
-              <a:lnSpc>
-                <a:spcPct val="100000"/>
-              </a:lnSpc>
-            </a:pPr>
-            <a:r>
-              <a:rPr sz="1300" b="1">
-                <a:solidFill>
-                  <a:srgbClr val="FFFFFF"/>
-                </a:solidFill>
-                <a:latin typeface="PingFang SC"/>
-              </a:rPr>
-              <a:t>3</a:t>
-            </a:r>
-          </a:p>
-        </p:txBody>
-      </p:sp>
-      <p:sp>
-        <p:nvSpPr>
-          <p:cNvPr id="22" name="TextBox 21"/>
-          <p:cNvSpPr txBox="1"/>
-          <p:nvPr/>
-        </p:nvSpPr>
-        <p:spPr>
-          <a:xfrm>
-            <a:off x="6477000" y="2800350"/>
-            <a:ext cx="2009775" cy="952500"/>
-          </a:xfrm>
-          <a:prstGeom prst="rect">
-            <a:avLst/>
-          </a:prstGeom>
-          <a:noFill/>
-        </p:spPr>
-        <p:txBody>
-          <a:bodyPr wrap="square" anchor="ctr">
-            <a:spAutoFit/>
-          </a:bodyPr>
-          <a:lstStyle/>
-          <a:p>
-            <a:pPr algn="ctr">
-              <a:lnSpc>
-                <a:spcPct val="100000"/>
-              </a:lnSpc>
-            </a:pPr>
-            <a:r>
-              <a:rPr sz="1200" b="1">
-                <a:solidFill>
-                  <a:srgbClr val="475569"/>
-                </a:solidFill>
-                <a:latin typeface="PingFang SC"/>
-              </a:rPr>
-              <a:t>条件:按结果分支</a:t>
-            </a:r>
-          </a:p>
-        </p:txBody>
-      </p:sp>
-      <p:cxnSp>
-        <p:nvCxnSpPr>
-          <p:cNvPr id="23" name="Connector 22"/>
-          <p:cNvCxnSpPr/>
-          <p:nvPr/>
-        </p:nvCxnSpPr>
-        <p:spPr>
-          <a:xfrm>
-            <a:off x="5848350" y="3238500"/>
-            <a:ext cx="476250" cy="0"/>
-          </a:xfrm>
-          <a:prstGeom prst="line">
-            <a:avLst/>
-          </a:prstGeom>
-          <a:ln w="20320">
-            <a:solidFill>
-              <a:srgbClr val="475569"/>
-            </a:solidFill>
-          </a:ln>
-        </p:spPr>
-        <p:style>
-          <a:lnRef idx="2">
-            <a:schemeClr val="accent1"/>
-          </a:lnRef>
-          <a:fillRef idx="0">
-            <a:schemeClr val="accent1"/>
-          </a:fillRef>
-          <a:effectRef idx="1">
-            <a:schemeClr val="accent1"/>
-          </a:effectRef>
-          <a:fontRef idx="minor">
-            <a:schemeClr val="tx1"/>
-          </a:fontRef>
-        </p:style>
-      </p:cxnSp>
-      <p:sp>
-        <p:nvSpPr>
-          <p:cNvPr id="24" name="Isosceles Triangle 23"/>
-          <p:cNvSpPr/>
-          <p:nvPr/>
-        </p:nvSpPr>
-        <p:spPr>
-          <a:xfrm rot="5400000">
-            <a:off x="6238876" y="3195638"/>
-            <a:ext cx="85725" cy="85725"/>
-          </a:xfrm>
-          <a:prstGeom prst="triangle">
-            <a:avLst/>
-          </a:prstGeom>
-          <a:solidFill>
-            <a:srgbClr val="475569"/>
-          </a:solidFill>
-          <a:ln>
-            <a:noFill/>
-          </a:ln>
-          <a:effectLst/>
-        </p:spPr>
-        <p:style>
-          <a:lnRef idx="1">
-            <a:schemeClr val="accent1"/>
-          </a:lnRef>
-          <a:fillRef idx="3">
-            <a:schemeClr val="accent1"/>
-          </a:fillRef>
-          <a:effectRef idx="2">
-            <a:schemeClr val="accent1"/>
-          </a:effectRef>
-          <a:fontRef idx="minor">
-            <a:schemeClr val="lt1"/>
-          </a:fontRef>
-        </p:style>
-        <p:txBody>
-          <a:bodyPr rtlCol="0" anchor="ctr"/>
-          <a:lstStyle/>
-          <a:p>
-            <a:pPr algn="ctr"/>
-          </a:p>
-        </p:txBody>
-      </p:sp>
-      <p:sp>
-        <p:nvSpPr>
-          <p:cNvPr id="25" name="Rounded Rectangle 24"/>
-          <p:cNvSpPr/>
-          <p:nvPr/>
-        </p:nvSpPr>
-        <p:spPr>
-          <a:xfrm>
-            <a:off x="9172575" y="2667000"/>
-            <a:ext cx="2162175" cy="1143000"/>
-          </a:xfrm>
-          <a:prstGeom prst="roundRect">
-            <a:avLst>
-              <a:gd name="adj" fmla="val 8000"/>
-            </a:avLst>
-          </a:prstGeom>
-          <a:solidFill>
-            <a:srgbClr val="FFFFFF"/>
-          </a:solidFill>
-          <a:ln w="12700">
-            <a:solidFill>
-              <a:srgbClr val="F59E0B"/>
-            </a:solidFill>
-          </a:ln>
-          <a:effectLst/>
-        </p:spPr>
-        <p:style>
-          <a:lnRef idx="1">
-            <a:schemeClr val="accent1"/>
-          </a:lnRef>
-          <a:fillRef idx="3">
-            <a:schemeClr val="accent1"/>
-          </a:fillRef>
-          <a:effectRef idx="2">
-            <a:schemeClr val="accent1"/>
-          </a:effectRef>
-          <a:fontRef idx="minor">
-            <a:schemeClr val="lt1"/>
-          </a:fontRef>
-        </p:style>
-        <p:txBody>
-          <a:bodyPr rtlCol="0" anchor="ctr"/>
-          <a:lstStyle/>
-          <a:p>
-            <a:pPr algn="ctr"/>
-          </a:p>
-        </p:txBody>
-      </p:sp>
-      <p:sp>
-        <p:nvSpPr>
-          <p:cNvPr id="26" name="Rectangle 25"/>
-          <p:cNvSpPr/>
-          <p:nvPr/>
-        </p:nvSpPr>
-        <p:spPr>
-          <a:xfrm>
-            <a:off x="9172575" y="2667000"/>
-            <a:ext cx="2162175" cy="57150"/>
-          </a:xfrm>
-          <a:prstGeom prst="rect">
-            <a:avLst/>
-          </a:prstGeom>
-          <a:solidFill>
-            <a:srgbClr val="F59E0B"/>
-          </a:solidFill>
-          <a:ln>
-            <a:noFill/>
-          </a:ln>
-          <a:effectLst/>
-        </p:spPr>
-        <p:style>
-          <a:lnRef idx="1">
-            <a:schemeClr val="accent1"/>
-          </a:lnRef>
-          <a:fillRef idx="3">
-            <a:schemeClr val="accent1"/>
-          </a:fillRef>
-          <a:effectRef idx="2">
-            <a:schemeClr val="accent1"/>
-          </a:effectRef>
-          <a:fontRef idx="minor">
-            <a:schemeClr val="lt1"/>
-          </a:fontRef>
-        </p:style>
-        <p:txBody>
-          <a:bodyPr rtlCol="0" anchor="ctr"/>
-          <a:lstStyle/>
-          <a:p>
-            <a:pPr algn="ctr"/>
-          </a:p>
-        </p:txBody>
-      </p:sp>
-      <p:sp>
-        <p:nvSpPr>
-          <p:cNvPr id="27" name="Rounded Rectangle 26"/>
-          <p:cNvSpPr/>
-          <p:nvPr/>
-        </p:nvSpPr>
-        <p:spPr>
-          <a:xfrm>
-            <a:off x="10110787" y="2524125"/>
-            <a:ext cx="285750" cy="285750"/>
-          </a:xfrm>
-          <a:prstGeom prst="roundRect">
-            <a:avLst>
-              <a:gd name="adj" fmla="val 8000"/>
-            </a:avLst>
-          </a:prstGeom>
-          <a:solidFill>
-            <a:srgbClr val="F59E0B"/>
-          </a:solidFill>
-          <a:ln>
-            <a:noFill/>
-          </a:ln>
-          <a:effectLst/>
-        </p:spPr>
-        <p:style>
-          <a:lnRef idx="1">
-            <a:schemeClr val="accent1"/>
-          </a:lnRef>
-          <a:fillRef idx="3">
-            <a:schemeClr val="accent1"/>
-          </a:fillRef>
-          <a:effectRef idx="2">
-            <a:schemeClr val="accent1"/>
-          </a:effectRef>
-          <a:fontRef idx="minor">
-            <a:schemeClr val="lt1"/>
-          </a:fontRef>
-        </p:style>
-        <p:txBody>
-          <a:bodyPr rtlCol="0" anchor="ctr"/>
-          <a:lstStyle/>
-          <a:p>
-            <a:pPr algn="ctr"/>
-          </a:p>
-        </p:txBody>
-      </p:sp>
-      <p:sp>
-        <p:nvSpPr>
-          <p:cNvPr id="28" name="TextBox 27"/>
-          <p:cNvSpPr txBox="1"/>
-          <p:nvPr/>
-        </p:nvSpPr>
-        <p:spPr>
-          <a:xfrm>
-            <a:off x="10110787" y="2514600"/>
-            <a:ext cx="285750" cy="285750"/>
-          </a:xfrm>
-          <a:prstGeom prst="rect">
-            <a:avLst/>
-          </a:prstGeom>
-          <a:noFill/>
-        </p:spPr>
-        <p:txBody>
-          <a:bodyPr wrap="square" anchor="ctr">
-            <a:spAutoFit/>
-          </a:bodyPr>
-          <a:lstStyle/>
-          <a:p>
-            <a:pPr algn="ctr">
-              <a:lnSpc>
-                <a:spcPct val="100000"/>
-              </a:lnSpc>
-            </a:pPr>
-            <a:r>
-              <a:rPr sz="1300" b="1">
-                <a:solidFill>
-                  <a:srgbClr val="FFFFFF"/>
-                </a:solidFill>
-                <a:latin typeface="PingFang SC"/>
-              </a:rPr>
-              <a:t>4</a:t>
-            </a:r>
-          </a:p>
-        </p:txBody>
-      </p:sp>
-      <p:sp>
-        <p:nvSpPr>
-          <p:cNvPr id="29" name="TextBox 28"/>
-          <p:cNvSpPr txBox="1"/>
-          <p:nvPr/>
-        </p:nvSpPr>
-        <p:spPr>
-          <a:xfrm>
-            <a:off x="9248775" y="2800350"/>
-            <a:ext cx="2009775" cy="952500"/>
-          </a:xfrm>
-          <a:prstGeom prst="rect">
-            <a:avLst/>
-          </a:prstGeom>
-          <a:noFill/>
-        </p:spPr>
-        <p:txBody>
-          <a:bodyPr wrap="square" anchor="ctr">
-            <a:spAutoFit/>
-          </a:bodyPr>
-          <a:lstStyle/>
-          <a:p>
-            <a:pPr algn="ctr">
-              <a:lnSpc>
-                <a:spcPct val="100000"/>
-              </a:lnSpc>
-            </a:pPr>
-            <a:r>
-              <a:rPr sz="1200" b="1">
-                <a:solidFill>
-                  <a:srgbClr val="475569"/>
-                </a:solidFill>
-                <a:latin typeface="PingFang SC"/>
-              </a:rPr>
-              <a:t>确认:高危节点 HITL|复用三次再抽象</a:t>
-            </a:r>
-          </a:p>
-        </p:txBody>
-      </p:sp>
-      <p:cxnSp>
-        <p:nvCxnSpPr>
-          <p:cNvPr id="30" name="Connector 29"/>
-          <p:cNvCxnSpPr/>
-          <p:nvPr/>
-        </p:nvCxnSpPr>
-        <p:spPr>
-          <a:xfrm>
-            <a:off x="8620125" y="3238500"/>
-            <a:ext cx="476250" cy="0"/>
-          </a:xfrm>
-          <a:prstGeom prst="line">
-            <a:avLst/>
-          </a:prstGeom>
-          <a:ln w="20320">
-            <a:solidFill>
-              <a:srgbClr val="475569"/>
-            </a:solidFill>
-          </a:ln>
-        </p:spPr>
-        <p:style>
-          <a:lnRef idx="2">
-            <a:schemeClr val="accent1"/>
-          </a:lnRef>
-          <a:fillRef idx="0">
-            <a:schemeClr val="accent1"/>
-          </a:fillRef>
-          <a:effectRef idx="1">
-            <a:schemeClr val="accent1"/>
-          </a:effectRef>
-          <a:fontRef idx="minor">
-            <a:schemeClr val="tx1"/>
-          </a:fontRef>
-        </p:style>
-      </p:cxnSp>
-      <p:sp>
-        <p:nvSpPr>
-          <p:cNvPr id="31" name="Isosceles Triangle 30"/>
-          <p:cNvSpPr/>
-          <p:nvPr/>
-        </p:nvSpPr>
-        <p:spPr>
-          <a:xfrm rot="5400000">
-            <a:off x="9010651" y="3195638"/>
-            <a:ext cx="85725" cy="85725"/>
-          </a:xfrm>
-          <a:prstGeom prst="triangle">
-            <a:avLst/>
-          </a:prstGeom>
-          <a:solidFill>
-            <a:srgbClr val="475569"/>
-          </a:solidFill>
-          <a:ln>
-            <a:noFill/>
-          </a:ln>
-          <a:effectLst/>
-        </p:spPr>
-        <p:style>
-          <a:lnRef idx="1">
-            <a:schemeClr val="accent1"/>
-          </a:lnRef>
-          <a:fillRef idx="3">
-            <a:schemeClr val="accent1"/>
-          </a:fillRef>
-          <a:effectRef idx="2">
-            <a:schemeClr val="accent1"/>
-          </a:effectRef>
-          <a:fontRef idx="minor">
-            <a:schemeClr val="lt1"/>
-          </a:fontRef>
-        </p:style>
-        <p:txBody>
-          <a:bodyPr rtlCol="0" anchor="ctr"/>
-          <a:lstStyle/>
-          <a:p>
-            <a:pPr algn="ctr"/>
-          </a:p>
-        </p:txBody>
-      </p:sp>
-      <p:sp>
-        <p:nvSpPr>
-          <p:cNvPr id="32" name="Rounded Rectangle 31"/>
-          <p:cNvSpPr/>
-          <p:nvPr/>
-        </p:nvSpPr>
-        <p:spPr>
-          <a:xfrm>
-            <a:off x="857250" y="5715000"/>
-            <a:ext cx="10477500" cy="419100"/>
-          </a:xfrm>
-          <a:prstGeom prst="roundRect">
-            <a:avLst>
-              <a:gd name="adj" fmla="val 8000"/>
-            </a:avLst>
-          </a:prstGeom>
-          <a:solidFill>
-            <a:srgbClr val="F1F5F9"/>
-          </a:solidFill>
-          <a:ln>
-            <a:noFill/>
-          </a:ln>
-          <a:effectLst/>
-        </p:spPr>
-        <p:style>
-          <a:lnRef idx="1">
-            <a:schemeClr val="accent1"/>
-          </a:lnRef>
-          <a:fillRef idx="3">
-            <a:schemeClr val="accent1"/>
-          </a:fillRef>
-          <a:effectRef idx="2">
-            <a:schemeClr val="accent1"/>
-          </a:effectRef>
-          <a:fontRef idx="minor">
-            <a:schemeClr val="lt1"/>
-          </a:fontRef>
-        </p:style>
-        <p:txBody>
-          <a:bodyPr rtlCol="0" anchor="ctr"/>
-          <a:lstStyle/>
-          <a:p>
-            <a:pPr algn="ctr"/>
-          </a:p>
-        </p:txBody>
-      </p:sp>
-      <p:sp>
-        <p:nvSpPr>
-          <p:cNvPr id="33" name="TextBox 32"/>
-          <p:cNvSpPr txBox="1"/>
-          <p:nvPr/>
-        </p:nvSpPr>
-        <p:spPr>
-          <a:xfrm>
-            <a:off x="1009650" y="5715000"/>
-            <a:ext cx="10172700" cy="419100"/>
-          </a:xfrm>
-          <a:prstGeom prst="rect">
-            <a:avLst/>
-          </a:prstGeom>
-          <a:noFill/>
-        </p:spPr>
-        <p:txBody>
-          <a:bodyPr wrap="square" anchor="ctr">
-            <a:spAutoFit/>
-          </a:bodyPr>
-          <a:lstStyle/>
-          <a:p>
-            <a:pPr algn="l">
-              <a:lnSpc>
-                <a:spcPct val="100000"/>
-              </a:lnSpc>
-            </a:pPr>
-            <a:r>
-              <a:rPr sz="1200" b="0">
-                <a:solidFill>
-                  <a:srgbClr val="2563EB"/>
-                </a:solidFill>
-                <a:latin typeface="PingFang SC"/>
-              </a:rPr>
-              <a:t>▶ 编排结果=微型工作流</a:t>
-            </a:r>
-          </a:p>
-        </p:txBody>
-      </p:sp>
-      <p:sp>
-        <p:nvSpPr>
-          <p:cNvPr id="34" name="TextBox 33"/>
-          <p:cNvSpPr txBox="1"/>
-          <p:nvPr/>
-        </p:nvSpPr>
-        <p:spPr>
-          <a:xfrm>
-            <a:off x="10287000" y="6534150"/>
-            <a:ext cx="1619250" cy="266700"/>
-          </a:xfrm>
-          <a:prstGeom prst="rect">
-            <a:avLst/>
-          </a:prstGeom>
-          <a:noFill/>
-        </p:spPr>
-        <p:txBody>
-          <a:bodyPr wrap="square" anchor="ctr">
-            <a:spAutoFit/>
-          </a:bodyPr>
-          <a:lstStyle/>
-          <a:p>
-            <a:pPr algn="r">
-              <a:lnSpc>
-                <a:spcPct val="100000"/>
-              </a:lnSpc>
-            </a:pPr>
-            <a:r>
               <a:rPr sz="900" b="0">
                 <a:solidFill>
                   <a:srgbClr val="94A3B8"/>
@@ -8715,7 +8676,7 @@
       </p:sp>
       <p:sp>
         <p:nvSpPr>
-          <p:cNvPr id="35" name="TextBox 34"/>
+          <p:cNvPr id="34" name="TextBox 33"/>
           <p:cNvSpPr txBox="1"/>
           <p:nvPr/>
         </p:nvSpPr>
@@ -9900,8 +9861,8 @@
         </p:nvSpPr>
         <p:spPr>
           <a:xfrm>
-            <a:off x="3714750" y="1905000"/>
-            <a:ext cx="2228850" cy="1047750"/>
+            <a:off x="2524125" y="2000250"/>
+            <a:ext cx="2190750" cy="552450"/>
           </a:xfrm>
           <a:prstGeom prst="roundRect">
             <a:avLst>
@@ -9948,8 +9909,8 @@
         </p:nvSpPr>
         <p:spPr>
           <a:xfrm>
-            <a:off x="3714750" y="1905000"/>
-            <a:ext cx="2228850" cy="1047750"/>
+            <a:off x="2524125" y="2000250"/>
+            <a:ext cx="2190750" cy="552450"/>
           </a:xfrm>
           <a:prstGeom prst="rect">
             <a:avLst/>
@@ -9970,7 +9931,7 @@
             <a:r>
               <a:rPr sz="1300" b="1">
                 <a:solidFill>
-                  <a:srgbClr val="475569"/>
+                  <a:srgbClr val="0B1D3A"/>
                 </a:solidFill>
                 <a:latin typeface="PingFang SC"/>
               </a:rPr>
@@ -9987,8 +9948,8 @@
         </p:nvSpPr>
         <p:spPr>
           <a:xfrm>
-            <a:off x="6096000" y="1905000"/>
-            <a:ext cx="2228850" cy="1047750"/>
+            <a:off x="7477125" y="2000250"/>
+            <a:ext cx="2190750" cy="552450"/>
           </a:xfrm>
           <a:prstGeom prst="roundRect">
             <a:avLst>
@@ -10035,8 +9996,8 @@
         </p:nvSpPr>
         <p:spPr>
           <a:xfrm>
-            <a:off x="6096000" y="1905000"/>
-            <a:ext cx="2228850" cy="1047750"/>
+            <a:off x="7477125" y="2000250"/>
+            <a:ext cx="2190750" cy="552450"/>
           </a:xfrm>
           <a:prstGeom prst="rect">
             <a:avLst/>
@@ -10057,7 +10018,7 @@
             <a:r>
               <a:rPr sz="1300" b="1">
                 <a:solidFill>
-                  <a:srgbClr val="475569"/>
+                  <a:srgbClr val="0B1D3A"/>
                 </a:solidFill>
                 <a:latin typeface="PingFang SC"/>
               </a:rPr>
@@ -10074,8 +10035,8 @@
         </p:nvSpPr>
         <p:spPr>
           <a:xfrm>
-            <a:off x="3714750" y="3524250"/>
-            <a:ext cx="2228850" cy="1047750"/>
+            <a:off x="2524125" y="3429000"/>
+            <a:ext cx="2190750" cy="552450"/>
           </a:xfrm>
           <a:prstGeom prst="roundRect">
             <a:avLst>
@@ -10122,8 +10083,8 @@
         </p:nvSpPr>
         <p:spPr>
           <a:xfrm>
-            <a:off x="3714750" y="3524250"/>
-            <a:ext cx="2228850" cy="1047750"/>
+            <a:off x="2524125" y="3429000"/>
+            <a:ext cx="2190750" cy="552450"/>
           </a:xfrm>
           <a:prstGeom prst="rect">
             <a:avLst/>
@@ -10144,7 +10105,7 @@
             <a:r>
               <a:rPr sz="1300" b="1">
                 <a:solidFill>
-                  <a:srgbClr val="475569"/>
+                  <a:srgbClr val="0B1D3A"/>
                 </a:solidFill>
                 <a:latin typeface="PingFang SC"/>
               </a:rPr>
@@ -10161,8 +10122,8 @@
         </p:nvSpPr>
         <p:spPr>
           <a:xfrm>
-            <a:off x="6096000" y="3524250"/>
-            <a:ext cx="2228850" cy="1047750"/>
+            <a:off x="7477125" y="3429000"/>
+            <a:ext cx="2190750" cy="552450"/>
           </a:xfrm>
           <a:prstGeom prst="roundRect">
             <a:avLst>
@@ -10209,8 +10170,8 @@
         </p:nvSpPr>
         <p:spPr>
           <a:xfrm>
-            <a:off x="6096000" y="3524250"/>
-            <a:ext cx="2228850" cy="1047750"/>
+            <a:off x="7477125" y="3429000"/>
+            <a:ext cx="2190750" cy="552450"/>
           </a:xfrm>
           <a:prstGeom prst="rect">
             <a:avLst/>
@@ -10231,7 +10192,7 @@
             <a:r>
               <a:rPr sz="1300" b="1">
                 <a:solidFill>
-                  <a:srgbClr val="475569"/>
+                  <a:srgbClr val="0B1D3A"/>
                 </a:solidFill>
                 <a:latin typeface="PingFang SC"/>
               </a:rPr>
@@ -10248,15 +10209,15 @@
         </p:nvCxnSpPr>
         <p:spPr>
           <a:xfrm>
-            <a:off x="5943600" y="2428875"/>
-            <a:ext cx="152400" cy="0"/>
+            <a:off x="4714875" y="2276475"/>
+            <a:ext cx="2695575" cy="0"/>
           </a:xfrm>
           <a:prstGeom prst="line">
             <a:avLst/>
           </a:prstGeom>
-          <a:ln w="17780">
+          <a:ln w="19050">
             <a:solidFill>
-              <a:srgbClr val="475569"/>
+              <a:srgbClr val="2563EB"/>
             </a:solidFill>
           </a:ln>
         </p:spPr>
@@ -10283,14 +10244,14 @@
         </p:nvSpPr>
         <p:spPr>
           <a:xfrm rot="5400000">
-            <a:off x="6010276" y="2386013"/>
+            <a:off x="7324726" y="2233613"/>
             <a:ext cx="85725" cy="85725"/>
           </a:xfrm>
           <a:prstGeom prst="triangle">
             <a:avLst/>
           </a:prstGeom>
           <a:solidFill>
-            <a:srgbClr val="475569"/>
+            <a:srgbClr val="2563EB"/>
           </a:solidFill>
           <a:ln>
             <a:noFill/>
@@ -10321,14 +10282,62 @@
       </p:sp>
       <p:sp>
         <p:nvSpPr>
-          <p:cNvPr id="15" name="TextBox 14"/>
+          <p:cNvPr id="15" name="Rounded Rectangle 14"/>
+          <p:cNvSpPr/>
+          <p:nvPr/>
+        </p:nvSpPr>
+        <p:spPr>
+          <a:xfrm>
+            <a:off x="5500687" y="2133600"/>
+            <a:ext cx="1123950" cy="285750"/>
+          </a:xfrm>
+          <a:prstGeom prst="roundRect">
+            <a:avLst>
+              <a:gd name="adj" fmla="val 8000"/>
+            </a:avLst>
+          </a:prstGeom>
+          <a:solidFill>
+            <a:srgbClr val="FFFFFF"/>
+          </a:solidFill>
+          <a:ln w="12700">
+            <a:solidFill>
+              <a:srgbClr val="DDE5EE"/>
+            </a:solidFill>
+          </a:ln>
+          <a:effectLst/>
+        </p:spPr>
+        <p:style>
+          <a:lnRef idx="1">
+            <a:schemeClr val="accent1"/>
+          </a:lnRef>
+          <a:fillRef idx="3">
+            <a:schemeClr val="accent1"/>
+          </a:fillRef>
+          <a:effectRef idx="2">
+            <a:schemeClr val="accent1"/>
+          </a:effectRef>
+          <a:fontRef idx="minor">
+            <a:schemeClr val="lt1"/>
+          </a:fontRef>
+        </p:style>
+        <p:txBody>
+          <a:bodyPr rtlCol="0" anchor="ctr"/>
+          <a:lstStyle/>
+          <a:p>
+            <a:pPr algn="ctr"/>
+          </a:p>
+        </p:txBody>
+      </p:sp>
+      <p:sp>
+        <p:nvSpPr>
+          <p:cNvPr id="16" name="TextBox 15"/>
           <p:cNvSpPr txBox="1"/>
           <p:nvPr/>
         </p:nvSpPr>
         <p:spPr>
           <a:xfrm>
-            <a:off x="5162550" y="2105025"/>
-            <a:ext cx="1714500" cy="228600"/>
+            <a:off x="5500687" y="2133600"/>
+            <a:ext cx="1123950" cy="285750"/>
           </a:xfrm>
           <a:prstGeom prst="rect">
             <a:avLst/>
@@ -10347,9 +10356,9 @@
               </a:lnSpc>
             </a:pPr>
             <a:r>
-              <a:rPr sz="900" b="0">
-                <a:solidFill>
-                  <a:srgbClr val="94A3B8"/>
+              <a:rPr sz="1100" b="1">
+                <a:solidFill>
+                  <a:srgbClr val="0B1D3A"/>
                 </a:solidFill>
                 <a:latin typeface="PingFang SC"/>
               </a:rPr>
@@ -10360,23 +10369,62 @@
       </p:sp>
       <p:cxnSp>
         <p:nvCxnSpPr>
-          <p:cNvPr id="16" name="Connector 15"/>
+          <p:cNvPr id="17" name="Connector 16"/>
           <p:cNvCxnSpPr/>
           <p:nvPr/>
         </p:nvCxnSpPr>
         <p:spPr>
+          <a:xfrm flipV="1">
+            <a:off x="8572500" y="1562100"/>
+            <a:ext cx="0" cy="419100"/>
+          </a:xfrm>
+          <a:prstGeom prst="line">
+            <a:avLst/>
+          </a:prstGeom>
+          <a:ln w="12700">
+            <a:solidFill>
+              <a:srgbClr val="DDE5EE"/>
+            </a:solidFill>
+            <a:prstDash val="dash"/>
+          </a:ln>
+          <a:effectLst/>
+        </p:spPr>
+        <p:style>
+          <a:lnRef idx="2">
+            <a:schemeClr val="accent1"/>
+          </a:lnRef>
+          <a:fillRef idx="0">
+            <a:schemeClr val="accent1"/>
+          </a:fillRef>
+          <a:effectRef idx="1">
+            <a:schemeClr val="accent1"/>
+          </a:effectRef>
+          <a:fontRef idx="minor">
+            <a:schemeClr val="tx1"/>
+          </a:fontRef>
+        </p:style>
+      </p:cxnSp>
+      <p:cxnSp>
+        <p:nvCxnSpPr>
+          <p:cNvPr id="18" name="Connector 17"/>
+          <p:cNvCxnSpPr/>
+          <p:nvPr/>
+        </p:nvCxnSpPr>
+        <p:spPr>
           <a:xfrm flipH="1">
-            <a:off x="5943600" y="2428875"/>
-            <a:ext cx="1266825" cy="1619250"/>
+            <a:off x="3619500" y="1562100"/>
+            <a:ext cx="4953000" cy="0"/>
           </a:xfrm>
           <a:prstGeom prst="line">
             <a:avLst/>
           </a:prstGeom>
-          <a:ln w="17780">
+          <a:ln w="12700">
             <a:solidFill>
-              <a:srgbClr val="475569"/>
+              <a:srgbClr val="DDE5EE"/>
             </a:solidFill>
-          </a:ln>
+            <a:prstDash val="dash"/>
+          </a:ln>
+          <a:effectLst/>
         </p:spPr>
         <p:style>
           <a:lnRef idx="2">
@@ -10393,22 +10441,94 @@
           </a:fontRef>
         </p:style>
       </p:cxnSp>
-      <p:sp>
-        <p:nvSpPr>
-          <p:cNvPr id="17" name="Isosceles Triangle 16"/>
-          <p:cNvSpPr/>
-          <p:nvPr/>
-        </p:nvSpPr>
-        <p:spPr>
-          <a:xfrm rot="13082277">
-            <a:off x="5927149" y="3971505"/>
+      <p:cxnSp>
+        <p:nvCxnSpPr>
+          <p:cNvPr id="19" name="Connector 18"/>
+          <p:cNvCxnSpPr/>
+          <p:nvPr/>
+        </p:nvCxnSpPr>
+        <p:spPr>
+          <a:xfrm>
+            <a:off x="3619500" y="1562100"/>
+            <a:ext cx="0" cy="1781175"/>
+          </a:xfrm>
+          <a:prstGeom prst="line">
+            <a:avLst/>
+          </a:prstGeom>
+          <a:ln w="12700">
+            <a:solidFill>
+              <a:srgbClr val="DDE5EE"/>
+            </a:solidFill>
+            <a:prstDash val="dash"/>
+          </a:ln>
+          <a:effectLst/>
+        </p:spPr>
+        <p:style>
+          <a:lnRef idx="2">
+            <a:schemeClr val="accent1"/>
+          </a:lnRef>
+          <a:fillRef idx="0">
+            <a:schemeClr val="accent1"/>
+          </a:fillRef>
+          <a:effectRef idx="1">
+            <a:schemeClr val="accent1"/>
+          </a:effectRef>
+          <a:fontRef idx="minor">
+            <a:schemeClr val="tx1"/>
+          </a:fontRef>
+        </p:style>
+      </p:cxnSp>
+      <p:cxnSp>
+        <p:nvCxnSpPr>
+          <p:cNvPr id="20" name="Connector 19"/>
+          <p:cNvCxnSpPr/>
+          <p:nvPr/>
+        </p:nvCxnSpPr>
+        <p:spPr>
+          <a:xfrm>
+            <a:off x="4714875" y="3705225"/>
+            <a:ext cx="2695575" cy="0"/>
+          </a:xfrm>
+          <a:prstGeom prst="line">
+            <a:avLst/>
+          </a:prstGeom>
+          <a:ln w="19050">
+            <a:solidFill>
+              <a:srgbClr val="2563EB"/>
+            </a:solidFill>
+          </a:ln>
+        </p:spPr>
+        <p:style>
+          <a:lnRef idx="2">
+            <a:schemeClr val="accent1"/>
+          </a:lnRef>
+          <a:fillRef idx="0">
+            <a:schemeClr val="accent1"/>
+          </a:fillRef>
+          <a:effectRef idx="1">
+            <a:schemeClr val="accent1"/>
+          </a:effectRef>
+          <a:fontRef idx="minor">
+            <a:schemeClr val="tx1"/>
+          </a:fontRef>
+        </p:style>
+      </p:cxnSp>
+      <p:sp>
+        <p:nvSpPr>
+          <p:cNvPr id="21" name="Isosceles Triangle 20"/>
+          <p:cNvSpPr/>
+          <p:nvPr/>
+        </p:nvSpPr>
+        <p:spPr>
+          <a:xfrm rot="5400000">
+            <a:off x="7324726" y="3662363"/>
             <a:ext cx="85725" cy="85725"/>
           </a:xfrm>
           <a:prstGeom prst="triangle">
             <a:avLst/>
           </a:prstGeom>
           <a:solidFill>
-            <a:srgbClr val="475569"/>
+            <a:srgbClr val="2563EB"/>
           </a:solidFill>
           <a:ln>
             <a:noFill/>
@@ -10439,14 +10559,62 @@
       </p:sp>
       <p:sp>
         <p:nvSpPr>
-          <p:cNvPr id="18" name="TextBox 17"/>
+          <p:cNvPr id="22" name="Rounded Rectangle 21"/>
+          <p:cNvSpPr/>
+          <p:nvPr/>
+        </p:nvSpPr>
+        <p:spPr>
+          <a:xfrm>
+            <a:off x="5500687" y="3562350"/>
+            <a:ext cx="1123950" cy="285750"/>
+          </a:xfrm>
+          <a:prstGeom prst="roundRect">
+            <a:avLst>
+              <a:gd name="adj" fmla="val 8000"/>
+            </a:avLst>
+          </a:prstGeom>
+          <a:solidFill>
+            <a:srgbClr val="FFFFFF"/>
+          </a:solidFill>
+          <a:ln w="12700">
+            <a:solidFill>
+              <a:srgbClr val="DDE5EE"/>
+            </a:solidFill>
+          </a:ln>
+          <a:effectLst/>
+        </p:spPr>
+        <p:style>
+          <a:lnRef idx="1">
+            <a:schemeClr val="accent1"/>
+          </a:lnRef>
+          <a:fillRef idx="3">
+            <a:schemeClr val="accent1"/>
+          </a:fillRef>
+          <a:effectRef idx="2">
+            <a:schemeClr val="accent1"/>
+          </a:effectRef>
+          <a:fontRef idx="minor">
+            <a:schemeClr val="lt1"/>
+          </a:fontRef>
+        </p:style>
+        <p:txBody>
+          <a:bodyPr rtlCol="0" anchor="ctr"/>
+          <a:lstStyle/>
+          <a:p>
+            <a:pPr algn="ctr"/>
+          </a:p>
+        </p:txBody>
+      </p:sp>
+      <p:sp>
+        <p:nvSpPr>
+          <p:cNvPr id="23" name="TextBox 22"/>
           <p:cNvSpPr txBox="1"/>
           <p:nvPr/>
         </p:nvSpPr>
         <p:spPr>
           <a:xfrm>
-            <a:off x="5643562" y="2105025"/>
-            <a:ext cx="1714500" cy="228600"/>
+            <a:off x="5500687" y="3562350"/>
+            <a:ext cx="1123950" cy="285750"/>
           </a:xfrm>
           <a:prstGeom prst="rect">
             <a:avLst/>
@@ -10465,34 +10633,34 @@
               </a:lnSpc>
             </a:pPr>
             <a:r>
-              <a:rPr sz="900" b="0">
-                <a:solidFill>
-                  <a:srgbClr val="94A3B8"/>
+              <a:rPr sz="1100" b="1">
+                <a:solidFill>
+                  <a:srgbClr val="0B1D3A"/>
                 </a:solidFill>
                 <a:latin typeface="PingFang SC"/>
               </a:rPr>
-              <a:t>评估达标</a:t>
+              <a:t>低分下线</a:t>
             </a:r>
           </a:p>
         </p:txBody>
       </p:sp>
       <p:cxnSp>
         <p:nvCxnSpPr>
-          <p:cNvPr id="19" name="Connector 18"/>
+          <p:cNvPr id="24" name="Connector 23"/>
           <p:cNvCxnSpPr/>
           <p:nvPr/>
         </p:nvCxnSpPr>
         <p:spPr>
-          <a:xfrm>
-            <a:off x="5943600" y="4048125"/>
-            <a:ext cx="152400" cy="0"/>
+          <a:xfrm flipH="1">
+            <a:off x="4781550" y="2276475"/>
+            <a:ext cx="2695575" cy="0"/>
           </a:xfrm>
           <a:prstGeom prst="line">
             <a:avLst/>
           </a:prstGeom>
-          <a:ln w="17780">
+          <a:ln w="19050">
             <a:solidFill>
-              <a:srgbClr val="475569"/>
+              <a:srgbClr val="F87171"/>
             </a:solidFill>
           </a:ln>
         </p:spPr>
@@ -10513,20 +10681,20 @@
       </p:cxnSp>
       <p:sp>
         <p:nvSpPr>
-          <p:cNvPr id="20" name="Isosceles Triangle 19"/>
-          <p:cNvSpPr/>
-          <p:nvPr/>
-        </p:nvSpPr>
-        <p:spPr>
-          <a:xfrm rot="5400000">
-            <a:off x="6010276" y="4005263"/>
+          <p:cNvPr id="25" name="Isosceles Triangle 24"/>
+          <p:cNvSpPr/>
+          <p:nvPr/>
+        </p:nvSpPr>
+        <p:spPr>
+          <a:xfrm rot="16200000">
+            <a:off x="4781550" y="2233613"/>
             <a:ext cx="85725" cy="85725"/>
           </a:xfrm>
           <a:prstGeom prst="triangle">
             <a:avLst/>
           </a:prstGeom>
           <a:solidFill>
-            <a:srgbClr val="475569"/>
+            <a:srgbClr val="F87171"/>
           </a:solidFill>
           <a:ln>
             <a:noFill/>
@@ -10557,14 +10725,62 @@
       </p:sp>
       <p:sp>
         <p:nvSpPr>
-          <p:cNvPr id="21" name="TextBox 20"/>
+          <p:cNvPr id="26" name="Rounded Rectangle 25"/>
+          <p:cNvSpPr/>
+          <p:nvPr/>
+        </p:nvSpPr>
+        <p:spPr>
+          <a:xfrm>
+            <a:off x="5567362" y="2133600"/>
+            <a:ext cx="1123950" cy="285750"/>
+          </a:xfrm>
+          <a:prstGeom prst="roundRect">
+            <a:avLst>
+              <a:gd name="adj" fmla="val 8000"/>
+            </a:avLst>
+          </a:prstGeom>
+          <a:solidFill>
+            <a:srgbClr val="FFFFFF"/>
+          </a:solidFill>
+          <a:ln w="12700">
+            <a:solidFill>
+              <a:srgbClr val="DDE5EE"/>
+            </a:solidFill>
+          </a:ln>
+          <a:effectLst/>
+        </p:spPr>
+        <p:style>
+          <a:lnRef idx="1">
+            <a:schemeClr val="accent1"/>
+          </a:lnRef>
+          <a:fillRef idx="3">
+            <a:schemeClr val="accent1"/>
+          </a:fillRef>
+          <a:effectRef idx="2">
+            <a:schemeClr val="accent1"/>
+          </a:effectRef>
+          <a:fontRef idx="minor">
+            <a:schemeClr val="lt1"/>
+          </a:fontRef>
+        </p:style>
+        <p:txBody>
+          <a:bodyPr rtlCol="0" anchor="ctr"/>
+          <a:lstStyle/>
+          <a:p>
+            <a:pPr algn="ctr"/>
+          </a:p>
+        </p:txBody>
+      </p:sp>
+      <p:sp>
+        <p:nvSpPr>
+          <p:cNvPr id="27" name="TextBox 26"/>
           <p:cNvSpPr txBox="1"/>
           <p:nvPr/>
         </p:nvSpPr>
         <p:spPr>
           <a:xfrm>
-            <a:off x="5162550" y="3724275"/>
-            <a:ext cx="1714500" cy="228600"/>
+            <a:off x="5567362" y="2133600"/>
+            <a:ext cx="1123950" cy="285750"/>
           </a:xfrm>
           <a:prstGeom prst="rect">
             <a:avLst/>
@@ -10583,138 +10799,20 @@
               </a:lnSpc>
             </a:pPr>
             <a:r>
-              <a:rPr sz="900" b="0">
-                <a:solidFill>
-                  <a:srgbClr val="94A3B8"/>
+              <a:rPr sz="1100" b="1">
+                <a:solidFill>
+                  <a:srgbClr val="0B1D3A"/>
                 </a:solidFill>
                 <a:latin typeface="PingFang SC"/>
               </a:rPr>
-              <a:t>低分下线</a:t>
-            </a:r>
-          </a:p>
-        </p:txBody>
-      </p:sp>
-      <p:cxnSp>
-        <p:nvCxnSpPr>
-          <p:cNvPr id="22" name="Connector 21"/>
-          <p:cNvCxnSpPr/>
-          <p:nvPr/>
-        </p:nvCxnSpPr>
-        <p:spPr>
-          <a:xfrm flipH="1">
-            <a:off x="5943600" y="2428875"/>
-            <a:ext cx="1266825" cy="0"/>
-          </a:xfrm>
-          <a:prstGeom prst="line">
-            <a:avLst/>
-          </a:prstGeom>
-          <a:ln w="17780">
-            <a:solidFill>
-              <a:srgbClr val="475569"/>
-            </a:solidFill>
-          </a:ln>
-        </p:spPr>
-        <p:style>
-          <a:lnRef idx="2">
-            <a:schemeClr val="accent1"/>
-          </a:lnRef>
-          <a:fillRef idx="0">
-            <a:schemeClr val="accent1"/>
-          </a:fillRef>
-          <a:effectRef idx="1">
-            <a:schemeClr val="accent1"/>
-          </a:effectRef>
-          <a:fontRef idx="minor">
-            <a:schemeClr val="tx1"/>
-          </a:fontRef>
-        </p:style>
-      </p:cxnSp>
-      <p:sp>
-        <p:nvSpPr>
-          <p:cNvPr id="23" name="Isosceles Triangle 22"/>
-          <p:cNvSpPr/>
-          <p:nvPr/>
-        </p:nvSpPr>
-        <p:spPr>
-          <a:xfrm rot="16200000">
-            <a:off x="5943600" y="2386013"/>
-            <a:ext cx="85725" cy="85725"/>
-          </a:xfrm>
-          <a:prstGeom prst="triangle">
-            <a:avLst/>
-          </a:prstGeom>
-          <a:solidFill>
-            <a:srgbClr val="475569"/>
-          </a:solidFill>
-          <a:ln>
-            <a:noFill/>
-          </a:ln>
-          <a:effectLst/>
-        </p:spPr>
-        <p:style>
-          <a:lnRef idx="1">
-            <a:schemeClr val="accent1"/>
-          </a:lnRef>
-          <a:fillRef idx="3">
-            <a:schemeClr val="accent1"/>
-          </a:fillRef>
-          <a:effectRef idx="2">
-            <a:schemeClr val="accent1"/>
-          </a:effectRef>
-          <a:fontRef idx="minor">
-            <a:schemeClr val="lt1"/>
-          </a:fontRef>
-        </p:style>
-        <p:txBody>
-          <a:bodyPr rtlCol="0" anchor="ctr"/>
-          <a:lstStyle/>
-          <a:p>
-            <a:pPr algn="ctr"/>
-          </a:p>
-        </p:txBody>
-      </p:sp>
-      <p:sp>
-        <p:nvSpPr>
-          <p:cNvPr id="24" name="TextBox 23"/>
-          <p:cNvSpPr txBox="1"/>
-          <p:nvPr/>
-        </p:nvSpPr>
-        <p:spPr>
-          <a:xfrm>
-            <a:off x="5643562" y="2105025"/>
-            <a:ext cx="1714500" cy="228600"/>
-          </a:xfrm>
-          <a:prstGeom prst="rect">
-            <a:avLst/>
-          </a:prstGeom>
-          <a:noFill/>
-        </p:spPr>
-        <p:txBody>
-          <a:bodyPr wrap="square" anchor="ctr">
-            <a:spAutoFit/>
-          </a:bodyPr>
-          <a:lstStyle/>
-          <a:p>
-            <a:pPr algn="ctr">
-              <a:lnSpc>
-                <a:spcPct val="100000"/>
-              </a:lnSpc>
-            </a:pPr>
-            <a:r>
-              <a:rPr sz="900" b="0">
-                <a:solidFill>
-                  <a:srgbClr val="94A3B8"/>
-                </a:solidFill>
-                <a:latin typeface="PingFang SC"/>
-              </a:rPr>
-              <a:t>打回修改|版本必须递增(强制)</a:t>
-            </a:r>
-          </a:p>
-        </p:txBody>
-      </p:sp>
-      <p:sp>
-        <p:nvSpPr>
-          <p:cNvPr id="25" name="TextBox 24"/>
+              <a:t>打回修改</a:t>
+            </a:r>
+          </a:p>
+        </p:txBody>
+      </p:sp>
+      <p:sp>
+        <p:nvSpPr>
+          <p:cNvPr id="28" name="TextBox 27"/>
           <p:cNvSpPr txBox="1"/>
           <p:nvPr/>
         </p:nvSpPr>
@@ -10753,7 +10851,7 @@
       </p:sp>
       <p:sp>
         <p:nvSpPr>
-          <p:cNvPr id="26" name="TextBox 25"/>
+          <p:cNvPr id="29" name="TextBox 28"/>
           <p:cNvSpPr txBox="1"/>
           <p:nvPr/>
         </p:nvSpPr>
@@ -11709,21 +11807,391 @@
                 </a:solidFill>
                 <a:latin typeface="PingFang SC"/>
               </a:rPr>
-              <a:t>registry.find 实测,$ reg.find("帮我做一次生产事故复盘 分析根因");SkillDef(name='incident-review', version='2.0');$ reg.register(同名 version='1.5');ValueError: version must increase;# 倒退注册直接拒绝</a:t>
-            </a:r>
-          </a:p>
-        </p:txBody>
-      </p:sp>
-      <p:sp>
-        <p:nvSpPr>
-          <p:cNvPr id="5" name="TextBox 4"/>
+              <a:t>registry.find 实测</a:t>
+            </a:r>
+          </a:p>
+        </p:txBody>
+      </p:sp>
+      <p:sp>
+        <p:nvSpPr>
+          <p:cNvPr id="5" name="Rounded Rectangle 4"/>
+          <p:cNvSpPr/>
+          <p:nvPr/>
+        </p:nvSpPr>
+        <p:spPr>
+          <a:xfrm>
+            <a:off x="1333500" y="1047750"/>
+            <a:ext cx="9525000" cy="2667000"/>
+          </a:xfrm>
+          <a:prstGeom prst="roundRect">
+            <a:avLst>
+              <a:gd name="adj" fmla="val 8000"/>
+            </a:avLst>
+          </a:prstGeom>
+          <a:solidFill>
+            <a:srgbClr val="0D1117"/>
+          </a:solidFill>
+          <a:ln>
+            <a:noFill/>
+          </a:ln>
+          <a:effectLst/>
+        </p:spPr>
+        <p:style>
+          <a:lnRef idx="1">
+            <a:schemeClr val="accent1"/>
+          </a:lnRef>
+          <a:fillRef idx="3">
+            <a:schemeClr val="accent1"/>
+          </a:fillRef>
+          <a:effectRef idx="2">
+            <a:schemeClr val="accent1"/>
+          </a:effectRef>
+          <a:fontRef idx="minor">
+            <a:schemeClr val="lt1"/>
+          </a:fontRef>
+        </p:style>
+        <p:txBody>
+          <a:bodyPr rtlCol="0" anchor="ctr"/>
+          <a:lstStyle/>
+          <a:p>
+            <a:pPr algn="ctr"/>
+          </a:p>
+        </p:txBody>
+      </p:sp>
+      <p:sp>
+        <p:nvSpPr>
+          <p:cNvPr id="6" name="Rectangle 5"/>
+          <p:cNvSpPr/>
+          <p:nvPr/>
+        </p:nvSpPr>
+        <p:spPr>
+          <a:xfrm>
+            <a:off x="1333500" y="1047750"/>
+            <a:ext cx="9525000" cy="381000"/>
+          </a:xfrm>
+          <a:prstGeom prst="rect">
+            <a:avLst/>
+          </a:prstGeom>
+          <a:solidFill>
+            <a:srgbClr val="1F2937"/>
+          </a:solidFill>
+          <a:ln>
+            <a:noFill/>
+          </a:ln>
+          <a:effectLst/>
+        </p:spPr>
+        <p:style>
+          <a:lnRef idx="1">
+            <a:schemeClr val="accent1"/>
+          </a:lnRef>
+          <a:fillRef idx="3">
+            <a:schemeClr val="accent1"/>
+          </a:fillRef>
+          <a:effectRef idx="2">
+            <a:schemeClr val="accent1"/>
+          </a:effectRef>
+          <a:fontRef idx="minor">
+            <a:schemeClr val="lt1"/>
+          </a:fontRef>
+        </p:style>
+        <p:txBody>
+          <a:bodyPr rtlCol="0" anchor="ctr"/>
+          <a:lstStyle/>
+          <a:p>
+            <a:pPr algn="ctr"/>
+          </a:p>
+        </p:txBody>
+      </p:sp>
+      <p:sp>
+        <p:nvSpPr>
+          <p:cNvPr id="7" name="Rounded Rectangle 6"/>
+          <p:cNvSpPr/>
+          <p:nvPr/>
+        </p:nvSpPr>
+        <p:spPr>
+          <a:xfrm>
+            <a:off x="1504950" y="1181100"/>
+            <a:ext cx="123825" cy="123825"/>
+          </a:xfrm>
+          <a:prstGeom prst="roundRect">
+            <a:avLst>
+              <a:gd name="adj" fmla="val 8000"/>
+            </a:avLst>
+          </a:prstGeom>
+          <a:solidFill>
+            <a:srgbClr val="F87171"/>
+          </a:solidFill>
+          <a:ln>
+            <a:noFill/>
+          </a:ln>
+          <a:effectLst/>
+        </p:spPr>
+        <p:style>
+          <a:lnRef idx="1">
+            <a:schemeClr val="accent1"/>
+          </a:lnRef>
+          <a:fillRef idx="3">
+            <a:schemeClr val="accent1"/>
+          </a:fillRef>
+          <a:effectRef idx="2">
+            <a:schemeClr val="accent1"/>
+          </a:effectRef>
+          <a:fontRef idx="minor">
+            <a:schemeClr val="lt1"/>
+          </a:fontRef>
+        </p:style>
+        <p:txBody>
+          <a:bodyPr rtlCol="0" anchor="ctr"/>
+          <a:lstStyle/>
+          <a:p>
+            <a:pPr algn="ctr"/>
+          </a:p>
+        </p:txBody>
+      </p:sp>
+      <p:sp>
+        <p:nvSpPr>
+          <p:cNvPr id="8" name="Rounded Rectangle 7"/>
+          <p:cNvSpPr/>
+          <p:nvPr/>
+        </p:nvSpPr>
+        <p:spPr>
+          <a:xfrm>
+            <a:off x="1752600" y="1181100"/>
+            <a:ext cx="123825" cy="123825"/>
+          </a:xfrm>
+          <a:prstGeom prst="roundRect">
+            <a:avLst>
+              <a:gd name="adj" fmla="val 8000"/>
+            </a:avLst>
+          </a:prstGeom>
+          <a:solidFill>
+            <a:srgbClr val="F59E0B"/>
+          </a:solidFill>
+          <a:ln>
+            <a:noFill/>
+          </a:ln>
+          <a:effectLst/>
+        </p:spPr>
+        <p:style>
+          <a:lnRef idx="1">
+            <a:schemeClr val="accent1"/>
+          </a:lnRef>
+          <a:fillRef idx="3">
+            <a:schemeClr val="accent1"/>
+          </a:fillRef>
+          <a:effectRef idx="2">
+            <a:schemeClr val="accent1"/>
+          </a:effectRef>
+          <a:fontRef idx="minor">
+            <a:schemeClr val="lt1"/>
+          </a:fontRef>
+        </p:style>
+        <p:txBody>
+          <a:bodyPr rtlCol="0" anchor="ctr"/>
+          <a:lstStyle/>
+          <a:p>
+            <a:pPr algn="ctr"/>
+          </a:p>
+        </p:txBody>
+      </p:sp>
+      <p:sp>
+        <p:nvSpPr>
+          <p:cNvPr id="9" name="Rounded Rectangle 8"/>
+          <p:cNvSpPr/>
+          <p:nvPr/>
+        </p:nvSpPr>
+        <p:spPr>
+          <a:xfrm>
+            <a:off x="2000250" y="1181100"/>
+            <a:ext cx="123825" cy="123825"/>
+          </a:xfrm>
+          <a:prstGeom prst="roundRect">
+            <a:avLst>
+              <a:gd name="adj" fmla="val 8000"/>
+            </a:avLst>
+          </a:prstGeom>
+          <a:solidFill>
+            <a:srgbClr val="34D399"/>
+          </a:solidFill>
+          <a:ln>
+            <a:noFill/>
+          </a:ln>
+          <a:effectLst/>
+        </p:spPr>
+        <p:style>
+          <a:lnRef idx="1">
+            <a:schemeClr val="accent1"/>
+          </a:lnRef>
+          <a:fillRef idx="3">
+            <a:schemeClr val="accent1"/>
+          </a:fillRef>
+          <a:effectRef idx="2">
+            <a:schemeClr val="accent1"/>
+          </a:effectRef>
+          <a:fontRef idx="minor">
+            <a:schemeClr val="lt1"/>
+          </a:fontRef>
+        </p:style>
+        <p:txBody>
+          <a:bodyPr rtlCol="0" anchor="ctr"/>
+          <a:lstStyle/>
+          <a:p>
+            <a:pPr algn="ctr"/>
+          </a:p>
+        </p:txBody>
+      </p:sp>
+      <p:sp>
+        <p:nvSpPr>
+          <p:cNvPr id="10" name="TextBox 9"/>
           <p:cNvSpPr txBox="1"/>
           <p:nvPr/>
         </p:nvSpPr>
         <p:spPr>
           <a:xfrm>
-            <a:off x="9334500" y="0"/>
-            <a:ext cx="2667000" cy="704850"/>
+            <a:off x="2381250" y="1047750"/>
+            <a:ext cx="8286750" cy="381000"/>
+          </a:xfrm>
+          <a:prstGeom prst="rect">
+            <a:avLst/>
+          </a:prstGeom>
+          <a:noFill/>
+        </p:spPr>
+        <p:txBody>
+          <a:bodyPr wrap="square" anchor="ctr">
+            <a:spAutoFit/>
+          </a:bodyPr>
+          <a:lstStyle/>
+          <a:p>
+            <a:pPr algn="l">
+              <a:lnSpc>
+                <a:spcPct val="100000"/>
+              </a:lnSpc>
+            </a:pPr>
+            <a:r>
+              <a:rPr sz="1100" b="0">
+                <a:solidFill>
+                  <a:srgbClr val="94A3B8"/>
+                </a:solidFill>
+                <a:latin typeface="PingFang SC"/>
+              </a:rPr>
+              <a:t>terminal — 平台实测</a:t>
+            </a:r>
+          </a:p>
+        </p:txBody>
+      </p:sp>
+      <p:sp>
+        <p:nvSpPr>
+          <p:cNvPr id="11" name="TextBox 10"/>
+          <p:cNvSpPr txBox="1"/>
+          <p:nvPr/>
+        </p:nvSpPr>
+        <p:spPr>
+          <a:xfrm>
+            <a:off x="1562100" y="1581150"/>
+            <a:ext cx="9067800" cy="2000250"/>
+          </a:xfrm>
+          <a:prstGeom prst="rect">
+            <a:avLst/>
+          </a:prstGeom>
+          <a:noFill/>
+        </p:spPr>
+        <p:txBody>
+          <a:bodyPr wrap="square">
+            <a:spAutoFit/>
+          </a:bodyPr>
+          <a:lstStyle/>
+          <a:p>
+            <a:pPr>
+              <a:lnSpc>
+                <a:spcPct val="115000"/>
+              </a:lnSpc>
+            </a:pPr>
+            <a:r>
+              <a:rPr sz="1300" b="1">
+                <a:solidFill>
+                  <a:srgbClr val="34D399"/>
+                </a:solidFill>
+                <a:latin typeface="Menlo"/>
+              </a:rPr>
+              <a:t>$ reg.find("帮我做一次生产事故复盘 分析根因")</a:t>
+            </a:r>
+          </a:p>
+          <a:p>
+            <a:pPr>
+              <a:lnSpc>
+                <a:spcPct val="115000"/>
+              </a:lnSpc>
+            </a:pPr>
+            <a:r>
+              <a:rPr sz="1300">
+                <a:solidFill>
+                  <a:srgbClr val="CBD5E1"/>
+                </a:solidFill>
+                <a:latin typeface="Menlo"/>
+              </a:rPr>
+              <a:t>SkillDef(name='incident-review', version='2.0')</a:t>
+            </a:r>
+          </a:p>
+          <a:p>
+            <a:pPr>
+              <a:lnSpc>
+                <a:spcPct val="115000"/>
+              </a:lnSpc>
+            </a:pPr>
+            <a:r>
+              <a:rPr sz="1300" b="1">
+                <a:solidFill>
+                  <a:srgbClr val="34D399"/>
+                </a:solidFill>
+                <a:latin typeface="Menlo"/>
+              </a:rPr>
+              <a:t>$ reg.register(同名 version='1.5')</a:t>
+            </a:r>
+          </a:p>
+          <a:p>
+            <a:pPr>
+              <a:lnSpc>
+                <a:spcPct val="115000"/>
+              </a:lnSpc>
+            </a:pPr>
+            <a:r>
+              <a:rPr sz="1300">
+                <a:solidFill>
+                  <a:srgbClr val="CBD5E1"/>
+                </a:solidFill>
+                <a:latin typeface="Menlo"/>
+              </a:rPr>
+              <a:t>ValueError: version must increase</a:t>
+            </a:r>
+          </a:p>
+          <a:p>
+            <a:pPr>
+              <a:lnSpc>
+                <a:spcPct val="115000"/>
+              </a:lnSpc>
+            </a:pPr>
+            <a:r>
+              <a:rPr sz="1300">
+                <a:solidFill>
+                  <a:srgbClr val="94A3B8"/>
+                </a:solidFill>
+                <a:latin typeface="Menlo"/>
+              </a:rPr>
+              <a:t># 倒退注册直接拒绝</a:t>
+            </a:r>
+          </a:p>
+        </p:txBody>
+      </p:sp>
+      <p:sp>
+        <p:nvSpPr>
+          <p:cNvPr id="12" name="TextBox 11"/>
+          <p:cNvSpPr txBox="1"/>
+          <p:nvPr/>
+        </p:nvSpPr>
+        <p:spPr>
+          <a:xfrm>
+            <a:off x="10287000" y="6534150"/>
+            <a:ext cx="1619250" cy="266700"/>
           </a:xfrm>
           <a:prstGeom prst="rect">
             <a:avLst/>
@@ -11742,351 +12210,6 @@
               </a:lnSpc>
             </a:pPr>
             <a:r>
-              <a:rPr sz="1100" b="0">
-                <a:solidFill>
-                  <a:srgbClr val="94A3B8"/>
-                </a:solidFill>
-                <a:latin typeface="PingFang SC"/>
-              </a:rPr>
-              <a:t>tests 真实断言</a:t>
-            </a:r>
-          </a:p>
-        </p:txBody>
-      </p:sp>
-      <p:sp>
-        <p:nvSpPr>
-          <p:cNvPr id="6" name="Rounded Rectangle 5"/>
-          <p:cNvSpPr/>
-          <p:nvPr/>
-        </p:nvSpPr>
-        <p:spPr>
-          <a:xfrm>
-            <a:off x="1333500" y="952500"/>
-            <a:ext cx="9525000" cy="5048250"/>
-          </a:xfrm>
-          <a:prstGeom prst="roundRect">
-            <a:avLst>
-              <a:gd name="adj" fmla="val 8000"/>
-            </a:avLst>
-          </a:prstGeom>
-          <a:solidFill>
-            <a:srgbClr val="0D1117"/>
-          </a:solidFill>
-          <a:ln>
-            <a:noFill/>
-          </a:ln>
-          <a:effectLst/>
-        </p:spPr>
-        <p:style>
-          <a:lnRef idx="1">
-            <a:schemeClr val="accent1"/>
-          </a:lnRef>
-          <a:fillRef idx="3">
-            <a:schemeClr val="accent1"/>
-          </a:fillRef>
-          <a:effectRef idx="2">
-            <a:schemeClr val="accent1"/>
-          </a:effectRef>
-          <a:fontRef idx="minor">
-            <a:schemeClr val="lt1"/>
-          </a:fontRef>
-        </p:style>
-        <p:txBody>
-          <a:bodyPr rtlCol="0" anchor="ctr"/>
-          <a:lstStyle/>
-          <a:p>
-            <a:pPr algn="ctr"/>
-          </a:p>
-        </p:txBody>
-      </p:sp>
-      <p:sp>
-        <p:nvSpPr>
-          <p:cNvPr id="7" name="Rectangle 6"/>
-          <p:cNvSpPr/>
-          <p:nvPr/>
-        </p:nvSpPr>
-        <p:spPr>
-          <a:xfrm>
-            <a:off x="1333500" y="952500"/>
-            <a:ext cx="9525000" cy="381000"/>
-          </a:xfrm>
-          <a:prstGeom prst="rect">
-            <a:avLst/>
-          </a:prstGeom>
-          <a:solidFill>
-            <a:srgbClr val="1F2937"/>
-          </a:solidFill>
-          <a:ln>
-            <a:noFill/>
-          </a:ln>
-          <a:effectLst/>
-        </p:spPr>
-        <p:style>
-          <a:lnRef idx="1">
-            <a:schemeClr val="accent1"/>
-          </a:lnRef>
-          <a:fillRef idx="3">
-            <a:schemeClr val="accent1"/>
-          </a:fillRef>
-          <a:effectRef idx="2">
-            <a:schemeClr val="accent1"/>
-          </a:effectRef>
-          <a:fontRef idx="minor">
-            <a:schemeClr val="lt1"/>
-          </a:fontRef>
-        </p:style>
-        <p:txBody>
-          <a:bodyPr rtlCol="0" anchor="ctr"/>
-          <a:lstStyle/>
-          <a:p>
-            <a:pPr algn="ctr"/>
-          </a:p>
-        </p:txBody>
-      </p:sp>
-      <p:sp>
-        <p:nvSpPr>
-          <p:cNvPr id="8" name="Rounded Rectangle 7"/>
-          <p:cNvSpPr/>
-          <p:nvPr/>
-        </p:nvSpPr>
-        <p:spPr>
-          <a:xfrm>
-            <a:off x="1504950" y="1085850"/>
-            <a:ext cx="123825" cy="123825"/>
-          </a:xfrm>
-          <a:prstGeom prst="roundRect">
-            <a:avLst>
-              <a:gd name="adj" fmla="val 8000"/>
-            </a:avLst>
-          </a:prstGeom>
-          <a:solidFill>
-            <a:srgbClr val="F87171"/>
-          </a:solidFill>
-          <a:ln>
-            <a:noFill/>
-          </a:ln>
-          <a:effectLst/>
-        </p:spPr>
-        <p:style>
-          <a:lnRef idx="1">
-            <a:schemeClr val="accent1"/>
-          </a:lnRef>
-          <a:fillRef idx="3">
-            <a:schemeClr val="accent1"/>
-          </a:fillRef>
-          <a:effectRef idx="2">
-            <a:schemeClr val="accent1"/>
-          </a:effectRef>
-          <a:fontRef idx="minor">
-            <a:schemeClr val="lt1"/>
-          </a:fontRef>
-        </p:style>
-        <p:txBody>
-          <a:bodyPr rtlCol="0" anchor="ctr"/>
-          <a:lstStyle/>
-          <a:p>
-            <a:pPr algn="ctr"/>
-          </a:p>
-        </p:txBody>
-      </p:sp>
-      <p:sp>
-        <p:nvSpPr>
-          <p:cNvPr id="9" name="Rounded Rectangle 8"/>
-          <p:cNvSpPr/>
-          <p:nvPr/>
-        </p:nvSpPr>
-        <p:spPr>
-          <a:xfrm>
-            <a:off x="1752600" y="1085850"/>
-            <a:ext cx="123825" cy="123825"/>
-          </a:xfrm>
-          <a:prstGeom prst="roundRect">
-            <a:avLst>
-              <a:gd name="adj" fmla="val 8000"/>
-            </a:avLst>
-          </a:prstGeom>
-          <a:solidFill>
-            <a:srgbClr val="F59E0B"/>
-          </a:solidFill>
-          <a:ln>
-            <a:noFill/>
-          </a:ln>
-          <a:effectLst/>
-        </p:spPr>
-        <p:style>
-          <a:lnRef idx="1">
-            <a:schemeClr val="accent1"/>
-          </a:lnRef>
-          <a:fillRef idx="3">
-            <a:schemeClr val="accent1"/>
-          </a:fillRef>
-          <a:effectRef idx="2">
-            <a:schemeClr val="accent1"/>
-          </a:effectRef>
-          <a:fontRef idx="minor">
-            <a:schemeClr val="lt1"/>
-          </a:fontRef>
-        </p:style>
-        <p:txBody>
-          <a:bodyPr rtlCol="0" anchor="ctr"/>
-          <a:lstStyle/>
-          <a:p>
-            <a:pPr algn="ctr"/>
-          </a:p>
-        </p:txBody>
-      </p:sp>
-      <p:sp>
-        <p:nvSpPr>
-          <p:cNvPr id="10" name="Rounded Rectangle 9"/>
-          <p:cNvSpPr/>
-          <p:nvPr/>
-        </p:nvSpPr>
-        <p:spPr>
-          <a:xfrm>
-            <a:off x="2000250" y="1085850"/>
-            <a:ext cx="123825" cy="123825"/>
-          </a:xfrm>
-          <a:prstGeom prst="roundRect">
-            <a:avLst>
-              <a:gd name="adj" fmla="val 8000"/>
-            </a:avLst>
-          </a:prstGeom>
-          <a:solidFill>
-            <a:srgbClr val="34D399"/>
-          </a:solidFill>
-          <a:ln>
-            <a:noFill/>
-          </a:ln>
-          <a:effectLst/>
-        </p:spPr>
-        <p:style>
-          <a:lnRef idx="1">
-            <a:schemeClr val="accent1"/>
-          </a:lnRef>
-          <a:fillRef idx="3">
-            <a:schemeClr val="accent1"/>
-          </a:fillRef>
-          <a:effectRef idx="2">
-            <a:schemeClr val="accent1"/>
-          </a:effectRef>
-          <a:fontRef idx="minor">
-            <a:schemeClr val="lt1"/>
-          </a:fontRef>
-        </p:style>
-        <p:txBody>
-          <a:bodyPr rtlCol="0" anchor="ctr"/>
-          <a:lstStyle/>
-          <a:p>
-            <a:pPr algn="ctr"/>
-          </a:p>
-        </p:txBody>
-      </p:sp>
-      <p:sp>
-        <p:nvSpPr>
-          <p:cNvPr id="11" name="TextBox 10"/>
-          <p:cNvSpPr txBox="1"/>
-          <p:nvPr/>
-        </p:nvSpPr>
-        <p:spPr>
-          <a:xfrm>
-            <a:off x="2381250" y="952500"/>
-            <a:ext cx="8286750" cy="381000"/>
-          </a:xfrm>
-          <a:prstGeom prst="rect">
-            <a:avLst/>
-          </a:prstGeom>
-          <a:noFill/>
-        </p:spPr>
-        <p:txBody>
-          <a:bodyPr wrap="square" anchor="ctr">
-            <a:spAutoFit/>
-          </a:bodyPr>
-          <a:lstStyle/>
-          <a:p>
-            <a:pPr algn="l">
-              <a:lnSpc>
-                <a:spcPct val="100000"/>
-              </a:lnSpc>
-            </a:pPr>
-            <a:r>
-              <a:rPr sz="1100" b="0">
-                <a:solidFill>
-                  <a:srgbClr val="94A3B8"/>
-                </a:solidFill>
-                <a:latin typeface="PingFang SC"/>
-              </a:rPr>
-              <a:t>terminal — 平台实测</a:t>
-            </a:r>
-          </a:p>
-        </p:txBody>
-      </p:sp>
-      <p:sp>
-        <p:nvSpPr>
-          <p:cNvPr id="12" name="TextBox 11"/>
-          <p:cNvSpPr txBox="1"/>
-          <p:nvPr/>
-        </p:nvSpPr>
-        <p:spPr>
-          <a:xfrm>
-            <a:off x="1562100" y="1485900"/>
-            <a:ext cx="9067800" cy="4381500"/>
-          </a:xfrm>
-          <a:prstGeom prst="rect">
-            <a:avLst/>
-          </a:prstGeom>
-          <a:noFill/>
-        </p:spPr>
-        <p:txBody>
-          <a:bodyPr wrap="square">
-            <a:spAutoFit/>
-          </a:bodyPr>
-          <a:lstStyle/>
-          <a:p>
-            <a:pPr>
-              <a:lnSpc>
-                <a:spcPct val="115000"/>
-              </a:lnSpc>
-            </a:pPr>
-            <a:r>
-              <a:rPr sz="1300">
-                <a:solidFill>
-                  <a:srgbClr val="CBD5E1"/>
-                </a:solidFill>
-                <a:latin typeface="Menlo"/>
-              </a:rPr>
-              <a:t>tests 真实断言</a:t>
-            </a:r>
-          </a:p>
-        </p:txBody>
-      </p:sp>
-      <p:sp>
-        <p:nvSpPr>
-          <p:cNvPr id="13" name="TextBox 12"/>
-          <p:cNvSpPr txBox="1"/>
-          <p:nvPr/>
-        </p:nvSpPr>
-        <p:spPr>
-          <a:xfrm>
-            <a:off x="10287000" y="6534150"/>
-            <a:ext cx="1619250" cy="266700"/>
-          </a:xfrm>
-          <a:prstGeom prst="rect">
-            <a:avLst/>
-          </a:prstGeom>
-          <a:noFill/>
-        </p:spPr>
-        <p:txBody>
-          <a:bodyPr wrap="square" anchor="ctr">
-            <a:spAutoFit/>
-          </a:bodyPr>
-          <a:lstStyle/>
-          <a:p>
-            <a:pPr algn="r">
-              <a:lnSpc>
-                <a:spcPct val="100000"/>
-              </a:lnSpc>
-            </a:pPr>
-            <a:r>
               <a:rPr sz="900" b="0">
                 <a:solidFill>
                   <a:srgbClr val="94A3B8"/>
@@ -12100,7 +12223,7 @@
       </p:sp>
       <p:sp>
         <p:nvSpPr>
-          <p:cNvPr id="14" name="TextBox 13"/>
+          <p:cNvPr id="13" name="TextBox 12"/>
           <p:cNvSpPr txBox="1"/>
           <p:nvPr/>
         </p:nvSpPr>
@@ -23060,14 +23183,1556 @@
       </p:sp>
       <p:sp>
         <p:nvSpPr>
-          <p:cNvPr id="5" name="TextBox 4"/>
+          <p:cNvPr id="5" name="Rectangle 4"/>
+          <p:cNvSpPr/>
+          <p:nvPr/>
+        </p:nvSpPr>
+        <p:spPr>
+          <a:xfrm>
+            <a:off x="1619250" y="3314700"/>
+            <a:ext cx="8953500" cy="38100"/>
+          </a:xfrm>
+          <a:prstGeom prst="rect">
+            <a:avLst/>
+          </a:prstGeom>
+          <a:solidFill>
+            <a:srgbClr val="DDE5EE"/>
+          </a:solidFill>
+          <a:ln>
+            <a:noFill/>
+          </a:ln>
+          <a:effectLst/>
+        </p:spPr>
+        <p:style>
+          <a:lnRef idx="1">
+            <a:schemeClr val="accent1"/>
+          </a:lnRef>
+          <a:fillRef idx="3">
+            <a:schemeClr val="accent1"/>
+          </a:fillRef>
+          <a:effectRef idx="2">
+            <a:schemeClr val="accent1"/>
+          </a:effectRef>
+          <a:fontRef idx="minor">
+            <a:schemeClr val="lt1"/>
+          </a:fontRef>
+        </p:style>
+        <p:txBody>
+          <a:bodyPr rtlCol="0" anchor="ctr"/>
+          <a:lstStyle/>
+          <a:p>
+            <a:pPr algn="ctr"/>
+          </a:p>
+        </p:txBody>
+      </p:sp>
+      <p:sp>
+        <p:nvSpPr>
+          <p:cNvPr id="6" name="Rounded Rectangle 5"/>
+          <p:cNvSpPr/>
+          <p:nvPr/>
+        </p:nvSpPr>
+        <p:spPr>
+          <a:xfrm>
+            <a:off x="1514475" y="3228975"/>
+            <a:ext cx="209550" cy="209550"/>
+          </a:xfrm>
+          <a:prstGeom prst="roundRect">
+            <a:avLst>
+              <a:gd name="adj" fmla="val 8000"/>
+            </a:avLst>
+          </a:prstGeom>
+          <a:solidFill>
+            <a:srgbClr val="2563EB"/>
+          </a:solidFill>
+          <a:ln>
+            <a:noFill/>
+          </a:ln>
+          <a:effectLst/>
+        </p:spPr>
+        <p:style>
+          <a:lnRef idx="1">
+            <a:schemeClr val="accent1"/>
+          </a:lnRef>
+          <a:fillRef idx="3">
+            <a:schemeClr val="accent1"/>
+          </a:fillRef>
+          <a:effectRef idx="2">
+            <a:schemeClr val="accent1"/>
+          </a:effectRef>
+          <a:fontRef idx="minor">
+            <a:schemeClr val="lt1"/>
+          </a:fontRef>
+        </p:style>
+        <p:txBody>
+          <a:bodyPr rtlCol="0" anchor="ctr"/>
+          <a:lstStyle/>
+          <a:p>
+            <a:pPr algn="ctr"/>
+          </a:p>
+        </p:txBody>
+      </p:sp>
+      <p:sp>
+        <p:nvSpPr>
+          <p:cNvPr id="7" name="Rounded Rectangle 6"/>
+          <p:cNvSpPr/>
+          <p:nvPr/>
+        </p:nvSpPr>
+        <p:spPr>
+          <a:xfrm>
+            <a:off x="190500" y="1905000"/>
+            <a:ext cx="2857500" cy="1123950"/>
+          </a:xfrm>
+          <a:prstGeom prst="roundRect">
+            <a:avLst>
+              <a:gd name="adj" fmla="val 8000"/>
+            </a:avLst>
+          </a:prstGeom>
+          <a:solidFill>
+            <a:srgbClr val="F1F5F9"/>
+          </a:solidFill>
+          <a:ln>
+            <a:noFill/>
+          </a:ln>
+          <a:effectLst/>
+        </p:spPr>
+        <p:style>
+          <a:lnRef idx="1">
+            <a:schemeClr val="accent1"/>
+          </a:lnRef>
+          <a:fillRef idx="3">
+            <a:schemeClr val="accent1"/>
+          </a:fillRef>
+          <a:effectRef idx="2">
+            <a:schemeClr val="accent1"/>
+          </a:effectRef>
+          <a:fontRef idx="minor">
+            <a:schemeClr val="lt1"/>
+          </a:fontRef>
+        </p:style>
+        <p:txBody>
+          <a:bodyPr rtlCol="0" anchor="ctr"/>
+          <a:lstStyle/>
+          <a:p>
+            <a:pPr algn="ctr"/>
+          </a:p>
+        </p:txBody>
+      </p:sp>
+      <p:sp>
+        <p:nvSpPr>
+          <p:cNvPr id="8" name="Rectangle 7"/>
+          <p:cNvSpPr/>
+          <p:nvPr/>
+        </p:nvSpPr>
+        <p:spPr>
+          <a:xfrm>
+            <a:off x="190500" y="1905000"/>
+            <a:ext cx="2857500" cy="38100"/>
+          </a:xfrm>
+          <a:prstGeom prst="rect">
+            <a:avLst/>
+          </a:prstGeom>
+          <a:solidFill>
+            <a:srgbClr val="2563EB"/>
+          </a:solidFill>
+          <a:ln>
+            <a:noFill/>
+          </a:ln>
+          <a:effectLst/>
+        </p:spPr>
+        <p:style>
+          <a:lnRef idx="1">
+            <a:schemeClr val="accent1"/>
+          </a:lnRef>
+          <a:fillRef idx="3">
+            <a:schemeClr val="accent1"/>
+          </a:fillRef>
+          <a:effectRef idx="2">
+            <a:schemeClr val="accent1"/>
+          </a:effectRef>
+          <a:fontRef idx="minor">
+            <a:schemeClr val="lt1"/>
+          </a:fontRef>
+        </p:style>
+        <p:txBody>
+          <a:bodyPr rtlCol="0" anchor="ctr"/>
+          <a:lstStyle/>
+          <a:p>
+            <a:pPr algn="ctr"/>
+          </a:p>
+        </p:txBody>
+      </p:sp>
+      <p:sp>
+        <p:nvSpPr>
+          <p:cNvPr id="9" name="TextBox 8"/>
           <p:cNvSpPr txBox="1"/>
           <p:nvPr/>
         </p:nvSpPr>
         <p:spPr>
           <a:xfrm>
-            <a:off x="9334500" y="0"/>
-            <a:ext cx="2667000" cy="704850"/>
+            <a:off x="285750" y="2000250"/>
+            <a:ext cx="2667000" cy="285750"/>
+          </a:xfrm>
+          <a:prstGeom prst="rect">
+            <a:avLst/>
+          </a:prstGeom>
+          <a:noFill/>
+        </p:spPr>
+        <p:txBody>
+          <a:bodyPr wrap="square" anchor="ctr">
+            <a:spAutoFit/>
+          </a:bodyPr>
+          <a:lstStyle/>
+          <a:p>
+            <a:pPr algn="ctr">
+              <a:lnSpc>
+                <a:spcPct val="100000"/>
+              </a:lnSpc>
+            </a:pPr>
+            <a:r>
+              <a:rPr sz="1400" b="1">
+                <a:solidFill>
+                  <a:srgbClr val="2563EB"/>
+                </a:solidFill>
+                <a:latin typeface="PingFang SC"/>
+              </a:rPr>
+              <a:t>注册</a:t>
+            </a:r>
+          </a:p>
+        </p:txBody>
+      </p:sp>
+      <p:sp>
+        <p:nvSpPr>
+          <p:cNvPr id="10" name="TextBox 9"/>
+          <p:cNvSpPr txBox="1"/>
+          <p:nvPr/>
+        </p:nvSpPr>
+        <p:spPr>
+          <a:xfrm>
+            <a:off x="285750" y="2305050"/>
+            <a:ext cx="2667000" cy="666750"/>
+          </a:xfrm>
+          <a:prstGeom prst="rect">
+            <a:avLst/>
+          </a:prstGeom>
+          <a:noFill/>
+        </p:spPr>
+        <p:txBody>
+          <a:bodyPr wrap="square" anchor="ctr">
+            <a:spAutoFit/>
+          </a:bodyPr>
+          <a:lstStyle/>
+          <a:p>
+            <a:pPr algn="l">
+              <a:lnSpc>
+                <a:spcPct val="105000"/>
+              </a:lnSpc>
+            </a:pPr>
+            <a:r>
+              <a:rPr sz="1050" b="0">
+                <a:solidFill>
+                  <a:srgbClr val="475569"/>
+                </a:solidFill>
+                <a:latin typeface="PingFang SC"/>
+              </a:rPr>
+              <a:t>名称/场景/步骤</a:t>
+            </a:r>
+          </a:p>
+        </p:txBody>
+      </p:sp>
+      <p:sp>
+        <p:nvSpPr>
+          <p:cNvPr id="11" name="Rounded Rectangle 10"/>
+          <p:cNvSpPr/>
+          <p:nvPr/>
+        </p:nvSpPr>
+        <p:spPr>
+          <a:xfrm>
+            <a:off x="3006725" y="3228975"/>
+            <a:ext cx="209550" cy="209550"/>
+          </a:xfrm>
+          <a:prstGeom prst="roundRect">
+            <a:avLst>
+              <a:gd name="adj" fmla="val 8000"/>
+            </a:avLst>
+          </a:prstGeom>
+          <a:solidFill>
+            <a:srgbClr val="14B8A6"/>
+          </a:solidFill>
+          <a:ln>
+            <a:noFill/>
+          </a:ln>
+          <a:effectLst/>
+        </p:spPr>
+        <p:style>
+          <a:lnRef idx="1">
+            <a:schemeClr val="accent1"/>
+          </a:lnRef>
+          <a:fillRef idx="3">
+            <a:schemeClr val="accent1"/>
+          </a:fillRef>
+          <a:effectRef idx="2">
+            <a:schemeClr val="accent1"/>
+          </a:effectRef>
+          <a:fontRef idx="minor">
+            <a:schemeClr val="lt1"/>
+          </a:fontRef>
+        </p:style>
+        <p:txBody>
+          <a:bodyPr rtlCol="0" anchor="ctr"/>
+          <a:lstStyle/>
+          <a:p>
+            <a:pPr algn="ctr"/>
+          </a:p>
+        </p:txBody>
+      </p:sp>
+      <p:sp>
+        <p:nvSpPr>
+          <p:cNvPr id="12" name="Rounded Rectangle 11"/>
+          <p:cNvSpPr/>
+          <p:nvPr/>
+        </p:nvSpPr>
+        <p:spPr>
+          <a:xfrm>
+            <a:off x="1682750" y="3619500"/>
+            <a:ext cx="2857500" cy="1123950"/>
+          </a:xfrm>
+          <a:prstGeom prst="roundRect">
+            <a:avLst>
+              <a:gd name="adj" fmla="val 8000"/>
+            </a:avLst>
+          </a:prstGeom>
+          <a:solidFill>
+            <a:srgbClr val="F1F5F9"/>
+          </a:solidFill>
+          <a:ln>
+            <a:noFill/>
+          </a:ln>
+          <a:effectLst/>
+        </p:spPr>
+        <p:style>
+          <a:lnRef idx="1">
+            <a:schemeClr val="accent1"/>
+          </a:lnRef>
+          <a:fillRef idx="3">
+            <a:schemeClr val="accent1"/>
+          </a:fillRef>
+          <a:effectRef idx="2">
+            <a:schemeClr val="accent1"/>
+          </a:effectRef>
+          <a:fontRef idx="minor">
+            <a:schemeClr val="lt1"/>
+          </a:fontRef>
+        </p:style>
+        <p:txBody>
+          <a:bodyPr rtlCol="0" anchor="ctr"/>
+          <a:lstStyle/>
+          <a:p>
+            <a:pPr algn="ctr"/>
+          </a:p>
+        </p:txBody>
+      </p:sp>
+      <p:sp>
+        <p:nvSpPr>
+          <p:cNvPr id="13" name="Rectangle 12"/>
+          <p:cNvSpPr/>
+          <p:nvPr/>
+        </p:nvSpPr>
+        <p:spPr>
+          <a:xfrm>
+            <a:off x="1682750" y="3619500"/>
+            <a:ext cx="2857500" cy="38100"/>
+          </a:xfrm>
+          <a:prstGeom prst="rect">
+            <a:avLst/>
+          </a:prstGeom>
+          <a:solidFill>
+            <a:srgbClr val="14B8A6"/>
+          </a:solidFill>
+          <a:ln>
+            <a:noFill/>
+          </a:ln>
+          <a:effectLst/>
+        </p:spPr>
+        <p:style>
+          <a:lnRef idx="1">
+            <a:schemeClr val="accent1"/>
+          </a:lnRef>
+          <a:fillRef idx="3">
+            <a:schemeClr val="accent1"/>
+          </a:fillRef>
+          <a:effectRef idx="2">
+            <a:schemeClr val="accent1"/>
+          </a:effectRef>
+          <a:fontRef idx="minor">
+            <a:schemeClr val="lt1"/>
+          </a:fontRef>
+        </p:style>
+        <p:txBody>
+          <a:bodyPr rtlCol="0" anchor="ctr"/>
+          <a:lstStyle/>
+          <a:p>
+            <a:pPr algn="ctr"/>
+          </a:p>
+        </p:txBody>
+      </p:sp>
+      <p:sp>
+        <p:nvSpPr>
+          <p:cNvPr id="14" name="TextBox 13"/>
+          <p:cNvSpPr txBox="1"/>
+          <p:nvPr/>
+        </p:nvSpPr>
+        <p:spPr>
+          <a:xfrm>
+            <a:off x="1778000" y="3714750"/>
+            <a:ext cx="2667000" cy="285750"/>
+          </a:xfrm>
+          <a:prstGeom prst="rect">
+            <a:avLst/>
+          </a:prstGeom>
+          <a:noFill/>
+        </p:spPr>
+        <p:txBody>
+          <a:bodyPr wrap="square" anchor="ctr">
+            <a:spAutoFit/>
+          </a:bodyPr>
+          <a:lstStyle/>
+          <a:p>
+            <a:pPr algn="ctr">
+              <a:lnSpc>
+                <a:spcPct val="100000"/>
+              </a:lnSpc>
+            </a:pPr>
+            <a:r>
+              <a:rPr sz="1400" b="1">
+                <a:solidFill>
+                  <a:srgbClr val="14B8A6"/>
+                </a:solidFill>
+                <a:latin typeface="PingFang SC"/>
+              </a:rPr>
+              <a:t>检索</a:t>
+            </a:r>
+          </a:p>
+        </p:txBody>
+      </p:sp>
+      <p:sp>
+        <p:nvSpPr>
+          <p:cNvPr id="15" name="TextBox 14"/>
+          <p:cNvSpPr txBox="1"/>
+          <p:nvPr/>
+        </p:nvSpPr>
+        <p:spPr>
+          <a:xfrm>
+            <a:off x="1778000" y="4019550"/>
+            <a:ext cx="2667000" cy="666750"/>
+          </a:xfrm>
+          <a:prstGeom prst="rect">
+            <a:avLst/>
+          </a:prstGeom>
+          <a:noFill/>
+        </p:spPr>
+        <p:txBody>
+          <a:bodyPr wrap="square" anchor="ctr">
+            <a:spAutoFit/>
+          </a:bodyPr>
+          <a:lstStyle/>
+          <a:p>
+            <a:pPr algn="l">
+              <a:lnSpc>
+                <a:spcPct val="105000"/>
+              </a:lnSpc>
+            </a:pPr>
+            <a:r>
+              <a:rPr sz="1050" b="0">
+                <a:solidFill>
+                  <a:srgbClr val="475569"/>
+                </a:solidFill>
+                <a:latin typeface="PingFang SC"/>
+              </a:rPr>
+              <a:t>场景匹配</a:t>
+            </a:r>
+          </a:p>
+        </p:txBody>
+      </p:sp>
+      <p:sp>
+        <p:nvSpPr>
+          <p:cNvPr id="16" name="Rounded Rectangle 15"/>
+          <p:cNvSpPr/>
+          <p:nvPr/>
+        </p:nvSpPr>
+        <p:spPr>
+          <a:xfrm>
+            <a:off x="4498975" y="3228975"/>
+            <a:ext cx="209550" cy="209550"/>
+          </a:xfrm>
+          <a:prstGeom prst="roundRect">
+            <a:avLst>
+              <a:gd name="adj" fmla="val 8000"/>
+            </a:avLst>
+          </a:prstGeom>
+          <a:solidFill>
+            <a:srgbClr val="8B5CF6"/>
+          </a:solidFill>
+          <a:ln>
+            <a:noFill/>
+          </a:ln>
+          <a:effectLst/>
+        </p:spPr>
+        <p:style>
+          <a:lnRef idx="1">
+            <a:schemeClr val="accent1"/>
+          </a:lnRef>
+          <a:fillRef idx="3">
+            <a:schemeClr val="accent1"/>
+          </a:fillRef>
+          <a:effectRef idx="2">
+            <a:schemeClr val="accent1"/>
+          </a:effectRef>
+          <a:fontRef idx="minor">
+            <a:schemeClr val="lt1"/>
+          </a:fontRef>
+        </p:style>
+        <p:txBody>
+          <a:bodyPr rtlCol="0" anchor="ctr"/>
+          <a:lstStyle/>
+          <a:p>
+            <a:pPr algn="ctr"/>
+          </a:p>
+        </p:txBody>
+      </p:sp>
+      <p:sp>
+        <p:nvSpPr>
+          <p:cNvPr id="17" name="Rounded Rectangle 16"/>
+          <p:cNvSpPr/>
+          <p:nvPr/>
+        </p:nvSpPr>
+        <p:spPr>
+          <a:xfrm>
+            <a:off x="3175000" y="1905000"/>
+            <a:ext cx="2857500" cy="1123950"/>
+          </a:xfrm>
+          <a:prstGeom prst="roundRect">
+            <a:avLst>
+              <a:gd name="adj" fmla="val 8000"/>
+            </a:avLst>
+          </a:prstGeom>
+          <a:solidFill>
+            <a:srgbClr val="F1F5F9"/>
+          </a:solidFill>
+          <a:ln>
+            <a:noFill/>
+          </a:ln>
+          <a:effectLst/>
+        </p:spPr>
+        <p:style>
+          <a:lnRef idx="1">
+            <a:schemeClr val="accent1"/>
+          </a:lnRef>
+          <a:fillRef idx="3">
+            <a:schemeClr val="accent1"/>
+          </a:fillRef>
+          <a:effectRef idx="2">
+            <a:schemeClr val="accent1"/>
+          </a:effectRef>
+          <a:fontRef idx="minor">
+            <a:schemeClr val="lt1"/>
+          </a:fontRef>
+        </p:style>
+        <p:txBody>
+          <a:bodyPr rtlCol="0" anchor="ctr"/>
+          <a:lstStyle/>
+          <a:p>
+            <a:pPr algn="ctr"/>
+          </a:p>
+        </p:txBody>
+      </p:sp>
+      <p:sp>
+        <p:nvSpPr>
+          <p:cNvPr id="18" name="Rectangle 17"/>
+          <p:cNvSpPr/>
+          <p:nvPr/>
+        </p:nvSpPr>
+        <p:spPr>
+          <a:xfrm>
+            <a:off x="3175000" y="1905000"/>
+            <a:ext cx="2857500" cy="38100"/>
+          </a:xfrm>
+          <a:prstGeom prst="rect">
+            <a:avLst/>
+          </a:prstGeom>
+          <a:solidFill>
+            <a:srgbClr val="8B5CF6"/>
+          </a:solidFill>
+          <a:ln>
+            <a:noFill/>
+          </a:ln>
+          <a:effectLst/>
+        </p:spPr>
+        <p:style>
+          <a:lnRef idx="1">
+            <a:schemeClr val="accent1"/>
+          </a:lnRef>
+          <a:fillRef idx="3">
+            <a:schemeClr val="accent1"/>
+          </a:fillRef>
+          <a:effectRef idx="2">
+            <a:schemeClr val="accent1"/>
+          </a:effectRef>
+          <a:fontRef idx="minor">
+            <a:schemeClr val="lt1"/>
+          </a:fontRef>
+        </p:style>
+        <p:txBody>
+          <a:bodyPr rtlCol="0" anchor="ctr"/>
+          <a:lstStyle/>
+          <a:p>
+            <a:pPr algn="ctr"/>
+          </a:p>
+        </p:txBody>
+      </p:sp>
+      <p:sp>
+        <p:nvSpPr>
+          <p:cNvPr id="19" name="TextBox 18"/>
+          <p:cNvSpPr txBox="1"/>
+          <p:nvPr/>
+        </p:nvSpPr>
+        <p:spPr>
+          <a:xfrm>
+            <a:off x="3270250" y="2000250"/>
+            <a:ext cx="2667000" cy="285750"/>
+          </a:xfrm>
+          <a:prstGeom prst="rect">
+            <a:avLst/>
+          </a:prstGeom>
+          <a:noFill/>
+        </p:spPr>
+        <p:txBody>
+          <a:bodyPr wrap="square" anchor="ctr">
+            <a:spAutoFit/>
+          </a:bodyPr>
+          <a:lstStyle/>
+          <a:p>
+            <a:pPr algn="ctr">
+              <a:lnSpc>
+                <a:spcPct val="100000"/>
+              </a:lnSpc>
+            </a:pPr>
+            <a:r>
+              <a:rPr sz="1400" b="1">
+                <a:solidFill>
+                  <a:srgbClr val="8B5CF6"/>
+                </a:solidFill>
+                <a:latin typeface="PingFang SC"/>
+              </a:rPr>
+              <a:t>执行</a:t>
+            </a:r>
+          </a:p>
+        </p:txBody>
+      </p:sp>
+      <p:sp>
+        <p:nvSpPr>
+          <p:cNvPr id="20" name="TextBox 19"/>
+          <p:cNvSpPr txBox="1"/>
+          <p:nvPr/>
+        </p:nvSpPr>
+        <p:spPr>
+          <a:xfrm>
+            <a:off x="3270250" y="2305050"/>
+            <a:ext cx="2667000" cy="666750"/>
+          </a:xfrm>
+          <a:prstGeom prst="rect">
+            <a:avLst/>
+          </a:prstGeom>
+          <a:noFill/>
+        </p:spPr>
+        <p:txBody>
+          <a:bodyPr wrap="square" anchor="ctr">
+            <a:spAutoFit/>
+          </a:bodyPr>
+          <a:lstStyle/>
+          <a:p>
+            <a:pPr algn="l">
+              <a:lnSpc>
+                <a:spcPct val="105000"/>
+              </a:lnSpc>
+            </a:pPr>
+            <a:r>
+              <a:rPr sz="1050" b="0">
+                <a:solidFill>
+                  <a:srgbClr val="475569"/>
+                </a:solidFill>
+                <a:latin typeface="PingFang SC"/>
+              </a:rPr>
+              <a:t>编排工具</a:t>
+            </a:r>
+          </a:p>
+        </p:txBody>
+      </p:sp>
+      <p:sp>
+        <p:nvSpPr>
+          <p:cNvPr id="21" name="Rounded Rectangle 20"/>
+          <p:cNvSpPr/>
+          <p:nvPr/>
+        </p:nvSpPr>
+        <p:spPr>
+          <a:xfrm>
+            <a:off x="5991225" y="3228975"/>
+            <a:ext cx="209550" cy="209550"/>
+          </a:xfrm>
+          <a:prstGeom prst="roundRect">
+            <a:avLst>
+              <a:gd name="adj" fmla="val 8000"/>
+            </a:avLst>
+          </a:prstGeom>
+          <a:solidFill>
+            <a:srgbClr val="F59E0B"/>
+          </a:solidFill>
+          <a:ln>
+            <a:noFill/>
+          </a:ln>
+          <a:effectLst/>
+        </p:spPr>
+        <p:style>
+          <a:lnRef idx="1">
+            <a:schemeClr val="accent1"/>
+          </a:lnRef>
+          <a:fillRef idx="3">
+            <a:schemeClr val="accent1"/>
+          </a:fillRef>
+          <a:effectRef idx="2">
+            <a:schemeClr val="accent1"/>
+          </a:effectRef>
+          <a:fontRef idx="minor">
+            <a:schemeClr val="lt1"/>
+          </a:fontRef>
+        </p:style>
+        <p:txBody>
+          <a:bodyPr rtlCol="0" anchor="ctr"/>
+          <a:lstStyle/>
+          <a:p>
+            <a:pPr algn="ctr"/>
+          </a:p>
+        </p:txBody>
+      </p:sp>
+      <p:sp>
+        <p:nvSpPr>
+          <p:cNvPr id="22" name="Rounded Rectangle 21"/>
+          <p:cNvSpPr/>
+          <p:nvPr/>
+        </p:nvSpPr>
+        <p:spPr>
+          <a:xfrm>
+            <a:off x="4667250" y="3619500"/>
+            <a:ext cx="2857500" cy="1123950"/>
+          </a:xfrm>
+          <a:prstGeom prst="roundRect">
+            <a:avLst>
+              <a:gd name="adj" fmla="val 8000"/>
+            </a:avLst>
+          </a:prstGeom>
+          <a:solidFill>
+            <a:srgbClr val="F1F5F9"/>
+          </a:solidFill>
+          <a:ln>
+            <a:noFill/>
+          </a:ln>
+          <a:effectLst/>
+        </p:spPr>
+        <p:style>
+          <a:lnRef idx="1">
+            <a:schemeClr val="accent1"/>
+          </a:lnRef>
+          <a:fillRef idx="3">
+            <a:schemeClr val="accent1"/>
+          </a:fillRef>
+          <a:effectRef idx="2">
+            <a:schemeClr val="accent1"/>
+          </a:effectRef>
+          <a:fontRef idx="minor">
+            <a:schemeClr val="lt1"/>
+          </a:fontRef>
+        </p:style>
+        <p:txBody>
+          <a:bodyPr rtlCol="0" anchor="ctr"/>
+          <a:lstStyle/>
+          <a:p>
+            <a:pPr algn="ctr"/>
+          </a:p>
+        </p:txBody>
+      </p:sp>
+      <p:sp>
+        <p:nvSpPr>
+          <p:cNvPr id="23" name="Rectangle 22"/>
+          <p:cNvSpPr/>
+          <p:nvPr/>
+        </p:nvSpPr>
+        <p:spPr>
+          <a:xfrm>
+            <a:off x="4667250" y="3619500"/>
+            <a:ext cx="2857500" cy="38100"/>
+          </a:xfrm>
+          <a:prstGeom prst="rect">
+            <a:avLst/>
+          </a:prstGeom>
+          <a:solidFill>
+            <a:srgbClr val="F59E0B"/>
+          </a:solidFill>
+          <a:ln>
+            <a:noFill/>
+          </a:ln>
+          <a:effectLst/>
+        </p:spPr>
+        <p:style>
+          <a:lnRef idx="1">
+            <a:schemeClr val="accent1"/>
+          </a:lnRef>
+          <a:fillRef idx="3">
+            <a:schemeClr val="accent1"/>
+          </a:fillRef>
+          <a:effectRef idx="2">
+            <a:schemeClr val="accent1"/>
+          </a:effectRef>
+          <a:fontRef idx="minor">
+            <a:schemeClr val="lt1"/>
+          </a:fontRef>
+        </p:style>
+        <p:txBody>
+          <a:bodyPr rtlCol="0" anchor="ctr"/>
+          <a:lstStyle/>
+          <a:p>
+            <a:pPr algn="ctr"/>
+          </a:p>
+        </p:txBody>
+      </p:sp>
+      <p:sp>
+        <p:nvSpPr>
+          <p:cNvPr id="24" name="TextBox 23"/>
+          <p:cNvSpPr txBox="1"/>
+          <p:nvPr/>
+        </p:nvSpPr>
+        <p:spPr>
+          <a:xfrm>
+            <a:off x="4762500" y="3714750"/>
+            <a:ext cx="2667000" cy="285750"/>
+          </a:xfrm>
+          <a:prstGeom prst="rect">
+            <a:avLst/>
+          </a:prstGeom>
+          <a:noFill/>
+        </p:spPr>
+        <p:txBody>
+          <a:bodyPr wrap="square" anchor="ctr">
+            <a:spAutoFit/>
+          </a:bodyPr>
+          <a:lstStyle/>
+          <a:p>
+            <a:pPr algn="ctr">
+              <a:lnSpc>
+                <a:spcPct val="100000"/>
+              </a:lnSpc>
+            </a:pPr>
+            <a:r>
+              <a:rPr sz="1400" b="1">
+                <a:solidFill>
+                  <a:srgbClr val="F59E0B"/>
+                </a:solidFill>
+                <a:latin typeface="PingFang SC"/>
+              </a:rPr>
+              <a:t>评估</a:t>
+            </a:r>
+          </a:p>
+        </p:txBody>
+      </p:sp>
+      <p:sp>
+        <p:nvSpPr>
+          <p:cNvPr id="25" name="TextBox 24"/>
+          <p:cNvSpPr txBox="1"/>
+          <p:nvPr/>
+        </p:nvSpPr>
+        <p:spPr>
+          <a:xfrm>
+            <a:off x="4762500" y="4019550"/>
+            <a:ext cx="2667000" cy="666750"/>
+          </a:xfrm>
+          <a:prstGeom prst="rect">
+            <a:avLst/>
+          </a:prstGeom>
+          <a:noFill/>
+        </p:spPr>
+        <p:txBody>
+          <a:bodyPr wrap="square" anchor="ctr">
+            <a:spAutoFit/>
+          </a:bodyPr>
+          <a:lstStyle/>
+          <a:p>
+            <a:pPr algn="l">
+              <a:lnSpc>
+                <a:spcPct val="105000"/>
+              </a:lnSpc>
+            </a:pPr>
+            <a:r>
+              <a:rPr sz="1050" b="0">
+                <a:solidFill>
+                  <a:srgbClr val="475569"/>
+                </a:solidFill>
+                <a:latin typeface="PingFang SC"/>
+              </a:rPr>
+              <a:t>质量标准达标</a:t>
+            </a:r>
+          </a:p>
+        </p:txBody>
+      </p:sp>
+      <p:sp>
+        <p:nvSpPr>
+          <p:cNvPr id="26" name="Rounded Rectangle 25"/>
+          <p:cNvSpPr/>
+          <p:nvPr/>
+        </p:nvSpPr>
+        <p:spPr>
+          <a:xfrm>
+            <a:off x="7483475" y="3228975"/>
+            <a:ext cx="209550" cy="209550"/>
+          </a:xfrm>
+          <a:prstGeom prst="roundRect">
+            <a:avLst>
+              <a:gd name="adj" fmla="val 8000"/>
+            </a:avLst>
+          </a:prstGeom>
+          <a:solidFill>
+            <a:srgbClr val="34D399"/>
+          </a:solidFill>
+          <a:ln>
+            <a:noFill/>
+          </a:ln>
+          <a:effectLst/>
+        </p:spPr>
+        <p:style>
+          <a:lnRef idx="1">
+            <a:schemeClr val="accent1"/>
+          </a:lnRef>
+          <a:fillRef idx="3">
+            <a:schemeClr val="accent1"/>
+          </a:fillRef>
+          <a:effectRef idx="2">
+            <a:schemeClr val="accent1"/>
+          </a:effectRef>
+          <a:fontRef idx="minor">
+            <a:schemeClr val="lt1"/>
+          </a:fontRef>
+        </p:style>
+        <p:txBody>
+          <a:bodyPr rtlCol="0" anchor="ctr"/>
+          <a:lstStyle/>
+          <a:p>
+            <a:pPr algn="ctr"/>
+          </a:p>
+        </p:txBody>
+      </p:sp>
+      <p:sp>
+        <p:nvSpPr>
+          <p:cNvPr id="27" name="Rounded Rectangle 26"/>
+          <p:cNvSpPr/>
+          <p:nvPr/>
+        </p:nvSpPr>
+        <p:spPr>
+          <a:xfrm>
+            <a:off x="6159500" y="1905000"/>
+            <a:ext cx="2857500" cy="1123950"/>
+          </a:xfrm>
+          <a:prstGeom prst="roundRect">
+            <a:avLst>
+              <a:gd name="adj" fmla="val 8000"/>
+            </a:avLst>
+          </a:prstGeom>
+          <a:solidFill>
+            <a:srgbClr val="F1F5F9"/>
+          </a:solidFill>
+          <a:ln>
+            <a:noFill/>
+          </a:ln>
+          <a:effectLst/>
+        </p:spPr>
+        <p:style>
+          <a:lnRef idx="1">
+            <a:schemeClr val="accent1"/>
+          </a:lnRef>
+          <a:fillRef idx="3">
+            <a:schemeClr val="accent1"/>
+          </a:fillRef>
+          <a:effectRef idx="2">
+            <a:schemeClr val="accent1"/>
+          </a:effectRef>
+          <a:fontRef idx="minor">
+            <a:schemeClr val="lt1"/>
+          </a:fontRef>
+        </p:style>
+        <p:txBody>
+          <a:bodyPr rtlCol="0" anchor="ctr"/>
+          <a:lstStyle/>
+          <a:p>
+            <a:pPr algn="ctr"/>
+          </a:p>
+        </p:txBody>
+      </p:sp>
+      <p:sp>
+        <p:nvSpPr>
+          <p:cNvPr id="28" name="Rectangle 27"/>
+          <p:cNvSpPr/>
+          <p:nvPr/>
+        </p:nvSpPr>
+        <p:spPr>
+          <a:xfrm>
+            <a:off x="6159500" y="1905000"/>
+            <a:ext cx="2857500" cy="38100"/>
+          </a:xfrm>
+          <a:prstGeom prst="rect">
+            <a:avLst/>
+          </a:prstGeom>
+          <a:solidFill>
+            <a:srgbClr val="34D399"/>
+          </a:solidFill>
+          <a:ln>
+            <a:noFill/>
+          </a:ln>
+          <a:effectLst/>
+        </p:spPr>
+        <p:style>
+          <a:lnRef idx="1">
+            <a:schemeClr val="accent1"/>
+          </a:lnRef>
+          <a:fillRef idx="3">
+            <a:schemeClr val="accent1"/>
+          </a:fillRef>
+          <a:effectRef idx="2">
+            <a:schemeClr val="accent1"/>
+          </a:effectRef>
+          <a:fontRef idx="minor">
+            <a:schemeClr val="lt1"/>
+          </a:fontRef>
+        </p:style>
+        <p:txBody>
+          <a:bodyPr rtlCol="0" anchor="ctr"/>
+          <a:lstStyle/>
+          <a:p>
+            <a:pPr algn="ctr"/>
+          </a:p>
+        </p:txBody>
+      </p:sp>
+      <p:sp>
+        <p:nvSpPr>
+          <p:cNvPr id="29" name="TextBox 28"/>
+          <p:cNvSpPr txBox="1"/>
+          <p:nvPr/>
+        </p:nvSpPr>
+        <p:spPr>
+          <a:xfrm>
+            <a:off x="6254750" y="2000250"/>
+            <a:ext cx="2667000" cy="285750"/>
+          </a:xfrm>
+          <a:prstGeom prst="rect">
+            <a:avLst/>
+          </a:prstGeom>
+          <a:noFill/>
+        </p:spPr>
+        <p:txBody>
+          <a:bodyPr wrap="square" anchor="ctr">
+            <a:spAutoFit/>
+          </a:bodyPr>
+          <a:lstStyle/>
+          <a:p>
+            <a:pPr algn="ctr">
+              <a:lnSpc>
+                <a:spcPct val="100000"/>
+              </a:lnSpc>
+            </a:pPr>
+            <a:r>
+              <a:rPr sz="1400" b="1">
+                <a:solidFill>
+                  <a:srgbClr val="34D399"/>
+                </a:solidFill>
+                <a:latin typeface="PingFang SC"/>
+              </a:rPr>
+              <a:t>版本</a:t>
+            </a:r>
+          </a:p>
+        </p:txBody>
+      </p:sp>
+      <p:sp>
+        <p:nvSpPr>
+          <p:cNvPr id="30" name="TextBox 29"/>
+          <p:cNvSpPr txBox="1"/>
+          <p:nvPr/>
+        </p:nvSpPr>
+        <p:spPr>
+          <a:xfrm>
+            <a:off x="6254750" y="2305050"/>
+            <a:ext cx="2667000" cy="666750"/>
+          </a:xfrm>
+          <a:prstGeom prst="rect">
+            <a:avLst/>
+          </a:prstGeom>
+          <a:noFill/>
+        </p:spPr>
+        <p:txBody>
+          <a:bodyPr wrap="square" anchor="ctr">
+            <a:spAutoFit/>
+          </a:bodyPr>
+          <a:lstStyle/>
+          <a:p>
+            <a:pPr algn="l">
+              <a:lnSpc>
+                <a:spcPct val="105000"/>
+              </a:lnSpc>
+            </a:pPr>
+            <a:r>
+              <a:rPr sz="1050" b="0">
+                <a:solidFill>
+                  <a:srgbClr val="475569"/>
+                </a:solidFill>
+                <a:latin typeface="PingFang SC"/>
+              </a:rPr>
+              <a:t>递增强制</a:t>
+            </a:r>
+          </a:p>
+        </p:txBody>
+      </p:sp>
+      <p:sp>
+        <p:nvSpPr>
+          <p:cNvPr id="31" name="Rounded Rectangle 30"/>
+          <p:cNvSpPr/>
+          <p:nvPr/>
+        </p:nvSpPr>
+        <p:spPr>
+          <a:xfrm>
+            <a:off x="8975725" y="3228975"/>
+            <a:ext cx="209550" cy="209550"/>
+          </a:xfrm>
+          <a:prstGeom prst="roundRect">
+            <a:avLst>
+              <a:gd name="adj" fmla="val 8000"/>
+            </a:avLst>
+          </a:prstGeom>
+          <a:solidFill>
+            <a:srgbClr val="F87171"/>
+          </a:solidFill>
+          <a:ln>
+            <a:noFill/>
+          </a:ln>
+          <a:effectLst/>
+        </p:spPr>
+        <p:style>
+          <a:lnRef idx="1">
+            <a:schemeClr val="accent1"/>
+          </a:lnRef>
+          <a:fillRef idx="3">
+            <a:schemeClr val="accent1"/>
+          </a:fillRef>
+          <a:effectRef idx="2">
+            <a:schemeClr val="accent1"/>
+          </a:effectRef>
+          <a:fontRef idx="minor">
+            <a:schemeClr val="lt1"/>
+          </a:fontRef>
+        </p:style>
+        <p:txBody>
+          <a:bodyPr rtlCol="0" anchor="ctr"/>
+          <a:lstStyle/>
+          <a:p>
+            <a:pPr algn="ctr"/>
+          </a:p>
+        </p:txBody>
+      </p:sp>
+      <p:sp>
+        <p:nvSpPr>
+          <p:cNvPr id="32" name="Rounded Rectangle 31"/>
+          <p:cNvSpPr/>
+          <p:nvPr/>
+        </p:nvSpPr>
+        <p:spPr>
+          <a:xfrm>
+            <a:off x="7651750" y="3619500"/>
+            <a:ext cx="2857500" cy="1123950"/>
+          </a:xfrm>
+          <a:prstGeom prst="roundRect">
+            <a:avLst>
+              <a:gd name="adj" fmla="val 8000"/>
+            </a:avLst>
+          </a:prstGeom>
+          <a:solidFill>
+            <a:srgbClr val="F1F5F9"/>
+          </a:solidFill>
+          <a:ln>
+            <a:noFill/>
+          </a:ln>
+          <a:effectLst/>
+        </p:spPr>
+        <p:style>
+          <a:lnRef idx="1">
+            <a:schemeClr val="accent1"/>
+          </a:lnRef>
+          <a:fillRef idx="3">
+            <a:schemeClr val="accent1"/>
+          </a:fillRef>
+          <a:effectRef idx="2">
+            <a:schemeClr val="accent1"/>
+          </a:effectRef>
+          <a:fontRef idx="minor">
+            <a:schemeClr val="lt1"/>
+          </a:fontRef>
+        </p:style>
+        <p:txBody>
+          <a:bodyPr rtlCol="0" anchor="ctr"/>
+          <a:lstStyle/>
+          <a:p>
+            <a:pPr algn="ctr"/>
+          </a:p>
+        </p:txBody>
+      </p:sp>
+      <p:sp>
+        <p:nvSpPr>
+          <p:cNvPr id="33" name="Rectangle 32"/>
+          <p:cNvSpPr/>
+          <p:nvPr/>
+        </p:nvSpPr>
+        <p:spPr>
+          <a:xfrm>
+            <a:off x="7651750" y="3619500"/>
+            <a:ext cx="2857500" cy="38100"/>
+          </a:xfrm>
+          <a:prstGeom prst="rect">
+            <a:avLst/>
+          </a:prstGeom>
+          <a:solidFill>
+            <a:srgbClr val="F87171"/>
+          </a:solidFill>
+          <a:ln>
+            <a:noFill/>
+          </a:ln>
+          <a:effectLst/>
+        </p:spPr>
+        <p:style>
+          <a:lnRef idx="1">
+            <a:schemeClr val="accent1"/>
+          </a:lnRef>
+          <a:fillRef idx="3">
+            <a:schemeClr val="accent1"/>
+          </a:fillRef>
+          <a:effectRef idx="2">
+            <a:schemeClr val="accent1"/>
+          </a:effectRef>
+          <a:fontRef idx="minor">
+            <a:schemeClr val="lt1"/>
+          </a:fontRef>
+        </p:style>
+        <p:txBody>
+          <a:bodyPr rtlCol="0" anchor="ctr"/>
+          <a:lstStyle/>
+          <a:p>
+            <a:pPr algn="ctr"/>
+          </a:p>
+        </p:txBody>
+      </p:sp>
+      <p:sp>
+        <p:nvSpPr>
+          <p:cNvPr id="34" name="TextBox 33"/>
+          <p:cNvSpPr txBox="1"/>
+          <p:nvPr/>
+        </p:nvSpPr>
+        <p:spPr>
+          <a:xfrm>
+            <a:off x="7747000" y="3714750"/>
+            <a:ext cx="2667000" cy="285750"/>
+          </a:xfrm>
+          <a:prstGeom prst="rect">
+            <a:avLst/>
+          </a:prstGeom>
+          <a:noFill/>
+        </p:spPr>
+        <p:txBody>
+          <a:bodyPr wrap="square" anchor="ctr">
+            <a:spAutoFit/>
+          </a:bodyPr>
+          <a:lstStyle/>
+          <a:p>
+            <a:pPr algn="ctr">
+              <a:lnSpc>
+                <a:spcPct val="100000"/>
+              </a:lnSpc>
+            </a:pPr>
+            <a:r>
+              <a:rPr sz="1400" b="1">
+                <a:solidFill>
+                  <a:srgbClr val="F87171"/>
+                </a:solidFill>
+                <a:latin typeface="PingFang SC"/>
+              </a:rPr>
+              <a:t>复用</a:t>
+            </a:r>
+          </a:p>
+        </p:txBody>
+      </p:sp>
+      <p:sp>
+        <p:nvSpPr>
+          <p:cNvPr id="35" name="TextBox 34"/>
+          <p:cNvSpPr txBox="1"/>
+          <p:nvPr/>
+        </p:nvSpPr>
+        <p:spPr>
+          <a:xfrm>
+            <a:off x="7747000" y="4019550"/>
+            <a:ext cx="2667000" cy="666750"/>
+          </a:xfrm>
+          <a:prstGeom prst="rect">
+            <a:avLst/>
+          </a:prstGeom>
+          <a:noFill/>
+        </p:spPr>
+        <p:txBody>
+          <a:bodyPr wrap="square" anchor="ctr">
+            <a:spAutoFit/>
+          </a:bodyPr>
+          <a:lstStyle/>
+          <a:p>
+            <a:pPr algn="l">
+              <a:lnSpc>
+                <a:spcPct val="105000"/>
+              </a:lnSpc>
+            </a:pPr>
+            <a:r>
+              <a:rPr sz="1050" b="0">
+                <a:solidFill>
+                  <a:srgbClr val="475569"/>
+                </a:solidFill>
+                <a:latin typeface="PingFang SC"/>
+              </a:rPr>
+              <a:t>跨场景调用</a:t>
+            </a:r>
+          </a:p>
+        </p:txBody>
+      </p:sp>
+      <p:sp>
+        <p:nvSpPr>
+          <p:cNvPr id="36" name="Rounded Rectangle 35"/>
+          <p:cNvSpPr/>
+          <p:nvPr/>
+        </p:nvSpPr>
+        <p:spPr>
+          <a:xfrm>
+            <a:off x="10467975" y="3228975"/>
+            <a:ext cx="209550" cy="209550"/>
+          </a:xfrm>
+          <a:prstGeom prst="roundRect">
+            <a:avLst>
+              <a:gd name="adj" fmla="val 8000"/>
+            </a:avLst>
+          </a:prstGeom>
+          <a:solidFill>
+            <a:srgbClr val="2563EB"/>
+          </a:solidFill>
+          <a:ln>
+            <a:noFill/>
+          </a:ln>
+          <a:effectLst/>
+        </p:spPr>
+        <p:style>
+          <a:lnRef idx="1">
+            <a:schemeClr val="accent1"/>
+          </a:lnRef>
+          <a:fillRef idx="3">
+            <a:schemeClr val="accent1"/>
+          </a:fillRef>
+          <a:effectRef idx="2">
+            <a:schemeClr val="accent1"/>
+          </a:effectRef>
+          <a:fontRef idx="minor">
+            <a:schemeClr val="lt1"/>
+          </a:fontRef>
+        </p:style>
+        <p:txBody>
+          <a:bodyPr rtlCol="0" anchor="ctr"/>
+          <a:lstStyle/>
+          <a:p>
+            <a:pPr algn="ctr"/>
+          </a:p>
+        </p:txBody>
+      </p:sp>
+      <p:sp>
+        <p:nvSpPr>
+          <p:cNvPr id="37" name="Rounded Rectangle 36"/>
+          <p:cNvSpPr/>
+          <p:nvPr/>
+        </p:nvSpPr>
+        <p:spPr>
+          <a:xfrm>
+            <a:off x="9144000" y="1905000"/>
+            <a:ext cx="2857500" cy="1123950"/>
+          </a:xfrm>
+          <a:prstGeom prst="roundRect">
+            <a:avLst>
+              <a:gd name="adj" fmla="val 8000"/>
+            </a:avLst>
+          </a:prstGeom>
+          <a:solidFill>
+            <a:srgbClr val="F1F5F9"/>
+          </a:solidFill>
+          <a:ln>
+            <a:noFill/>
+          </a:ln>
+          <a:effectLst/>
+        </p:spPr>
+        <p:style>
+          <a:lnRef idx="1">
+            <a:schemeClr val="accent1"/>
+          </a:lnRef>
+          <a:fillRef idx="3">
+            <a:schemeClr val="accent1"/>
+          </a:fillRef>
+          <a:effectRef idx="2">
+            <a:schemeClr val="accent1"/>
+          </a:effectRef>
+          <a:fontRef idx="minor">
+            <a:schemeClr val="lt1"/>
+          </a:fontRef>
+        </p:style>
+        <p:txBody>
+          <a:bodyPr rtlCol="0" anchor="ctr"/>
+          <a:lstStyle/>
+          <a:p>
+            <a:pPr algn="ctr"/>
+          </a:p>
+        </p:txBody>
+      </p:sp>
+      <p:sp>
+        <p:nvSpPr>
+          <p:cNvPr id="38" name="Rectangle 37"/>
+          <p:cNvSpPr/>
+          <p:nvPr/>
+        </p:nvSpPr>
+        <p:spPr>
+          <a:xfrm>
+            <a:off x="9144000" y="1905000"/>
+            <a:ext cx="2857500" cy="38100"/>
+          </a:xfrm>
+          <a:prstGeom prst="rect">
+            <a:avLst/>
+          </a:prstGeom>
+          <a:solidFill>
+            <a:srgbClr val="2563EB"/>
+          </a:solidFill>
+          <a:ln>
+            <a:noFill/>
+          </a:ln>
+          <a:effectLst/>
+        </p:spPr>
+        <p:style>
+          <a:lnRef idx="1">
+            <a:schemeClr val="accent1"/>
+          </a:lnRef>
+          <a:fillRef idx="3">
+            <a:schemeClr val="accent1"/>
+          </a:fillRef>
+          <a:effectRef idx="2">
+            <a:schemeClr val="accent1"/>
+          </a:effectRef>
+          <a:fontRef idx="minor">
+            <a:schemeClr val="lt1"/>
+          </a:fontRef>
+        </p:style>
+        <p:txBody>
+          <a:bodyPr rtlCol="0" anchor="ctr"/>
+          <a:lstStyle/>
+          <a:p>
+            <a:pPr algn="ctr"/>
+          </a:p>
+        </p:txBody>
+      </p:sp>
+      <p:sp>
+        <p:nvSpPr>
+          <p:cNvPr id="39" name="TextBox 38"/>
+          <p:cNvSpPr txBox="1"/>
+          <p:nvPr/>
+        </p:nvSpPr>
+        <p:spPr>
+          <a:xfrm>
+            <a:off x="9239250" y="2000250"/>
+            <a:ext cx="2667000" cy="285750"/>
+          </a:xfrm>
+          <a:prstGeom prst="rect">
+            <a:avLst/>
+          </a:prstGeom>
+          <a:noFill/>
+        </p:spPr>
+        <p:txBody>
+          <a:bodyPr wrap="square" anchor="ctr">
+            <a:spAutoFit/>
+          </a:bodyPr>
+          <a:lstStyle/>
+          <a:p>
+            <a:pPr algn="ctr">
+              <a:lnSpc>
+                <a:spcPct val="100000"/>
+              </a:lnSpc>
+            </a:pPr>
+            <a:r>
+              <a:rPr sz="1400" b="1">
+                <a:solidFill>
+                  <a:srgbClr val="2563EB"/>
+                </a:solidFill>
+                <a:latin typeface="PingFang SC"/>
+              </a:rPr>
+              <a:t>下线</a:t>
+            </a:r>
+          </a:p>
+        </p:txBody>
+      </p:sp>
+      <p:sp>
+        <p:nvSpPr>
+          <p:cNvPr id="40" name="TextBox 39"/>
+          <p:cNvSpPr txBox="1"/>
+          <p:nvPr/>
+        </p:nvSpPr>
+        <p:spPr>
+          <a:xfrm>
+            <a:off x="9239250" y="2305050"/>
+            <a:ext cx="2667000" cy="666750"/>
+          </a:xfrm>
+          <a:prstGeom prst="rect">
+            <a:avLst/>
+          </a:prstGeom>
+          <a:noFill/>
+        </p:spPr>
+        <p:txBody>
+          <a:bodyPr wrap="square" anchor="ctr">
+            <a:spAutoFit/>
+          </a:bodyPr>
+          <a:lstStyle/>
+          <a:p>
+            <a:pPr algn="l">
+              <a:lnSpc>
+                <a:spcPct val="105000"/>
+              </a:lnSpc>
+            </a:pPr>
+            <a:r>
+              <a:rPr sz="1050" b="0">
+                <a:solidFill>
+                  <a:srgbClr val="475569"/>
+                </a:solidFill>
+                <a:latin typeface="PingFang SC"/>
+              </a:rPr>
+              <a:t>低分淘汰</a:t>
+            </a:r>
+          </a:p>
+        </p:txBody>
+      </p:sp>
+      <p:sp>
+        <p:nvSpPr>
+          <p:cNvPr id="41" name="TextBox 40"/>
+          <p:cNvSpPr txBox="1"/>
+          <p:nvPr/>
+        </p:nvSpPr>
+        <p:spPr>
+          <a:xfrm>
+            <a:off x="10287000" y="6534150"/>
+            <a:ext cx="1619250" cy="266700"/>
           </a:xfrm>
           <a:prstGeom prst="rect">
             <a:avLst/>
@@ -23086,1587 +24751,6 @@
               </a:lnSpc>
             </a:pPr>
             <a:r>
-              <a:rPr sz="1100" b="0">
-                <a:solidFill>
-                  <a:srgbClr val="94A3B8"/>
-                </a:solidFill>
-                <a:latin typeface="PingFang SC"/>
-              </a:rPr>
-              <a:t>注册:名称/场景/步骤;检索:场景匹配;执行:编排工具;评估:质量标准达标;版本:递增强制;复用:跨场景调用;下线:低分淘汰|版本回退直接 ValueError</a:t>
-            </a:r>
-          </a:p>
-        </p:txBody>
-      </p:sp>
-      <p:sp>
-        <p:nvSpPr>
-          <p:cNvPr id="6" name="Rectangle 5"/>
-          <p:cNvSpPr/>
-          <p:nvPr/>
-        </p:nvSpPr>
-        <p:spPr>
-          <a:xfrm>
-            <a:off x="1619250" y="3314700"/>
-            <a:ext cx="8953500" cy="38100"/>
-          </a:xfrm>
-          <a:prstGeom prst="rect">
-            <a:avLst/>
-          </a:prstGeom>
-          <a:solidFill>
-            <a:srgbClr val="DDE5EE"/>
-          </a:solidFill>
-          <a:ln>
-            <a:noFill/>
-          </a:ln>
-          <a:effectLst/>
-        </p:spPr>
-        <p:style>
-          <a:lnRef idx="1">
-            <a:schemeClr val="accent1"/>
-          </a:lnRef>
-          <a:fillRef idx="3">
-            <a:schemeClr val="accent1"/>
-          </a:fillRef>
-          <a:effectRef idx="2">
-            <a:schemeClr val="accent1"/>
-          </a:effectRef>
-          <a:fontRef idx="minor">
-            <a:schemeClr val="lt1"/>
-          </a:fontRef>
-        </p:style>
-        <p:txBody>
-          <a:bodyPr rtlCol="0" anchor="ctr"/>
-          <a:lstStyle/>
-          <a:p>
-            <a:pPr algn="ctr"/>
-          </a:p>
-        </p:txBody>
-      </p:sp>
-      <p:sp>
-        <p:nvSpPr>
-          <p:cNvPr id="7" name="Rounded Rectangle 6"/>
-          <p:cNvSpPr/>
-          <p:nvPr/>
-        </p:nvSpPr>
-        <p:spPr>
-          <a:xfrm>
-            <a:off x="1514475" y="3228975"/>
-            <a:ext cx="209550" cy="209550"/>
-          </a:xfrm>
-          <a:prstGeom prst="roundRect">
-            <a:avLst>
-              <a:gd name="adj" fmla="val 8000"/>
-            </a:avLst>
-          </a:prstGeom>
-          <a:solidFill>
-            <a:srgbClr val="2563EB"/>
-          </a:solidFill>
-          <a:ln>
-            <a:noFill/>
-          </a:ln>
-          <a:effectLst/>
-        </p:spPr>
-        <p:style>
-          <a:lnRef idx="1">
-            <a:schemeClr val="accent1"/>
-          </a:lnRef>
-          <a:fillRef idx="3">
-            <a:schemeClr val="accent1"/>
-          </a:fillRef>
-          <a:effectRef idx="2">
-            <a:schemeClr val="accent1"/>
-          </a:effectRef>
-          <a:fontRef idx="minor">
-            <a:schemeClr val="lt1"/>
-          </a:fontRef>
-        </p:style>
-        <p:txBody>
-          <a:bodyPr rtlCol="0" anchor="ctr"/>
-          <a:lstStyle/>
-          <a:p>
-            <a:pPr algn="ctr"/>
-          </a:p>
-        </p:txBody>
-      </p:sp>
-      <p:sp>
-        <p:nvSpPr>
-          <p:cNvPr id="8" name="Rounded Rectangle 7"/>
-          <p:cNvSpPr/>
-          <p:nvPr/>
-        </p:nvSpPr>
-        <p:spPr>
-          <a:xfrm>
-            <a:off x="190500" y="1905000"/>
-            <a:ext cx="2857500" cy="1123950"/>
-          </a:xfrm>
-          <a:prstGeom prst="roundRect">
-            <a:avLst>
-              <a:gd name="adj" fmla="val 8000"/>
-            </a:avLst>
-          </a:prstGeom>
-          <a:solidFill>
-            <a:srgbClr val="F1F5F9"/>
-          </a:solidFill>
-          <a:ln>
-            <a:noFill/>
-          </a:ln>
-          <a:effectLst/>
-        </p:spPr>
-        <p:style>
-          <a:lnRef idx="1">
-            <a:schemeClr val="accent1"/>
-          </a:lnRef>
-          <a:fillRef idx="3">
-            <a:schemeClr val="accent1"/>
-          </a:fillRef>
-          <a:effectRef idx="2">
-            <a:schemeClr val="accent1"/>
-          </a:effectRef>
-          <a:fontRef idx="minor">
-            <a:schemeClr val="lt1"/>
-          </a:fontRef>
-        </p:style>
-        <p:txBody>
-          <a:bodyPr rtlCol="0" anchor="ctr"/>
-          <a:lstStyle/>
-          <a:p>
-            <a:pPr algn="ctr"/>
-          </a:p>
-        </p:txBody>
-      </p:sp>
-      <p:sp>
-        <p:nvSpPr>
-          <p:cNvPr id="9" name="Rectangle 8"/>
-          <p:cNvSpPr/>
-          <p:nvPr/>
-        </p:nvSpPr>
-        <p:spPr>
-          <a:xfrm>
-            <a:off x="190500" y="1905000"/>
-            <a:ext cx="2857500" cy="38100"/>
-          </a:xfrm>
-          <a:prstGeom prst="rect">
-            <a:avLst/>
-          </a:prstGeom>
-          <a:solidFill>
-            <a:srgbClr val="2563EB"/>
-          </a:solidFill>
-          <a:ln>
-            <a:noFill/>
-          </a:ln>
-          <a:effectLst/>
-        </p:spPr>
-        <p:style>
-          <a:lnRef idx="1">
-            <a:schemeClr val="accent1"/>
-          </a:lnRef>
-          <a:fillRef idx="3">
-            <a:schemeClr val="accent1"/>
-          </a:fillRef>
-          <a:effectRef idx="2">
-            <a:schemeClr val="accent1"/>
-          </a:effectRef>
-          <a:fontRef idx="minor">
-            <a:schemeClr val="lt1"/>
-          </a:fontRef>
-        </p:style>
-        <p:txBody>
-          <a:bodyPr rtlCol="0" anchor="ctr"/>
-          <a:lstStyle/>
-          <a:p>
-            <a:pPr algn="ctr"/>
-          </a:p>
-        </p:txBody>
-      </p:sp>
-      <p:sp>
-        <p:nvSpPr>
-          <p:cNvPr id="10" name="TextBox 9"/>
-          <p:cNvSpPr txBox="1"/>
-          <p:nvPr/>
-        </p:nvSpPr>
-        <p:spPr>
-          <a:xfrm>
-            <a:off x="285750" y="2000250"/>
-            <a:ext cx="2667000" cy="285750"/>
-          </a:xfrm>
-          <a:prstGeom prst="rect">
-            <a:avLst/>
-          </a:prstGeom>
-          <a:noFill/>
-        </p:spPr>
-        <p:txBody>
-          <a:bodyPr wrap="square" anchor="ctr">
-            <a:spAutoFit/>
-          </a:bodyPr>
-          <a:lstStyle/>
-          <a:p>
-            <a:pPr algn="ctr">
-              <a:lnSpc>
-                <a:spcPct val="100000"/>
-              </a:lnSpc>
-            </a:pPr>
-            <a:r>
-              <a:rPr sz="1400" b="1">
-                <a:solidFill>
-                  <a:srgbClr val="2563EB"/>
-                </a:solidFill>
-                <a:latin typeface="PingFang SC"/>
-              </a:rPr>
-              <a:t>注册</a:t>
-            </a:r>
-          </a:p>
-        </p:txBody>
-      </p:sp>
-      <p:sp>
-        <p:nvSpPr>
-          <p:cNvPr id="11" name="TextBox 10"/>
-          <p:cNvSpPr txBox="1"/>
-          <p:nvPr/>
-        </p:nvSpPr>
-        <p:spPr>
-          <a:xfrm>
-            <a:off x="285750" y="2305050"/>
-            <a:ext cx="2667000" cy="666750"/>
-          </a:xfrm>
-          <a:prstGeom prst="rect">
-            <a:avLst/>
-          </a:prstGeom>
-          <a:noFill/>
-        </p:spPr>
-        <p:txBody>
-          <a:bodyPr wrap="square" anchor="ctr">
-            <a:spAutoFit/>
-          </a:bodyPr>
-          <a:lstStyle/>
-          <a:p>
-            <a:pPr algn="l">
-              <a:lnSpc>
-                <a:spcPct val="105000"/>
-              </a:lnSpc>
-            </a:pPr>
-            <a:r>
-              <a:rPr sz="1050" b="0">
-                <a:solidFill>
-                  <a:srgbClr val="475569"/>
-                </a:solidFill>
-                <a:latin typeface="PingFang SC"/>
-              </a:rPr>
-              <a:t>名称/场景/步骤</a:t>
-            </a:r>
-          </a:p>
-        </p:txBody>
-      </p:sp>
-      <p:sp>
-        <p:nvSpPr>
-          <p:cNvPr id="12" name="Rounded Rectangle 11"/>
-          <p:cNvSpPr/>
-          <p:nvPr/>
-        </p:nvSpPr>
-        <p:spPr>
-          <a:xfrm>
-            <a:off x="3006725" y="3228975"/>
-            <a:ext cx="209550" cy="209550"/>
-          </a:xfrm>
-          <a:prstGeom prst="roundRect">
-            <a:avLst>
-              <a:gd name="adj" fmla="val 8000"/>
-            </a:avLst>
-          </a:prstGeom>
-          <a:solidFill>
-            <a:srgbClr val="14B8A6"/>
-          </a:solidFill>
-          <a:ln>
-            <a:noFill/>
-          </a:ln>
-          <a:effectLst/>
-        </p:spPr>
-        <p:style>
-          <a:lnRef idx="1">
-            <a:schemeClr val="accent1"/>
-          </a:lnRef>
-          <a:fillRef idx="3">
-            <a:schemeClr val="accent1"/>
-          </a:fillRef>
-          <a:effectRef idx="2">
-            <a:schemeClr val="accent1"/>
-          </a:effectRef>
-          <a:fontRef idx="minor">
-            <a:schemeClr val="lt1"/>
-          </a:fontRef>
-        </p:style>
-        <p:txBody>
-          <a:bodyPr rtlCol="0" anchor="ctr"/>
-          <a:lstStyle/>
-          <a:p>
-            <a:pPr algn="ctr"/>
-          </a:p>
-        </p:txBody>
-      </p:sp>
-      <p:sp>
-        <p:nvSpPr>
-          <p:cNvPr id="13" name="Rounded Rectangle 12"/>
-          <p:cNvSpPr/>
-          <p:nvPr/>
-        </p:nvSpPr>
-        <p:spPr>
-          <a:xfrm>
-            <a:off x="1682750" y="3619500"/>
-            <a:ext cx="2857500" cy="1123950"/>
-          </a:xfrm>
-          <a:prstGeom prst="roundRect">
-            <a:avLst>
-              <a:gd name="adj" fmla="val 8000"/>
-            </a:avLst>
-          </a:prstGeom>
-          <a:solidFill>
-            <a:srgbClr val="F1F5F9"/>
-          </a:solidFill>
-          <a:ln>
-            <a:noFill/>
-          </a:ln>
-          <a:effectLst/>
-        </p:spPr>
-        <p:style>
-          <a:lnRef idx="1">
-            <a:schemeClr val="accent1"/>
-          </a:lnRef>
-          <a:fillRef idx="3">
-            <a:schemeClr val="accent1"/>
-          </a:fillRef>
-          <a:effectRef idx="2">
-            <a:schemeClr val="accent1"/>
-          </a:effectRef>
-          <a:fontRef idx="minor">
-            <a:schemeClr val="lt1"/>
-          </a:fontRef>
-        </p:style>
-        <p:txBody>
-          <a:bodyPr rtlCol="0" anchor="ctr"/>
-          <a:lstStyle/>
-          <a:p>
-            <a:pPr algn="ctr"/>
-          </a:p>
-        </p:txBody>
-      </p:sp>
-      <p:sp>
-        <p:nvSpPr>
-          <p:cNvPr id="14" name="Rectangle 13"/>
-          <p:cNvSpPr/>
-          <p:nvPr/>
-        </p:nvSpPr>
-        <p:spPr>
-          <a:xfrm>
-            <a:off x="1682750" y="3619500"/>
-            <a:ext cx="2857500" cy="38100"/>
-          </a:xfrm>
-          <a:prstGeom prst="rect">
-            <a:avLst/>
-          </a:prstGeom>
-          <a:solidFill>
-            <a:srgbClr val="14B8A6"/>
-          </a:solidFill>
-          <a:ln>
-            <a:noFill/>
-          </a:ln>
-          <a:effectLst/>
-        </p:spPr>
-        <p:style>
-          <a:lnRef idx="1">
-            <a:schemeClr val="accent1"/>
-          </a:lnRef>
-          <a:fillRef idx="3">
-            <a:schemeClr val="accent1"/>
-          </a:fillRef>
-          <a:effectRef idx="2">
-            <a:schemeClr val="accent1"/>
-          </a:effectRef>
-          <a:fontRef idx="minor">
-            <a:schemeClr val="lt1"/>
-          </a:fontRef>
-        </p:style>
-        <p:txBody>
-          <a:bodyPr rtlCol="0" anchor="ctr"/>
-          <a:lstStyle/>
-          <a:p>
-            <a:pPr algn="ctr"/>
-          </a:p>
-        </p:txBody>
-      </p:sp>
-      <p:sp>
-        <p:nvSpPr>
-          <p:cNvPr id="15" name="TextBox 14"/>
-          <p:cNvSpPr txBox="1"/>
-          <p:nvPr/>
-        </p:nvSpPr>
-        <p:spPr>
-          <a:xfrm>
-            <a:off x="1778000" y="3714750"/>
-            <a:ext cx="2667000" cy="285750"/>
-          </a:xfrm>
-          <a:prstGeom prst="rect">
-            <a:avLst/>
-          </a:prstGeom>
-          <a:noFill/>
-        </p:spPr>
-        <p:txBody>
-          <a:bodyPr wrap="square" anchor="ctr">
-            <a:spAutoFit/>
-          </a:bodyPr>
-          <a:lstStyle/>
-          <a:p>
-            <a:pPr algn="ctr">
-              <a:lnSpc>
-                <a:spcPct val="100000"/>
-              </a:lnSpc>
-            </a:pPr>
-            <a:r>
-              <a:rPr sz="1400" b="1">
-                <a:solidFill>
-                  <a:srgbClr val="14B8A6"/>
-                </a:solidFill>
-                <a:latin typeface="PingFang SC"/>
-              </a:rPr>
-              <a:t>检索</a:t>
-            </a:r>
-          </a:p>
-        </p:txBody>
-      </p:sp>
-      <p:sp>
-        <p:nvSpPr>
-          <p:cNvPr id="16" name="TextBox 15"/>
-          <p:cNvSpPr txBox="1"/>
-          <p:nvPr/>
-        </p:nvSpPr>
-        <p:spPr>
-          <a:xfrm>
-            <a:off x="1778000" y="4019550"/>
-            <a:ext cx="2667000" cy="666750"/>
-          </a:xfrm>
-          <a:prstGeom prst="rect">
-            <a:avLst/>
-          </a:prstGeom>
-          <a:noFill/>
-        </p:spPr>
-        <p:txBody>
-          <a:bodyPr wrap="square" anchor="ctr">
-            <a:spAutoFit/>
-          </a:bodyPr>
-          <a:lstStyle/>
-          <a:p>
-            <a:pPr algn="l">
-              <a:lnSpc>
-                <a:spcPct val="105000"/>
-              </a:lnSpc>
-            </a:pPr>
-            <a:r>
-              <a:rPr sz="1050" b="0">
-                <a:solidFill>
-                  <a:srgbClr val="475569"/>
-                </a:solidFill>
-                <a:latin typeface="PingFang SC"/>
-              </a:rPr>
-              <a:t>场景匹配</a:t>
-            </a:r>
-          </a:p>
-        </p:txBody>
-      </p:sp>
-      <p:sp>
-        <p:nvSpPr>
-          <p:cNvPr id="17" name="Rounded Rectangle 16"/>
-          <p:cNvSpPr/>
-          <p:nvPr/>
-        </p:nvSpPr>
-        <p:spPr>
-          <a:xfrm>
-            <a:off x="4498975" y="3228975"/>
-            <a:ext cx="209550" cy="209550"/>
-          </a:xfrm>
-          <a:prstGeom prst="roundRect">
-            <a:avLst>
-              <a:gd name="adj" fmla="val 8000"/>
-            </a:avLst>
-          </a:prstGeom>
-          <a:solidFill>
-            <a:srgbClr val="8B5CF6"/>
-          </a:solidFill>
-          <a:ln>
-            <a:noFill/>
-          </a:ln>
-          <a:effectLst/>
-        </p:spPr>
-        <p:style>
-          <a:lnRef idx="1">
-            <a:schemeClr val="accent1"/>
-          </a:lnRef>
-          <a:fillRef idx="3">
-            <a:schemeClr val="accent1"/>
-          </a:fillRef>
-          <a:effectRef idx="2">
-            <a:schemeClr val="accent1"/>
-          </a:effectRef>
-          <a:fontRef idx="minor">
-            <a:schemeClr val="lt1"/>
-          </a:fontRef>
-        </p:style>
-        <p:txBody>
-          <a:bodyPr rtlCol="0" anchor="ctr"/>
-          <a:lstStyle/>
-          <a:p>
-            <a:pPr algn="ctr"/>
-          </a:p>
-        </p:txBody>
-      </p:sp>
-      <p:sp>
-        <p:nvSpPr>
-          <p:cNvPr id="18" name="Rounded Rectangle 17"/>
-          <p:cNvSpPr/>
-          <p:nvPr/>
-        </p:nvSpPr>
-        <p:spPr>
-          <a:xfrm>
-            <a:off x="3175000" y="1905000"/>
-            <a:ext cx="2857500" cy="1123950"/>
-          </a:xfrm>
-          <a:prstGeom prst="roundRect">
-            <a:avLst>
-              <a:gd name="adj" fmla="val 8000"/>
-            </a:avLst>
-          </a:prstGeom>
-          <a:solidFill>
-            <a:srgbClr val="F1F5F9"/>
-          </a:solidFill>
-          <a:ln>
-            <a:noFill/>
-          </a:ln>
-          <a:effectLst/>
-        </p:spPr>
-        <p:style>
-          <a:lnRef idx="1">
-            <a:schemeClr val="accent1"/>
-          </a:lnRef>
-          <a:fillRef idx="3">
-            <a:schemeClr val="accent1"/>
-          </a:fillRef>
-          <a:effectRef idx="2">
-            <a:schemeClr val="accent1"/>
-          </a:effectRef>
-          <a:fontRef idx="minor">
-            <a:schemeClr val="lt1"/>
-          </a:fontRef>
-        </p:style>
-        <p:txBody>
-          <a:bodyPr rtlCol="0" anchor="ctr"/>
-          <a:lstStyle/>
-          <a:p>
-            <a:pPr algn="ctr"/>
-          </a:p>
-        </p:txBody>
-      </p:sp>
-      <p:sp>
-        <p:nvSpPr>
-          <p:cNvPr id="19" name="Rectangle 18"/>
-          <p:cNvSpPr/>
-          <p:nvPr/>
-        </p:nvSpPr>
-        <p:spPr>
-          <a:xfrm>
-            <a:off x="3175000" y="1905000"/>
-            <a:ext cx="2857500" cy="38100"/>
-          </a:xfrm>
-          <a:prstGeom prst="rect">
-            <a:avLst/>
-          </a:prstGeom>
-          <a:solidFill>
-            <a:srgbClr val="8B5CF6"/>
-          </a:solidFill>
-          <a:ln>
-            <a:noFill/>
-          </a:ln>
-          <a:effectLst/>
-        </p:spPr>
-        <p:style>
-          <a:lnRef idx="1">
-            <a:schemeClr val="accent1"/>
-          </a:lnRef>
-          <a:fillRef idx="3">
-            <a:schemeClr val="accent1"/>
-          </a:fillRef>
-          <a:effectRef idx="2">
-            <a:schemeClr val="accent1"/>
-          </a:effectRef>
-          <a:fontRef idx="minor">
-            <a:schemeClr val="lt1"/>
-          </a:fontRef>
-        </p:style>
-        <p:txBody>
-          <a:bodyPr rtlCol="0" anchor="ctr"/>
-          <a:lstStyle/>
-          <a:p>
-            <a:pPr algn="ctr"/>
-          </a:p>
-        </p:txBody>
-      </p:sp>
-      <p:sp>
-        <p:nvSpPr>
-          <p:cNvPr id="20" name="TextBox 19"/>
-          <p:cNvSpPr txBox="1"/>
-          <p:nvPr/>
-        </p:nvSpPr>
-        <p:spPr>
-          <a:xfrm>
-            <a:off x="3270250" y="2000250"/>
-            <a:ext cx="2667000" cy="285750"/>
-          </a:xfrm>
-          <a:prstGeom prst="rect">
-            <a:avLst/>
-          </a:prstGeom>
-          <a:noFill/>
-        </p:spPr>
-        <p:txBody>
-          <a:bodyPr wrap="square" anchor="ctr">
-            <a:spAutoFit/>
-          </a:bodyPr>
-          <a:lstStyle/>
-          <a:p>
-            <a:pPr algn="ctr">
-              <a:lnSpc>
-                <a:spcPct val="100000"/>
-              </a:lnSpc>
-            </a:pPr>
-            <a:r>
-              <a:rPr sz="1400" b="1">
-                <a:solidFill>
-                  <a:srgbClr val="8B5CF6"/>
-                </a:solidFill>
-                <a:latin typeface="PingFang SC"/>
-              </a:rPr>
-              <a:t>执行</a:t>
-            </a:r>
-          </a:p>
-        </p:txBody>
-      </p:sp>
-      <p:sp>
-        <p:nvSpPr>
-          <p:cNvPr id="21" name="TextBox 20"/>
-          <p:cNvSpPr txBox="1"/>
-          <p:nvPr/>
-        </p:nvSpPr>
-        <p:spPr>
-          <a:xfrm>
-            <a:off x="3270250" y="2305050"/>
-            <a:ext cx="2667000" cy="666750"/>
-          </a:xfrm>
-          <a:prstGeom prst="rect">
-            <a:avLst/>
-          </a:prstGeom>
-          <a:noFill/>
-        </p:spPr>
-        <p:txBody>
-          <a:bodyPr wrap="square" anchor="ctr">
-            <a:spAutoFit/>
-          </a:bodyPr>
-          <a:lstStyle/>
-          <a:p>
-            <a:pPr algn="l">
-              <a:lnSpc>
-                <a:spcPct val="105000"/>
-              </a:lnSpc>
-            </a:pPr>
-            <a:r>
-              <a:rPr sz="1050" b="0">
-                <a:solidFill>
-                  <a:srgbClr val="475569"/>
-                </a:solidFill>
-                <a:latin typeface="PingFang SC"/>
-              </a:rPr>
-              <a:t>编排工具</a:t>
-            </a:r>
-          </a:p>
-        </p:txBody>
-      </p:sp>
-      <p:sp>
-        <p:nvSpPr>
-          <p:cNvPr id="22" name="Rounded Rectangle 21"/>
-          <p:cNvSpPr/>
-          <p:nvPr/>
-        </p:nvSpPr>
-        <p:spPr>
-          <a:xfrm>
-            <a:off x="5991225" y="3228975"/>
-            <a:ext cx="209550" cy="209550"/>
-          </a:xfrm>
-          <a:prstGeom prst="roundRect">
-            <a:avLst>
-              <a:gd name="adj" fmla="val 8000"/>
-            </a:avLst>
-          </a:prstGeom>
-          <a:solidFill>
-            <a:srgbClr val="F59E0B"/>
-          </a:solidFill>
-          <a:ln>
-            <a:noFill/>
-          </a:ln>
-          <a:effectLst/>
-        </p:spPr>
-        <p:style>
-          <a:lnRef idx="1">
-            <a:schemeClr val="accent1"/>
-          </a:lnRef>
-          <a:fillRef idx="3">
-            <a:schemeClr val="accent1"/>
-          </a:fillRef>
-          <a:effectRef idx="2">
-            <a:schemeClr val="accent1"/>
-          </a:effectRef>
-          <a:fontRef idx="minor">
-            <a:schemeClr val="lt1"/>
-          </a:fontRef>
-        </p:style>
-        <p:txBody>
-          <a:bodyPr rtlCol="0" anchor="ctr"/>
-          <a:lstStyle/>
-          <a:p>
-            <a:pPr algn="ctr"/>
-          </a:p>
-        </p:txBody>
-      </p:sp>
-      <p:sp>
-        <p:nvSpPr>
-          <p:cNvPr id="23" name="Rounded Rectangle 22"/>
-          <p:cNvSpPr/>
-          <p:nvPr/>
-        </p:nvSpPr>
-        <p:spPr>
-          <a:xfrm>
-            <a:off x="4667250" y="3619500"/>
-            <a:ext cx="2857500" cy="1123950"/>
-          </a:xfrm>
-          <a:prstGeom prst="roundRect">
-            <a:avLst>
-              <a:gd name="adj" fmla="val 8000"/>
-            </a:avLst>
-          </a:prstGeom>
-          <a:solidFill>
-            <a:srgbClr val="F1F5F9"/>
-          </a:solidFill>
-          <a:ln>
-            <a:noFill/>
-          </a:ln>
-          <a:effectLst/>
-        </p:spPr>
-        <p:style>
-          <a:lnRef idx="1">
-            <a:schemeClr val="accent1"/>
-          </a:lnRef>
-          <a:fillRef idx="3">
-            <a:schemeClr val="accent1"/>
-          </a:fillRef>
-          <a:effectRef idx="2">
-            <a:schemeClr val="accent1"/>
-          </a:effectRef>
-          <a:fontRef idx="minor">
-            <a:schemeClr val="lt1"/>
-          </a:fontRef>
-        </p:style>
-        <p:txBody>
-          <a:bodyPr rtlCol="0" anchor="ctr"/>
-          <a:lstStyle/>
-          <a:p>
-            <a:pPr algn="ctr"/>
-          </a:p>
-        </p:txBody>
-      </p:sp>
-      <p:sp>
-        <p:nvSpPr>
-          <p:cNvPr id="24" name="Rectangle 23"/>
-          <p:cNvSpPr/>
-          <p:nvPr/>
-        </p:nvSpPr>
-        <p:spPr>
-          <a:xfrm>
-            <a:off x="4667250" y="3619500"/>
-            <a:ext cx="2857500" cy="38100"/>
-          </a:xfrm>
-          <a:prstGeom prst="rect">
-            <a:avLst/>
-          </a:prstGeom>
-          <a:solidFill>
-            <a:srgbClr val="F59E0B"/>
-          </a:solidFill>
-          <a:ln>
-            <a:noFill/>
-          </a:ln>
-          <a:effectLst/>
-        </p:spPr>
-        <p:style>
-          <a:lnRef idx="1">
-            <a:schemeClr val="accent1"/>
-          </a:lnRef>
-          <a:fillRef idx="3">
-            <a:schemeClr val="accent1"/>
-          </a:fillRef>
-          <a:effectRef idx="2">
-            <a:schemeClr val="accent1"/>
-          </a:effectRef>
-          <a:fontRef idx="minor">
-            <a:schemeClr val="lt1"/>
-          </a:fontRef>
-        </p:style>
-        <p:txBody>
-          <a:bodyPr rtlCol="0" anchor="ctr"/>
-          <a:lstStyle/>
-          <a:p>
-            <a:pPr algn="ctr"/>
-          </a:p>
-        </p:txBody>
-      </p:sp>
-      <p:sp>
-        <p:nvSpPr>
-          <p:cNvPr id="25" name="TextBox 24"/>
-          <p:cNvSpPr txBox="1"/>
-          <p:nvPr/>
-        </p:nvSpPr>
-        <p:spPr>
-          <a:xfrm>
-            <a:off x="4762500" y="3714750"/>
-            <a:ext cx="2667000" cy="285750"/>
-          </a:xfrm>
-          <a:prstGeom prst="rect">
-            <a:avLst/>
-          </a:prstGeom>
-          <a:noFill/>
-        </p:spPr>
-        <p:txBody>
-          <a:bodyPr wrap="square" anchor="ctr">
-            <a:spAutoFit/>
-          </a:bodyPr>
-          <a:lstStyle/>
-          <a:p>
-            <a:pPr algn="ctr">
-              <a:lnSpc>
-                <a:spcPct val="100000"/>
-              </a:lnSpc>
-            </a:pPr>
-            <a:r>
-              <a:rPr sz="1400" b="1">
-                <a:solidFill>
-                  <a:srgbClr val="F59E0B"/>
-                </a:solidFill>
-                <a:latin typeface="PingFang SC"/>
-              </a:rPr>
-              <a:t>评估</a:t>
-            </a:r>
-          </a:p>
-        </p:txBody>
-      </p:sp>
-      <p:sp>
-        <p:nvSpPr>
-          <p:cNvPr id="26" name="TextBox 25"/>
-          <p:cNvSpPr txBox="1"/>
-          <p:nvPr/>
-        </p:nvSpPr>
-        <p:spPr>
-          <a:xfrm>
-            <a:off x="4762500" y="4019550"/>
-            <a:ext cx="2667000" cy="666750"/>
-          </a:xfrm>
-          <a:prstGeom prst="rect">
-            <a:avLst/>
-          </a:prstGeom>
-          <a:noFill/>
-        </p:spPr>
-        <p:txBody>
-          <a:bodyPr wrap="square" anchor="ctr">
-            <a:spAutoFit/>
-          </a:bodyPr>
-          <a:lstStyle/>
-          <a:p>
-            <a:pPr algn="l">
-              <a:lnSpc>
-                <a:spcPct val="105000"/>
-              </a:lnSpc>
-            </a:pPr>
-            <a:r>
-              <a:rPr sz="1050" b="0">
-                <a:solidFill>
-                  <a:srgbClr val="475569"/>
-                </a:solidFill>
-                <a:latin typeface="PingFang SC"/>
-              </a:rPr>
-              <a:t>质量标准达标</a:t>
-            </a:r>
-          </a:p>
-        </p:txBody>
-      </p:sp>
-      <p:sp>
-        <p:nvSpPr>
-          <p:cNvPr id="27" name="Rounded Rectangle 26"/>
-          <p:cNvSpPr/>
-          <p:nvPr/>
-        </p:nvSpPr>
-        <p:spPr>
-          <a:xfrm>
-            <a:off x="7483475" y="3228975"/>
-            <a:ext cx="209550" cy="209550"/>
-          </a:xfrm>
-          <a:prstGeom prst="roundRect">
-            <a:avLst>
-              <a:gd name="adj" fmla="val 8000"/>
-            </a:avLst>
-          </a:prstGeom>
-          <a:solidFill>
-            <a:srgbClr val="34D399"/>
-          </a:solidFill>
-          <a:ln>
-            <a:noFill/>
-          </a:ln>
-          <a:effectLst/>
-        </p:spPr>
-        <p:style>
-          <a:lnRef idx="1">
-            <a:schemeClr val="accent1"/>
-          </a:lnRef>
-          <a:fillRef idx="3">
-            <a:schemeClr val="accent1"/>
-          </a:fillRef>
-          <a:effectRef idx="2">
-            <a:schemeClr val="accent1"/>
-          </a:effectRef>
-          <a:fontRef idx="minor">
-            <a:schemeClr val="lt1"/>
-          </a:fontRef>
-        </p:style>
-        <p:txBody>
-          <a:bodyPr rtlCol="0" anchor="ctr"/>
-          <a:lstStyle/>
-          <a:p>
-            <a:pPr algn="ctr"/>
-          </a:p>
-        </p:txBody>
-      </p:sp>
-      <p:sp>
-        <p:nvSpPr>
-          <p:cNvPr id="28" name="Rounded Rectangle 27"/>
-          <p:cNvSpPr/>
-          <p:nvPr/>
-        </p:nvSpPr>
-        <p:spPr>
-          <a:xfrm>
-            <a:off x="6159500" y="1905000"/>
-            <a:ext cx="2857500" cy="1123950"/>
-          </a:xfrm>
-          <a:prstGeom prst="roundRect">
-            <a:avLst>
-              <a:gd name="adj" fmla="val 8000"/>
-            </a:avLst>
-          </a:prstGeom>
-          <a:solidFill>
-            <a:srgbClr val="F1F5F9"/>
-          </a:solidFill>
-          <a:ln>
-            <a:noFill/>
-          </a:ln>
-          <a:effectLst/>
-        </p:spPr>
-        <p:style>
-          <a:lnRef idx="1">
-            <a:schemeClr val="accent1"/>
-          </a:lnRef>
-          <a:fillRef idx="3">
-            <a:schemeClr val="accent1"/>
-          </a:fillRef>
-          <a:effectRef idx="2">
-            <a:schemeClr val="accent1"/>
-          </a:effectRef>
-          <a:fontRef idx="minor">
-            <a:schemeClr val="lt1"/>
-          </a:fontRef>
-        </p:style>
-        <p:txBody>
-          <a:bodyPr rtlCol="0" anchor="ctr"/>
-          <a:lstStyle/>
-          <a:p>
-            <a:pPr algn="ctr"/>
-          </a:p>
-        </p:txBody>
-      </p:sp>
-      <p:sp>
-        <p:nvSpPr>
-          <p:cNvPr id="29" name="Rectangle 28"/>
-          <p:cNvSpPr/>
-          <p:nvPr/>
-        </p:nvSpPr>
-        <p:spPr>
-          <a:xfrm>
-            <a:off x="6159500" y="1905000"/>
-            <a:ext cx="2857500" cy="38100"/>
-          </a:xfrm>
-          <a:prstGeom prst="rect">
-            <a:avLst/>
-          </a:prstGeom>
-          <a:solidFill>
-            <a:srgbClr val="34D399"/>
-          </a:solidFill>
-          <a:ln>
-            <a:noFill/>
-          </a:ln>
-          <a:effectLst/>
-        </p:spPr>
-        <p:style>
-          <a:lnRef idx="1">
-            <a:schemeClr val="accent1"/>
-          </a:lnRef>
-          <a:fillRef idx="3">
-            <a:schemeClr val="accent1"/>
-          </a:fillRef>
-          <a:effectRef idx="2">
-            <a:schemeClr val="accent1"/>
-          </a:effectRef>
-          <a:fontRef idx="minor">
-            <a:schemeClr val="lt1"/>
-          </a:fontRef>
-        </p:style>
-        <p:txBody>
-          <a:bodyPr rtlCol="0" anchor="ctr"/>
-          <a:lstStyle/>
-          <a:p>
-            <a:pPr algn="ctr"/>
-          </a:p>
-        </p:txBody>
-      </p:sp>
-      <p:sp>
-        <p:nvSpPr>
-          <p:cNvPr id="30" name="TextBox 29"/>
-          <p:cNvSpPr txBox="1"/>
-          <p:nvPr/>
-        </p:nvSpPr>
-        <p:spPr>
-          <a:xfrm>
-            <a:off x="6254750" y="2000250"/>
-            <a:ext cx="2667000" cy="285750"/>
-          </a:xfrm>
-          <a:prstGeom prst="rect">
-            <a:avLst/>
-          </a:prstGeom>
-          <a:noFill/>
-        </p:spPr>
-        <p:txBody>
-          <a:bodyPr wrap="square" anchor="ctr">
-            <a:spAutoFit/>
-          </a:bodyPr>
-          <a:lstStyle/>
-          <a:p>
-            <a:pPr algn="ctr">
-              <a:lnSpc>
-                <a:spcPct val="100000"/>
-              </a:lnSpc>
-            </a:pPr>
-            <a:r>
-              <a:rPr sz="1400" b="1">
-                <a:solidFill>
-                  <a:srgbClr val="34D399"/>
-                </a:solidFill>
-                <a:latin typeface="PingFang SC"/>
-              </a:rPr>
-              <a:t>版本</a:t>
-            </a:r>
-          </a:p>
-        </p:txBody>
-      </p:sp>
-      <p:sp>
-        <p:nvSpPr>
-          <p:cNvPr id="31" name="TextBox 30"/>
-          <p:cNvSpPr txBox="1"/>
-          <p:nvPr/>
-        </p:nvSpPr>
-        <p:spPr>
-          <a:xfrm>
-            <a:off x="6254750" y="2305050"/>
-            <a:ext cx="2667000" cy="666750"/>
-          </a:xfrm>
-          <a:prstGeom prst="rect">
-            <a:avLst/>
-          </a:prstGeom>
-          <a:noFill/>
-        </p:spPr>
-        <p:txBody>
-          <a:bodyPr wrap="square" anchor="ctr">
-            <a:spAutoFit/>
-          </a:bodyPr>
-          <a:lstStyle/>
-          <a:p>
-            <a:pPr algn="l">
-              <a:lnSpc>
-                <a:spcPct val="105000"/>
-              </a:lnSpc>
-            </a:pPr>
-            <a:r>
-              <a:rPr sz="1050" b="0">
-                <a:solidFill>
-                  <a:srgbClr val="475569"/>
-                </a:solidFill>
-                <a:latin typeface="PingFang SC"/>
-              </a:rPr>
-              <a:t>递增强制</a:t>
-            </a:r>
-          </a:p>
-        </p:txBody>
-      </p:sp>
-      <p:sp>
-        <p:nvSpPr>
-          <p:cNvPr id="32" name="Rounded Rectangle 31"/>
-          <p:cNvSpPr/>
-          <p:nvPr/>
-        </p:nvSpPr>
-        <p:spPr>
-          <a:xfrm>
-            <a:off x="8975725" y="3228975"/>
-            <a:ext cx="209550" cy="209550"/>
-          </a:xfrm>
-          <a:prstGeom prst="roundRect">
-            <a:avLst>
-              <a:gd name="adj" fmla="val 8000"/>
-            </a:avLst>
-          </a:prstGeom>
-          <a:solidFill>
-            <a:srgbClr val="F87171"/>
-          </a:solidFill>
-          <a:ln>
-            <a:noFill/>
-          </a:ln>
-          <a:effectLst/>
-        </p:spPr>
-        <p:style>
-          <a:lnRef idx="1">
-            <a:schemeClr val="accent1"/>
-          </a:lnRef>
-          <a:fillRef idx="3">
-            <a:schemeClr val="accent1"/>
-          </a:fillRef>
-          <a:effectRef idx="2">
-            <a:schemeClr val="accent1"/>
-          </a:effectRef>
-          <a:fontRef idx="minor">
-            <a:schemeClr val="lt1"/>
-          </a:fontRef>
-        </p:style>
-        <p:txBody>
-          <a:bodyPr rtlCol="0" anchor="ctr"/>
-          <a:lstStyle/>
-          <a:p>
-            <a:pPr algn="ctr"/>
-          </a:p>
-        </p:txBody>
-      </p:sp>
-      <p:sp>
-        <p:nvSpPr>
-          <p:cNvPr id="33" name="Rounded Rectangle 32"/>
-          <p:cNvSpPr/>
-          <p:nvPr/>
-        </p:nvSpPr>
-        <p:spPr>
-          <a:xfrm>
-            <a:off x="7651750" y="3619500"/>
-            <a:ext cx="2857500" cy="1123950"/>
-          </a:xfrm>
-          <a:prstGeom prst="roundRect">
-            <a:avLst>
-              <a:gd name="adj" fmla="val 8000"/>
-            </a:avLst>
-          </a:prstGeom>
-          <a:solidFill>
-            <a:srgbClr val="F1F5F9"/>
-          </a:solidFill>
-          <a:ln>
-            <a:noFill/>
-          </a:ln>
-          <a:effectLst/>
-        </p:spPr>
-        <p:style>
-          <a:lnRef idx="1">
-            <a:schemeClr val="accent1"/>
-          </a:lnRef>
-          <a:fillRef idx="3">
-            <a:schemeClr val="accent1"/>
-          </a:fillRef>
-          <a:effectRef idx="2">
-            <a:schemeClr val="accent1"/>
-          </a:effectRef>
-          <a:fontRef idx="minor">
-            <a:schemeClr val="lt1"/>
-          </a:fontRef>
-        </p:style>
-        <p:txBody>
-          <a:bodyPr rtlCol="0" anchor="ctr"/>
-          <a:lstStyle/>
-          <a:p>
-            <a:pPr algn="ctr"/>
-          </a:p>
-        </p:txBody>
-      </p:sp>
-      <p:sp>
-        <p:nvSpPr>
-          <p:cNvPr id="34" name="Rectangle 33"/>
-          <p:cNvSpPr/>
-          <p:nvPr/>
-        </p:nvSpPr>
-        <p:spPr>
-          <a:xfrm>
-            <a:off x="7651750" y="3619500"/>
-            <a:ext cx="2857500" cy="38100"/>
-          </a:xfrm>
-          <a:prstGeom prst="rect">
-            <a:avLst/>
-          </a:prstGeom>
-          <a:solidFill>
-            <a:srgbClr val="F87171"/>
-          </a:solidFill>
-          <a:ln>
-            <a:noFill/>
-          </a:ln>
-          <a:effectLst/>
-        </p:spPr>
-        <p:style>
-          <a:lnRef idx="1">
-            <a:schemeClr val="accent1"/>
-          </a:lnRef>
-          <a:fillRef idx="3">
-            <a:schemeClr val="accent1"/>
-          </a:fillRef>
-          <a:effectRef idx="2">
-            <a:schemeClr val="accent1"/>
-          </a:effectRef>
-          <a:fontRef idx="minor">
-            <a:schemeClr val="lt1"/>
-          </a:fontRef>
-        </p:style>
-        <p:txBody>
-          <a:bodyPr rtlCol="0" anchor="ctr"/>
-          <a:lstStyle/>
-          <a:p>
-            <a:pPr algn="ctr"/>
-          </a:p>
-        </p:txBody>
-      </p:sp>
-      <p:sp>
-        <p:nvSpPr>
-          <p:cNvPr id="35" name="TextBox 34"/>
-          <p:cNvSpPr txBox="1"/>
-          <p:nvPr/>
-        </p:nvSpPr>
-        <p:spPr>
-          <a:xfrm>
-            <a:off x="7747000" y="3714750"/>
-            <a:ext cx="2667000" cy="285750"/>
-          </a:xfrm>
-          <a:prstGeom prst="rect">
-            <a:avLst/>
-          </a:prstGeom>
-          <a:noFill/>
-        </p:spPr>
-        <p:txBody>
-          <a:bodyPr wrap="square" anchor="ctr">
-            <a:spAutoFit/>
-          </a:bodyPr>
-          <a:lstStyle/>
-          <a:p>
-            <a:pPr algn="ctr">
-              <a:lnSpc>
-                <a:spcPct val="100000"/>
-              </a:lnSpc>
-            </a:pPr>
-            <a:r>
-              <a:rPr sz="1400" b="1">
-                <a:solidFill>
-                  <a:srgbClr val="F87171"/>
-                </a:solidFill>
-                <a:latin typeface="PingFang SC"/>
-              </a:rPr>
-              <a:t>复用</a:t>
-            </a:r>
-          </a:p>
-        </p:txBody>
-      </p:sp>
-      <p:sp>
-        <p:nvSpPr>
-          <p:cNvPr id="36" name="TextBox 35"/>
-          <p:cNvSpPr txBox="1"/>
-          <p:nvPr/>
-        </p:nvSpPr>
-        <p:spPr>
-          <a:xfrm>
-            <a:off x="7747000" y="4019550"/>
-            <a:ext cx="2667000" cy="666750"/>
-          </a:xfrm>
-          <a:prstGeom prst="rect">
-            <a:avLst/>
-          </a:prstGeom>
-          <a:noFill/>
-        </p:spPr>
-        <p:txBody>
-          <a:bodyPr wrap="square" anchor="ctr">
-            <a:spAutoFit/>
-          </a:bodyPr>
-          <a:lstStyle/>
-          <a:p>
-            <a:pPr algn="l">
-              <a:lnSpc>
-                <a:spcPct val="105000"/>
-              </a:lnSpc>
-            </a:pPr>
-            <a:r>
-              <a:rPr sz="1050" b="0">
-                <a:solidFill>
-                  <a:srgbClr val="475569"/>
-                </a:solidFill>
-                <a:latin typeface="PingFang SC"/>
-              </a:rPr>
-              <a:t>跨场景调用</a:t>
-            </a:r>
-          </a:p>
-        </p:txBody>
-      </p:sp>
-      <p:sp>
-        <p:nvSpPr>
-          <p:cNvPr id="37" name="Rounded Rectangle 36"/>
-          <p:cNvSpPr/>
-          <p:nvPr/>
-        </p:nvSpPr>
-        <p:spPr>
-          <a:xfrm>
-            <a:off x="10467975" y="3228975"/>
-            <a:ext cx="209550" cy="209550"/>
-          </a:xfrm>
-          <a:prstGeom prst="roundRect">
-            <a:avLst>
-              <a:gd name="adj" fmla="val 8000"/>
-            </a:avLst>
-          </a:prstGeom>
-          <a:solidFill>
-            <a:srgbClr val="2563EB"/>
-          </a:solidFill>
-          <a:ln>
-            <a:noFill/>
-          </a:ln>
-          <a:effectLst/>
-        </p:spPr>
-        <p:style>
-          <a:lnRef idx="1">
-            <a:schemeClr val="accent1"/>
-          </a:lnRef>
-          <a:fillRef idx="3">
-            <a:schemeClr val="accent1"/>
-          </a:fillRef>
-          <a:effectRef idx="2">
-            <a:schemeClr val="accent1"/>
-          </a:effectRef>
-          <a:fontRef idx="minor">
-            <a:schemeClr val="lt1"/>
-          </a:fontRef>
-        </p:style>
-        <p:txBody>
-          <a:bodyPr rtlCol="0" anchor="ctr"/>
-          <a:lstStyle/>
-          <a:p>
-            <a:pPr algn="ctr"/>
-          </a:p>
-        </p:txBody>
-      </p:sp>
-      <p:sp>
-        <p:nvSpPr>
-          <p:cNvPr id="38" name="Rounded Rectangle 37"/>
-          <p:cNvSpPr/>
-          <p:nvPr/>
-        </p:nvSpPr>
-        <p:spPr>
-          <a:xfrm>
-            <a:off x="9144000" y="1905000"/>
-            <a:ext cx="2857500" cy="1123950"/>
-          </a:xfrm>
-          <a:prstGeom prst="roundRect">
-            <a:avLst>
-              <a:gd name="adj" fmla="val 8000"/>
-            </a:avLst>
-          </a:prstGeom>
-          <a:solidFill>
-            <a:srgbClr val="F1F5F9"/>
-          </a:solidFill>
-          <a:ln>
-            <a:noFill/>
-          </a:ln>
-          <a:effectLst/>
-        </p:spPr>
-        <p:style>
-          <a:lnRef idx="1">
-            <a:schemeClr val="accent1"/>
-          </a:lnRef>
-          <a:fillRef idx="3">
-            <a:schemeClr val="accent1"/>
-          </a:fillRef>
-          <a:effectRef idx="2">
-            <a:schemeClr val="accent1"/>
-          </a:effectRef>
-          <a:fontRef idx="minor">
-            <a:schemeClr val="lt1"/>
-          </a:fontRef>
-        </p:style>
-        <p:txBody>
-          <a:bodyPr rtlCol="0" anchor="ctr"/>
-          <a:lstStyle/>
-          <a:p>
-            <a:pPr algn="ctr"/>
-          </a:p>
-        </p:txBody>
-      </p:sp>
-      <p:sp>
-        <p:nvSpPr>
-          <p:cNvPr id="39" name="Rectangle 38"/>
-          <p:cNvSpPr/>
-          <p:nvPr/>
-        </p:nvSpPr>
-        <p:spPr>
-          <a:xfrm>
-            <a:off x="9144000" y="1905000"/>
-            <a:ext cx="2857500" cy="38100"/>
-          </a:xfrm>
-          <a:prstGeom prst="rect">
-            <a:avLst/>
-          </a:prstGeom>
-          <a:solidFill>
-            <a:srgbClr val="2563EB"/>
-          </a:solidFill>
-          <a:ln>
-            <a:noFill/>
-          </a:ln>
-          <a:effectLst/>
-        </p:spPr>
-        <p:style>
-          <a:lnRef idx="1">
-            <a:schemeClr val="accent1"/>
-          </a:lnRef>
-          <a:fillRef idx="3">
-            <a:schemeClr val="accent1"/>
-          </a:fillRef>
-          <a:effectRef idx="2">
-            <a:schemeClr val="accent1"/>
-          </a:effectRef>
-          <a:fontRef idx="minor">
-            <a:schemeClr val="lt1"/>
-          </a:fontRef>
-        </p:style>
-        <p:txBody>
-          <a:bodyPr rtlCol="0" anchor="ctr"/>
-          <a:lstStyle/>
-          <a:p>
-            <a:pPr algn="ctr"/>
-          </a:p>
-        </p:txBody>
-      </p:sp>
-      <p:sp>
-        <p:nvSpPr>
-          <p:cNvPr id="40" name="TextBox 39"/>
-          <p:cNvSpPr txBox="1"/>
-          <p:nvPr/>
-        </p:nvSpPr>
-        <p:spPr>
-          <a:xfrm>
-            <a:off x="9239250" y="2000250"/>
-            <a:ext cx="2667000" cy="285750"/>
-          </a:xfrm>
-          <a:prstGeom prst="rect">
-            <a:avLst/>
-          </a:prstGeom>
-          <a:noFill/>
-        </p:spPr>
-        <p:txBody>
-          <a:bodyPr wrap="square" anchor="ctr">
-            <a:spAutoFit/>
-          </a:bodyPr>
-          <a:lstStyle/>
-          <a:p>
-            <a:pPr algn="ctr">
-              <a:lnSpc>
-                <a:spcPct val="100000"/>
-              </a:lnSpc>
-            </a:pPr>
-            <a:r>
-              <a:rPr sz="1400" b="1">
-                <a:solidFill>
-                  <a:srgbClr val="2563EB"/>
-                </a:solidFill>
-                <a:latin typeface="PingFang SC"/>
-              </a:rPr>
-              <a:t>下线</a:t>
-            </a:r>
-          </a:p>
-        </p:txBody>
-      </p:sp>
-      <p:sp>
-        <p:nvSpPr>
-          <p:cNvPr id="41" name="TextBox 40"/>
-          <p:cNvSpPr txBox="1"/>
-          <p:nvPr/>
-        </p:nvSpPr>
-        <p:spPr>
-          <a:xfrm>
-            <a:off x="9239250" y="2305050"/>
-            <a:ext cx="2667000" cy="666750"/>
-          </a:xfrm>
-          <a:prstGeom prst="rect">
-            <a:avLst/>
-          </a:prstGeom>
-          <a:noFill/>
-        </p:spPr>
-        <p:txBody>
-          <a:bodyPr wrap="square" anchor="ctr">
-            <a:spAutoFit/>
-          </a:bodyPr>
-          <a:lstStyle/>
-          <a:p>
-            <a:pPr algn="l">
-              <a:lnSpc>
-                <a:spcPct val="105000"/>
-              </a:lnSpc>
-            </a:pPr>
-            <a:r>
-              <a:rPr sz="1050" b="0">
-                <a:solidFill>
-                  <a:srgbClr val="475569"/>
-                </a:solidFill>
-                <a:latin typeface="PingFang SC"/>
-              </a:rPr>
-              <a:t>低分淘汰|版本回退直接 ValueError</a:t>
-            </a:r>
-          </a:p>
-        </p:txBody>
-      </p:sp>
-      <p:sp>
-        <p:nvSpPr>
-          <p:cNvPr id="42" name="TextBox 41"/>
-          <p:cNvSpPr txBox="1"/>
-          <p:nvPr/>
-        </p:nvSpPr>
-        <p:spPr>
-          <a:xfrm>
-            <a:off x="10287000" y="6534150"/>
-            <a:ext cx="1619250" cy="266700"/>
-          </a:xfrm>
-          <a:prstGeom prst="rect">
-            <a:avLst/>
-          </a:prstGeom>
-          <a:noFill/>
-        </p:spPr>
-        <p:txBody>
-          <a:bodyPr wrap="square" anchor="ctr">
-            <a:spAutoFit/>
-          </a:bodyPr>
-          <a:lstStyle/>
-          <a:p>
-            <a:pPr algn="r">
-              <a:lnSpc>
-                <a:spcPct val="100000"/>
-              </a:lnSpc>
-            </a:pPr>
-            <a:r>
               <a:rPr sz="900" b="0">
                 <a:solidFill>
                   <a:srgbClr val="94A3B8"/>
@@ -24680,7 +24764,7 @@
       </p:sp>
       <p:sp>
         <p:nvSpPr>
-          <p:cNvPr id="43" name="TextBox 42"/>
+          <p:cNvPr id="42" name="TextBox 41"/>
           <p:cNvSpPr txBox="1"/>
           <p:nvPr/>
         </p:nvSpPr>

--- a/03-课件PPT/讲次版/第5章-3-讲次 5-3 · Skill 系统.pptx
+++ b/03-课件PPT/讲次版/第5章-3-讲次 5-3 · Skill 系统.pptx
@@ -10288,8 +10288,8 @@
         </p:nvSpPr>
         <p:spPr>
           <a:xfrm>
-            <a:off x="5500687" y="2133600"/>
-            <a:ext cx="1123950" cy="285750"/>
+            <a:off x="5500687" y="2124075"/>
+            <a:ext cx="1123950" cy="304800"/>
           </a:xfrm>
           <a:prstGeom prst="roundRect">
             <a:avLst>
@@ -10336,8 +10336,8 @@
         </p:nvSpPr>
         <p:spPr>
           <a:xfrm>
-            <a:off x="5500687" y="2133600"/>
-            <a:ext cx="1123950" cy="285750"/>
+            <a:off x="5500687" y="2124075"/>
+            <a:ext cx="1123950" cy="304800"/>
           </a:xfrm>
           <a:prstGeom prst="rect">
             <a:avLst/>
@@ -10374,247 +10374,136 @@
           <p:nvPr/>
         </p:nvCxnSpPr>
         <p:spPr>
-          <a:xfrm flipV="1">
-            <a:off x="8572500" y="1562100"/>
-            <a:ext cx="0" cy="419100"/>
+          <a:xfrm>
+            <a:off x="4714875" y="3705225"/>
+            <a:ext cx="2695575" cy="0"/>
           </a:xfrm>
           <a:prstGeom prst="line">
             <a:avLst/>
           </a:prstGeom>
+          <a:ln w="19050">
+            <a:solidFill>
+              <a:srgbClr val="2563EB"/>
+            </a:solidFill>
+          </a:ln>
+        </p:spPr>
+        <p:style>
+          <a:lnRef idx="2">
+            <a:schemeClr val="accent1"/>
+          </a:lnRef>
+          <a:fillRef idx="0">
+            <a:schemeClr val="accent1"/>
+          </a:fillRef>
+          <a:effectRef idx="1">
+            <a:schemeClr val="accent1"/>
+          </a:effectRef>
+          <a:fontRef idx="minor">
+            <a:schemeClr val="tx1"/>
+          </a:fontRef>
+        </p:style>
+      </p:cxnSp>
+      <p:sp>
+        <p:nvSpPr>
+          <p:cNvPr id="18" name="Isosceles Triangle 17"/>
+          <p:cNvSpPr/>
+          <p:nvPr/>
+        </p:nvSpPr>
+        <p:spPr>
+          <a:xfrm rot="5400000">
+            <a:off x="7324726" y="3662363"/>
+            <a:ext cx="85725" cy="85725"/>
+          </a:xfrm>
+          <a:prstGeom prst="triangle">
+            <a:avLst/>
+          </a:prstGeom>
+          <a:solidFill>
+            <a:srgbClr val="2563EB"/>
+          </a:solidFill>
+          <a:ln>
+            <a:noFill/>
+          </a:ln>
+          <a:effectLst/>
+        </p:spPr>
+        <p:style>
+          <a:lnRef idx="1">
+            <a:schemeClr val="accent1"/>
+          </a:lnRef>
+          <a:fillRef idx="3">
+            <a:schemeClr val="accent1"/>
+          </a:fillRef>
+          <a:effectRef idx="2">
+            <a:schemeClr val="accent1"/>
+          </a:effectRef>
+          <a:fontRef idx="minor">
+            <a:schemeClr val="lt1"/>
+          </a:fontRef>
+        </p:style>
+        <p:txBody>
+          <a:bodyPr rtlCol="0" anchor="ctr"/>
+          <a:lstStyle/>
+          <a:p>
+            <a:pPr algn="ctr"/>
+          </a:p>
+        </p:txBody>
+      </p:sp>
+      <p:sp>
+        <p:nvSpPr>
+          <p:cNvPr id="19" name="Rounded Rectangle 18"/>
+          <p:cNvSpPr/>
+          <p:nvPr/>
+        </p:nvSpPr>
+        <p:spPr>
+          <a:xfrm>
+            <a:off x="5500687" y="3552825"/>
+            <a:ext cx="1123950" cy="304800"/>
+          </a:xfrm>
+          <a:prstGeom prst="roundRect">
+            <a:avLst>
+              <a:gd name="adj" fmla="val 8000"/>
+            </a:avLst>
+          </a:prstGeom>
+          <a:solidFill>
+            <a:srgbClr val="FFFFFF"/>
+          </a:solidFill>
           <a:ln w="12700">
             <a:solidFill>
               <a:srgbClr val="DDE5EE"/>
             </a:solidFill>
-            <a:prstDash val="dash"/>
-          </a:ln>
-          <a:effectLst/>
-        </p:spPr>
-        <p:style>
-          <a:lnRef idx="2">
-            <a:schemeClr val="accent1"/>
-          </a:lnRef>
-          <a:fillRef idx="0">
-            <a:schemeClr val="accent1"/>
-          </a:fillRef>
-          <a:effectRef idx="1">
-            <a:schemeClr val="accent1"/>
-          </a:effectRef>
-          <a:fontRef idx="minor">
-            <a:schemeClr val="tx1"/>
-          </a:fontRef>
-        </p:style>
-      </p:cxnSp>
-      <p:cxnSp>
-        <p:nvCxnSpPr>
-          <p:cNvPr id="18" name="Connector 17"/>
-          <p:cNvCxnSpPr/>
-          <p:nvPr/>
-        </p:nvCxnSpPr>
-        <p:spPr>
-          <a:xfrm flipH="1">
-            <a:off x="3619500" y="1562100"/>
-            <a:ext cx="4953000" cy="0"/>
-          </a:xfrm>
-          <a:prstGeom prst="line">
-            <a:avLst/>
-          </a:prstGeom>
-          <a:ln w="12700">
-            <a:solidFill>
-              <a:srgbClr val="DDE5EE"/>
-            </a:solidFill>
-            <a:prstDash val="dash"/>
-          </a:ln>
-          <a:effectLst/>
-        </p:spPr>
-        <p:style>
-          <a:lnRef idx="2">
-            <a:schemeClr val="accent1"/>
-          </a:lnRef>
-          <a:fillRef idx="0">
-            <a:schemeClr val="accent1"/>
-          </a:fillRef>
-          <a:effectRef idx="1">
-            <a:schemeClr val="accent1"/>
-          </a:effectRef>
-          <a:fontRef idx="minor">
-            <a:schemeClr val="tx1"/>
-          </a:fontRef>
-        </p:style>
-      </p:cxnSp>
-      <p:cxnSp>
-        <p:nvCxnSpPr>
-          <p:cNvPr id="19" name="Connector 18"/>
-          <p:cNvCxnSpPr/>
-          <p:nvPr/>
-        </p:nvCxnSpPr>
-        <p:spPr>
-          <a:xfrm>
-            <a:off x="3619500" y="1562100"/>
-            <a:ext cx="0" cy="1781175"/>
-          </a:xfrm>
-          <a:prstGeom prst="line">
-            <a:avLst/>
-          </a:prstGeom>
-          <a:ln w="12700">
-            <a:solidFill>
-              <a:srgbClr val="DDE5EE"/>
-            </a:solidFill>
-            <a:prstDash val="dash"/>
-          </a:ln>
-          <a:effectLst/>
-        </p:spPr>
-        <p:style>
-          <a:lnRef idx="2">
-            <a:schemeClr val="accent1"/>
-          </a:lnRef>
-          <a:fillRef idx="0">
-            <a:schemeClr val="accent1"/>
-          </a:fillRef>
-          <a:effectRef idx="1">
-            <a:schemeClr val="accent1"/>
-          </a:effectRef>
-          <a:fontRef idx="minor">
-            <a:schemeClr val="tx1"/>
-          </a:fontRef>
-        </p:style>
-      </p:cxnSp>
-      <p:cxnSp>
-        <p:nvCxnSpPr>
-          <p:cNvPr id="20" name="Connector 19"/>
-          <p:cNvCxnSpPr/>
-          <p:nvPr/>
-        </p:nvCxnSpPr>
-        <p:spPr>
-          <a:xfrm>
-            <a:off x="4714875" y="3705225"/>
-            <a:ext cx="2695575" cy="0"/>
-          </a:xfrm>
-          <a:prstGeom prst="line">
-            <a:avLst/>
-          </a:prstGeom>
-          <a:ln w="19050">
-            <a:solidFill>
-              <a:srgbClr val="2563EB"/>
-            </a:solidFill>
-          </a:ln>
-        </p:spPr>
-        <p:style>
-          <a:lnRef idx="2">
-            <a:schemeClr val="accent1"/>
-          </a:lnRef>
-          <a:fillRef idx="0">
-            <a:schemeClr val="accent1"/>
-          </a:fillRef>
-          <a:effectRef idx="1">
-            <a:schemeClr val="accent1"/>
-          </a:effectRef>
-          <a:fontRef idx="minor">
-            <a:schemeClr val="tx1"/>
-          </a:fontRef>
-        </p:style>
-      </p:cxnSp>
-      <p:sp>
-        <p:nvSpPr>
-          <p:cNvPr id="21" name="Isosceles Triangle 20"/>
-          <p:cNvSpPr/>
-          <p:nvPr/>
-        </p:nvSpPr>
-        <p:spPr>
-          <a:xfrm rot="5400000">
-            <a:off x="7324726" y="3662363"/>
-            <a:ext cx="85725" cy="85725"/>
-          </a:xfrm>
-          <a:prstGeom prst="triangle">
-            <a:avLst/>
-          </a:prstGeom>
-          <a:solidFill>
-            <a:srgbClr val="2563EB"/>
-          </a:solidFill>
-          <a:ln>
-            <a:noFill/>
-          </a:ln>
-          <a:effectLst/>
-        </p:spPr>
-        <p:style>
-          <a:lnRef idx="1">
-            <a:schemeClr val="accent1"/>
-          </a:lnRef>
-          <a:fillRef idx="3">
-            <a:schemeClr val="accent1"/>
-          </a:fillRef>
-          <a:effectRef idx="2">
-            <a:schemeClr val="accent1"/>
-          </a:effectRef>
-          <a:fontRef idx="minor">
-            <a:schemeClr val="lt1"/>
-          </a:fontRef>
-        </p:style>
-        <p:txBody>
-          <a:bodyPr rtlCol="0" anchor="ctr"/>
-          <a:lstStyle/>
-          <a:p>
-            <a:pPr algn="ctr"/>
-          </a:p>
-        </p:txBody>
-      </p:sp>
-      <p:sp>
-        <p:nvSpPr>
-          <p:cNvPr id="22" name="Rounded Rectangle 21"/>
-          <p:cNvSpPr/>
-          <p:nvPr/>
-        </p:nvSpPr>
-        <p:spPr>
-          <a:xfrm>
-            <a:off x="5500687" y="3562350"/>
-            <a:ext cx="1123950" cy="285750"/>
-          </a:xfrm>
-          <a:prstGeom prst="roundRect">
-            <a:avLst>
-              <a:gd name="adj" fmla="val 8000"/>
-            </a:avLst>
-          </a:prstGeom>
-          <a:solidFill>
-            <a:srgbClr val="FFFFFF"/>
-          </a:solidFill>
-          <a:ln w="12700">
-            <a:solidFill>
-              <a:srgbClr val="DDE5EE"/>
-            </a:solidFill>
-          </a:ln>
-          <a:effectLst/>
-        </p:spPr>
-        <p:style>
-          <a:lnRef idx="1">
-            <a:schemeClr val="accent1"/>
-          </a:lnRef>
-          <a:fillRef idx="3">
-            <a:schemeClr val="accent1"/>
-          </a:fillRef>
-          <a:effectRef idx="2">
-            <a:schemeClr val="accent1"/>
-          </a:effectRef>
-          <a:fontRef idx="minor">
-            <a:schemeClr val="lt1"/>
-          </a:fontRef>
-        </p:style>
-        <p:txBody>
-          <a:bodyPr rtlCol="0" anchor="ctr"/>
-          <a:lstStyle/>
-          <a:p>
-            <a:pPr algn="ctr"/>
-          </a:p>
-        </p:txBody>
-      </p:sp>
-      <p:sp>
-        <p:nvSpPr>
-          <p:cNvPr id="23" name="TextBox 22"/>
+          </a:ln>
+          <a:effectLst/>
+        </p:spPr>
+        <p:style>
+          <a:lnRef idx="1">
+            <a:schemeClr val="accent1"/>
+          </a:lnRef>
+          <a:fillRef idx="3">
+            <a:schemeClr val="accent1"/>
+          </a:fillRef>
+          <a:effectRef idx="2">
+            <a:schemeClr val="accent1"/>
+          </a:effectRef>
+          <a:fontRef idx="minor">
+            <a:schemeClr val="lt1"/>
+          </a:fontRef>
+        </p:style>
+        <p:txBody>
+          <a:bodyPr rtlCol="0" anchor="ctr"/>
+          <a:lstStyle/>
+          <a:p>
+            <a:pPr algn="ctr"/>
+          </a:p>
+        </p:txBody>
+      </p:sp>
+      <p:sp>
+        <p:nvSpPr>
+          <p:cNvPr id="20" name="TextBox 19"/>
           <p:cNvSpPr txBox="1"/>
           <p:nvPr/>
         </p:nvSpPr>
         <p:spPr>
           <a:xfrm>
-            <a:off x="5500687" y="3562350"/>
-            <a:ext cx="1123950" cy="285750"/>
+            <a:off x="5500687" y="3552825"/>
+            <a:ext cx="1123950" cy="304800"/>
           </a:xfrm>
           <a:prstGeom prst="rect">
             <a:avLst/>
@@ -10646,7 +10535,7 @@
       </p:sp>
       <p:cxnSp>
         <p:nvCxnSpPr>
-          <p:cNvPr id="24" name="Connector 23"/>
+          <p:cNvPr id="21" name="Connector 20"/>
           <p:cNvCxnSpPr/>
           <p:nvPr/>
         </p:nvCxnSpPr>
@@ -10681,7 +10570,7 @@
       </p:cxnSp>
       <p:sp>
         <p:nvSpPr>
-          <p:cNvPr id="25" name="Isosceles Triangle 24"/>
+          <p:cNvPr id="22" name="Isosceles Triangle 21"/>
           <p:cNvSpPr/>
           <p:nvPr/>
         </p:nvSpPr>
@@ -10725,14 +10614,14 @@
       </p:sp>
       <p:sp>
         <p:nvSpPr>
-          <p:cNvPr id="26" name="Rounded Rectangle 25"/>
-          <p:cNvSpPr/>
-          <p:nvPr/>
-        </p:nvSpPr>
-        <p:spPr>
-          <a:xfrm>
-            <a:off x="5567362" y="2133600"/>
-            <a:ext cx="1123950" cy="285750"/>
+          <p:cNvPr id="23" name="Rounded Rectangle 22"/>
+          <p:cNvSpPr/>
+          <p:nvPr/>
+        </p:nvSpPr>
+        <p:spPr>
+          <a:xfrm>
+            <a:off x="5567362" y="2124075"/>
+            <a:ext cx="1123950" cy="304800"/>
           </a:xfrm>
           <a:prstGeom prst="roundRect">
             <a:avLst>
@@ -10773,14 +10662,14 @@
       </p:sp>
       <p:sp>
         <p:nvSpPr>
-          <p:cNvPr id="27" name="TextBox 26"/>
+          <p:cNvPr id="24" name="TextBox 23"/>
           <p:cNvSpPr txBox="1"/>
           <p:nvPr/>
         </p:nvSpPr>
         <p:spPr>
           <a:xfrm>
-            <a:off x="5567362" y="2133600"/>
-            <a:ext cx="1123950" cy="285750"/>
+            <a:off x="5567362" y="2124075"/>
+            <a:ext cx="1123950" cy="304800"/>
           </a:xfrm>
           <a:prstGeom prst="rect">
             <a:avLst/>
@@ -10812,7 +10701,92 @@
       </p:sp>
       <p:sp>
         <p:nvSpPr>
-          <p:cNvPr id="28" name="TextBox 27"/>
+          <p:cNvPr id="25" name="Rounded Rectangle 24"/>
+          <p:cNvSpPr/>
+          <p:nvPr/>
+        </p:nvSpPr>
+        <p:spPr>
+          <a:xfrm>
+            <a:off x="1143000" y="6229350"/>
+            <a:ext cx="9906000" cy="381000"/>
+          </a:xfrm>
+          <a:prstGeom prst="roundRect">
+            <a:avLst>
+              <a:gd name="adj" fmla="val 8000"/>
+            </a:avLst>
+          </a:prstGeom>
+          <a:solidFill>
+            <a:srgbClr val="F1F5F9"/>
+          </a:solidFill>
+          <a:ln>
+            <a:noFill/>
+          </a:ln>
+          <a:effectLst/>
+        </p:spPr>
+        <p:style>
+          <a:lnRef idx="1">
+            <a:schemeClr val="accent1"/>
+          </a:lnRef>
+          <a:fillRef idx="3">
+            <a:schemeClr val="accent1"/>
+          </a:fillRef>
+          <a:effectRef idx="2">
+            <a:schemeClr val="accent1"/>
+          </a:effectRef>
+          <a:fontRef idx="minor">
+            <a:schemeClr val="lt1"/>
+          </a:fontRef>
+        </p:style>
+        <p:txBody>
+          <a:bodyPr rtlCol="0" anchor="ctr"/>
+          <a:lstStyle/>
+          <a:p>
+            <a:pPr algn="ctr"/>
+          </a:p>
+        </p:txBody>
+      </p:sp>
+      <p:sp>
+        <p:nvSpPr>
+          <p:cNvPr id="26" name="TextBox 25"/>
+          <p:cNvSpPr txBox="1"/>
+          <p:nvPr/>
+        </p:nvSpPr>
+        <p:spPr>
+          <a:xfrm>
+            <a:off x="1295400" y="6229350"/>
+            <a:ext cx="9601200" cy="381000"/>
+          </a:xfrm>
+          <a:prstGeom prst="rect">
+            <a:avLst/>
+          </a:prstGeom>
+          <a:noFill/>
+        </p:spPr>
+        <p:txBody>
+          <a:bodyPr wrap="square" anchor="ctr">
+            <a:spAutoFit/>
+          </a:bodyPr>
+          <a:lstStyle/>
+          <a:p>
+            <a:pPr algn="l">
+              <a:lnSpc>
+                <a:spcPct val="100000"/>
+              </a:lnSpc>
+            </a:pPr>
+            <a:r>
+              <a:rPr sz="1100" b="0">
+                <a:solidFill>
+                  <a:srgbClr val="475569"/>
+                </a:solidFill>
+                <a:latin typeface="PingFang SC"/>
+              </a:rPr>
+              <a:t>非相邻转移:review → active</a:t>
+            </a:r>
+          </a:p>
+        </p:txBody>
+      </p:sp>
+      <p:sp>
+        <p:nvSpPr>
+          <p:cNvPr id="27" name="TextBox 26"/>
           <p:cNvSpPr txBox="1"/>
           <p:nvPr/>
         </p:nvSpPr>
@@ -10851,7 +10825,7 @@
       </p:sp>
       <p:sp>
         <p:nvSpPr>
-          <p:cNvPr id="29" name="TextBox 28"/>
+          <p:cNvPr id="28" name="TextBox 27"/>
           <p:cNvSpPr txBox="1"/>
           <p:nvPr/>
         </p:nvSpPr>
